--- a/01-slides/W03-UML-Essentials-and-Modeling-Workflow.pptx
+++ b/01-slides/W03-UML-Essentials-and-Modeling-Workflow.pptx
@@ -581,7 +581,7 @@
   <p:cSld>
     <p:spTree>
       <p:nvGrpSpPr>
-        <p:cNvPr id="1" name="" descr="&lt;Slide style={{ background: '#0E3F8C', padding: 0 }}&gt;&#10;  &lt;Box style={{ flexDirection: 'column', height: '100%', justifyContent: 'center', padding: '0 80px', position: 'relative' }}&gt;&#10;    &lt;Box style={{ position: 'absolute', top: 0, left: 0, right: 0, height: 8, background: '#1E4FA8' }} /&gt;&#10;    &lt;Box style={{ position: 'absolute', top: 8, left: 0, right: 0, height: 2, background: '#3D7BD9' }} /&gt;&#10;    &lt;Box style={{ flexDirection: 'row', alignItems: 'center', gap: 14, marginBottom: 30 }}&gt;&#10;      &lt;Box style={{ padding: '7px 18px', background: '#3D7BD9', borderRadius: 18 }}&gt;&#10;        &lt;Text style={{ fontSize: 16, color: '#FFFFFF', fontWeight: 'bold', letterSpacing: 2 }}&gt;ISAD · WEEK 03&lt;/Text&gt;&#10;      &lt;/Box&gt;&#10;      &lt;Box style={{ width: 56, height: 1, background: '#5B84C4' }} /&gt;&#10;      &lt;Text style={{ fontSize: 16, color: '#7FA2D6', letterSpacing: 1 }}&gt;MODULE A · FOUNDATIONS&lt;/Text&gt;&#10;    &lt;/Box&gt;&#10;    &lt;Text style={{ fontSize: 58, fontWeight: 'bold', color: '#FFFFFF', fontFamily: 'Georgia, serif', lineHeight: 1.12 }}&gt;&#10;      UML Essentials&#10;      &lt;br /&gt;&#10;      &amp;amp; Modeling Workflow&#10;    &lt;/Text&gt;&#10;    &lt;Box style={{ width: 88, height: 5, background: '#FFC107', marginTop: 28, marginBottom: 22 }} /&gt;&#10;    &lt;Text style={{ fontSize: 26, color: '#B9CDF0', lineHeight: 1.45 }}&gt;&#10;      The Diagram Family, the Notation, and the Chain That Links Them&#10;    &lt;/Text&gt;&#10;    &lt;Box style={{ position: 'absolute', bottom: 46, left: 80, right: 80, flexDirection: 'row', justifyContent: 'space-between', alignItems: 'center', borderTop: '1px solid #2B5793', paddingTop: 18 }}&gt;&#10;      &lt;Text style={{ fontSize: 17, color: '#C5D4EA' }}&gt;Ren Zheng · School of Software Engineering&lt;/Text&gt;&#10;      &lt;Text style={{ fontSize: 17, color: '#C5D4EA' }}&gt;Fall 2026&lt;/Text&gt;&#10;    &lt;/Box&gt;&#10;  &lt;/Box&gt;&#10;&lt;/Slide&gt;"/>
+        <p:cNvPr id="1" name=""/>
         <p:cNvGrpSpPr/>
         <p:nvPr/>
       </p:nvGrpSpPr>
@@ -614,7 +614,10 @@
         </p:spPr>
         <p:txBody>
           <a:bodyPr/>
-          <a:p/>
+          <a:p>
+            <a:pPr/>
+            <a:endParaRPr/>
+          </a:p>
         </p:txBody>
       </p:sp>
       <p:sp>
@@ -640,7 +643,10 @@
         </p:spPr>
         <p:txBody>
           <a:bodyPr/>
-          <a:p/>
+          <a:p>
+            <a:pPr/>
+            <a:endParaRPr/>
+          </a:p>
         </p:txBody>
       </p:sp>
       <p:sp>
@@ -699,7 +705,10 @@
         </p:spPr>
         <p:txBody>
           <a:bodyPr/>
-          <a:p/>
+          <a:p>
+            <a:pPr/>
+            <a:endParaRPr/>
+          </a:p>
         </p:txBody>
       </p:sp>
       <p:sp>
@@ -811,7 +820,10 @@
         </p:spPr>
         <p:txBody>
           <a:bodyPr/>
-          <a:p/>
+          <a:p>
+            <a:pPr/>
+            <a:endParaRPr/>
+          </a:p>
         </p:txBody>
       </p:sp>
       <p:sp>
@@ -870,7 +882,10 @@
         </p:spPr>
         <p:txBody>
           <a:bodyPr/>
-          <a:p/>
+          <a:p>
+            <a:pPr/>
+            <a:endParaRPr/>
+          </a:p>
         </p:txBody>
       </p:sp>
       <p:sp>
@@ -894,7 +909,10 @@
         </p:spPr>
         <p:txBody>
           <a:bodyPr/>
-          <a:p/>
+          <a:p>
+            <a:pPr/>
+            <a:endParaRPr/>
+          </a:p>
         </p:txBody>
       </p:sp>
       <p:sp>
@@ -934,7 +952,10 @@
         </p:spPr>
         <p:txBody>
           <a:bodyPr/>
-          <a:p/>
+          <a:p>
+            <a:pPr/>
+            <a:endParaRPr/>
+          </a:p>
         </p:txBody>
       </p:sp>
       <p:sp>
@@ -1017,7 +1038,7 @@
   <p:cSld>
     <p:spTree>
       <p:nvGrpSpPr>
-        <p:cNvPr id="15" name="" descr="&lt;Slide style={{ background: '#FFFFFF', padding: 0 }}&gt;&#10;  &lt;Box style={{ height: 72, background: '#1E4FA8', padding: '0 40px', flexDirection: 'row', alignItems: 'center', justifyContent: 'space-between' }}&gt;&#10;    &lt;Text style={{ fontSize: 15, color: '#B9CDF0', letterSpacing: 1 }}&gt;ISAD · INFORMATION SYSTEMS ANALYSIS &amp;amp; DESIGN&lt;/Text&gt;&#10;    &lt;Text style={{ fontSize: 15, color: '#B9CDF0' }}&gt;W03 · THE UML MAP&lt;/Text&gt;&#10;  &lt;/Box&gt;&#10;  &lt;Box style={{ padding: '18px 40px 4px 40px', flexDirection: 'row', alignItems: 'center', justifyContent: 'space-between' }}&gt;&#10;    &lt;Text style={{ fontSize: 30, fontWeight: 'bold', color: '#0E3F8C' }}&gt;Which Diagram Answers Which Question&lt;/Text&gt;&#10;    &lt;Text style={{ fontSize: 14, color: '#1E4FA8', fontWeight: 'bold' }}&gt;10 / 38&lt;/Text&gt;&#10;  &lt;/Box&gt;&#10;  &lt;Box style={{ flex: 1, padding: '10px 40px 6px 40px' }}&gt;&#10;    &lt;Table&#10;      style={{ width: '100%', height: '100%' }}&#10;      defaultTextStyle={{ fontSize: 15, textAlign: 'left', color: '#1A2230' }}&#10;      defaultCellStyle={{&#10;        border: {&#10;          left: { width: 1, color: '#E5E7EB' },&#10;          right: { width: 1, color: '#E5E7EB' },&#10;          top: { width: 1, color: '#E5E7EB' },&#10;          bottom: { width: 1, color: '#E5E7EB' },&#10;        },&#10;      }}&#10;      cells={[&#10;        [&#10;          { text: 'The question you are asking', textStyle: { bold: true, color: '#FFFFFF', textAlign: 'left' }, cellStyle: { background: { color: '#0E3F8C' } } },&#10;          { text: 'The diagram that answers it', textStyle: { bold: true, color: '#FFFFFF', textAlign: 'left' }, cellStyle: { background: { color: '#1E4FA8' } } },&#10;          { text: 'Drawn in', textStyle: { bold: true, color: '#FFFFFF', textAlign: 'left' }, cellStyle: { background: { color: '#3D7BD9' } } },&#10;        ],&#10;        [&#10;          { text: 'What does the system do, for each kind of user?', textStyle: { bold: true, color: '#0E3F8C' }, cellStyle: { background: { color: '#F7F9FC' } } },&#10;          { text: 'Use case diagram', textStyle: { color: '#4A5568' }, cellStyle: { background: { color: '#F7F9FC' } } },&#10;          { text: 'Weeks 04–05', textStyle: { color: '#4A5568' }, cellStyle: { background: { color: '#F7F9FC' } } },&#10;        ],&#10;        [&#10;          { text: 'Which words does the business actually use?', textStyle: { bold: true, color: '#0E3F8C' } },&#10;          { text: 'Domain model — a class diagram', textStyle: { color: '#4A5568' } },&#10;          { text: 'Week 06', textStyle: { color: '#4A5568' } },&#10;        ],&#10;        [&#10;          { text: 'Who calls whom to make this scenario work?', textStyle: { bold: true, color: '#0E3F8C' }, cellStyle: { background: { color: '#F7F9FC' } } },&#10;          { text: 'Sequence diagram', textStyle: { color: '#4A5568' }, cellStyle: { background: { color: '#F7F9FC' } } },&#10;          { text: 'Week 08', textStyle: { color: '#4A5568' }, cellStyle: { background: { color: '#F7F9FC' } } },&#10;        ],&#10;        [&#10;          { text: 'What can happen to this one object over time?', textStyle: { bold: true, color: '#0E3F8C' } },&#10;          { text: 'State machine diagram', textStyle: { color: '#4A5568' } },&#10;          { text: 'Week 09', textStyle: { color: '#4A5568' } },&#10;        ],&#10;        [&#10;          { text: 'What are the steps, and which can run at once?', textStyle: { bold: true, color: '#0E3F8C' }, cellStyle: { background: { color: '#F7F9FC' } } },&#10;          { text: 'Activity diagram', textStyle: { color: '#4A5568' }, cellStyle: { background: { color: '#F7F9FC' } } },&#10;          { text: 'Week 09', textStyle: { color: '#4A5568' }, cellStyle: { background: { color: '#F7F9FC' } } },&#10;        ],&#10;        [&#10;          { text: 'How is the code cut into parts?', textStyle: { bold: true, color: '#0E3F8C' } },&#10;          { text: 'Package diagram', textStyle: { color: '#4A5568' } },&#10;          { text: 'Week 14', textStyle: { color: '#4A5568' } },&#10;        ],&#10;      ]}&#10;    /&gt;&#10;  &lt;/Box&gt;&#10;  &lt;Box style={{ height: 46, background: '#0E3F8C', padding: '0 40px', flexDirection: 'row', alignItems: 'center', justifyContent: 'center' }}&gt;&#10;    &lt;Text style={{ fontSize: 17, color: '#FFFFFF', fontWeight: '600' }}&gt;Start from the question. The diagram follows it — never the other way round.&lt;/Text&gt;&#10;  &lt;/Box&gt;&#10;&lt;/Slide&gt;"/>
+        <p:cNvPr id="15" name=""/>
         <p:cNvGrpSpPr/>
         <p:nvPr/>
       </p:nvGrpSpPr>
@@ -1050,7 +1071,10 @@
         </p:spPr>
         <p:txBody>
           <a:bodyPr/>
-          <a:p/>
+          <a:p>
+            <a:pPr/>
+            <a:endParaRPr/>
+          </a:p>
         </p:txBody>
       </p:sp>
       <p:sp>
@@ -1074,7 +1098,10 @@
         </p:spPr>
         <p:txBody>
           <a:bodyPr/>
-          <a:p/>
+          <a:p>
+            <a:pPr/>
+            <a:endParaRPr/>
+          </a:p>
         </p:txBody>
       </p:sp>
       <p:sp>
@@ -2182,7 +2209,10 @@
         </p:spPr>
         <p:txBody>
           <a:bodyPr/>
-          <a:p/>
+          <a:p>
+            <a:pPr/>
+            <a:endParaRPr/>
+          </a:p>
         </p:txBody>
       </p:sp>
       <p:sp>
@@ -2230,7 +2260,7 @@
   <p:cSld>
     <p:spTree>
       <p:nvGrpSpPr>
-        <p:cNvPr id="25" name="" descr="&lt;Slide style={{ background: '#FFFFFF', padding: 0 }}&gt;&#10;  &lt;Box style={{ height: 72, background: '#1E4FA8', padding: '0 40px', flexDirection: 'row', alignItems: 'center', justifyContent: 'space-between' }}&gt;&#10;    &lt;Text style={{ fontSize: 15, color: '#B9CDF0', letterSpacing: 1 }}&gt;ISAD · INFORMATION SYSTEMS ANALYSIS &amp;amp; DESIGN&lt;/Text&gt;&#10;    &lt;Text style={{ fontSize: 15, color: '#B9CDF0' }}&gt;W03 · NOTATION&lt;/Text&gt;&#10;  &lt;/Box&gt;&#10;  &lt;Box style={{ padding: '16px 40px 0 40px', flexDirection: 'row', alignItems: 'center', justifyContent: 'space-between' }}&gt;&#10;    &lt;Text style={{ fontSize: 30, fontWeight: 'bold', color: '#0E3F8C' }}&gt;Cheat Sheet — Use Case &amp;amp; Class&lt;/Text&gt;&#10;    &lt;Text style={{ fontSize: 14, color: '#1E4FA8', fontWeight: 'bold' }}&gt;11 / 38&lt;/Text&gt;&#10;  &lt;/Box&gt;&#10;  &lt;Box style={{ flex: 1, padding: '8px 40px 0 40px', flexDirection: 'row', gap: 26 }}&gt;&#10;    &lt;Box style={{ flex: 5, flexDirection: 'column', gap: 8, justifyContent: 'center' }}&gt;&#10;      &lt;Text style={{ fontSize: 18, fontWeight: 'bold', color: '#0E3F8C' }}&gt;Use case diagram — the outside view&lt;/Text&gt;&#10;      &lt;svg width={420} height={300} viewBox='0 0 420 300'&gt;&#10;        &lt;rect x='140' y='24' width='270' height='252' rx='8' fill='#FFFFFF' stroke='#3D7BD9' strokeWidth='1.5' /&gt;&#10;        &lt;text x='150' y='42' fill='#8B97A8' fontSize='11'&gt;CampusBites&lt;/text&gt;&#10;        &lt;circle cx='60' cy='80' r='10' fill='#FFFFFF' stroke='#1E4FA8' strokeWidth='1.8' /&gt;&#10;        &lt;line x1='60' y1='90' x2='60' y2='118' stroke='#1E4FA8' strokeWidth='1.8' /&gt;&#10;        &lt;line x1='46' y1='100' x2='74' y2='100' stroke='#1E4FA8' strokeWidth='1.8' /&gt;&#10;        &lt;line x1='60' y1='118' x2='50' y2='140' stroke='#1E4FA8' strokeWidth='1.8' /&gt;&#10;        &lt;line x1='60' y1='118' x2='70' y2='140' stroke='#1E4FA8' strokeWidth='1.8' /&gt;&#10;        &lt;text x='60' y='158' textAnchor='middle' fill='#1A2230' fontSize='12' fontWeight='bold'&gt;Customer&lt;/text&gt;&#10;        &lt;circle cx='60' cy='205' r='10' fill='#FFFFFF' stroke='#1E4FA8' strokeWidth='1.8' /&gt;&#10;        &lt;line x1='60' y1='215' x2='60' y2='243' stroke='#1E4FA8' strokeWidth='1.8' /&gt;&#10;        &lt;line x1='46' y1='225' x2='74' y2='225' stroke='#1E4FA8' strokeWidth='1.8' /&gt;&#10;        &lt;line x1='60' y1='243' x2='50' y2='265' stroke='#1E4FA8' strokeWidth='1.8' /&gt;&#10;        &lt;line x1='60' y1='243' x2='70' y2='265' stroke='#1E4FA8' strokeWidth='1.8' /&gt;&#10;        &lt;text x='60' y='283' textAnchor='middle' fill='#1A2230' fontSize='12' fontWeight='bold'&gt;Courier&lt;/text&gt;&#10;        &lt;ellipse cx='275' cy='95' rx='110' ry='28' fill='#E8EFF8' stroke='#1E4FA8' strokeWidth='1.8' /&gt;&#10;        &lt;text x='275' y='100' textAnchor='middle' fill='#0E3F8C' fontSize='13' fontWeight='bold'&gt;Place Order&lt;/text&gt;&#10;        &lt;ellipse cx='275' cy='215' rx='110' ry='28' fill='#E8EFF8' stroke='#1E4FA8' strokeWidth='1.8' /&gt;&#10;        &lt;text x='275' y='220' textAnchor='middle' fill='#0E3F8C' fontSize='13' fontWeight='bold'&gt;Track Delivery&lt;/text&gt;&#10;        &lt;line x1='78' y1='105' x2='163' y2='95' stroke='#1E4FA8' strokeWidth='1.5' /&gt;&#10;        &lt;line x1='78' y1='225' x2='163' y2='215' stroke='#1E4FA8' strokeWidth='1.5' /&gt;&#10;        &lt;line x1='275' y1='123' x2='275' y2='185' stroke='#3D7BD9' strokeWidth='1.5' strokeDasharray='5 3' markerEnd='url(#ar11)' /&gt;&#10;        &lt;text x='284' y='158' fill='#3D7BD9' fontSize='11'&gt;«include»&lt;/text&gt;&#10;        &lt;defs&gt;&#10;          &lt;marker id='ar11' markerWidth='8' markerHeight='8' refX='7' refY='4' orient='auto'&gt;&#10;            &lt;path d='M0,0 L8,4 L0,8 z' fill='#3D7BD9' /&gt;&#10;          &lt;/marker&gt;&#10;        &lt;/defs&gt;&#10;      &lt;/svg&gt;&#10;      &lt;Text style={{ fontSize: 13, color: '#8B97A8', lineHeight: 1.5 }}&gt;Actor (outside) · use case (inside the box) · association line · dashed «include».&lt;/Text&gt;&#10;    &lt;/Box&gt;&#10;    &lt;Box style={{ flex: 6, flexDirection: 'column', gap: 8, justifyContent: 'center' }}&gt;&#10;      &lt;Text style={{ fontSize: 18, fontWeight: 'bold', color: '#0E3F8C' }}&gt;Class diagram — the inside view&lt;/Text&gt;&#10;      &lt;svg width={460} height={300} viewBox='0 0 460 300'&gt;&#10;        &lt;rect x='24' y='30' width='196' height='126' rx='4' fill='#FFFFFF' stroke='#1E4FA8' strokeWidth='1.8' /&gt;&#10;        &lt;line x1='24' y1='58' x2='220' y2='58' stroke='#1E4FA8' strokeWidth='1.4' /&gt;&#10;        &lt;line x1='24' y1='118' x2='220' y2='118' stroke='#1E4FA8' strokeWidth='1.4' /&gt;&#10;        &lt;text x='122' y='50' textAnchor='middle' fill='#0E3F8C' fontSize='13' fontWeight='bold'&gt;Order&lt;/text&gt;&#10;        &lt;text x='34' y='74' fill='#4A5568' fontSize='10.5'&gt;- status : OrderStatus&lt;/text&gt;&#10;        &lt;text x='34' y='92' fill='#4A5568' fontSize='10.5'&gt;- placedAt : LocalDateTime&lt;/text&gt;&#10;        &lt;text x='34' y='110' fill='#4A5568' fontSize='10.5'&gt;- lines : OrderLine[0..*]&lt;/text&gt;&#10;        &lt;text x='34' y='134' fill='#4A5568' fontSize='10.5'&gt;+ total() : Money&lt;/text&gt;&#10;        &lt;text x='34' y='150' fill='#4A5568' fontSize='10.5'&gt;+ addItem(i, qty)&lt;/text&gt;&#10;        &lt;rect x='300' y='30' width='146' height='76' rx='4' fill='#FFFFFF' stroke='#1E4FA8' strokeWidth='1.8' /&gt;&#10;        &lt;line x1='300' y1='58' x2='446' y2='58' stroke='#1E4FA8' strokeWidth='1.4' /&gt;&#10;        &lt;text x='373' y='50' textAnchor='middle' fill='#0E3F8C' fontSize='13' fontWeight='bold'&gt;Payment&lt;/text&gt;&#10;        &lt;text x='310' y='74' fill='#4A5568' fontSize='10.5'&gt;+ amount : Money&lt;/text&gt;&#10;        &lt;text x='310' y='92' fill='#4A5568' fontSize='10.5'&gt;+ method : String&lt;/text&gt;&#10;        &lt;line x1='220' y1='68' x2='298' y2='68' stroke='#1E4FA8' strokeWidth='1.6' /&gt;&#10;        &lt;text x='230' y='62' fill='#1E4FA8' fontSize='11' fontWeight='bold'&gt;1&lt;/text&gt;&#10;        &lt;text x='262' y='62' fill='#1E4FA8' fontSize='11' fontWeight='bold'&gt;pays&lt;/text&gt;&#10;        &lt;text x='272' y='84' fill='#1E4FA8' fontSize='11' fontWeight='bold'&gt;0..1&lt;/text&gt;&#10;        &lt;rect x='24' y='210' width='196' height='70' rx='4' fill='#FFFFFF' stroke='#1E4FA8' strokeWidth='1.8' /&gt;&#10;        &lt;line x1='24' y1='238' x2='220' y2='238' stroke='#1E4FA8' strokeWidth='1.4' /&gt;&#10;        &lt;text x='122' y='230' textAnchor='middle' fill='#0E3F8C' fontSize='13' fontWeight='bold'&gt;DeliveryOrder&lt;/text&gt;&#10;        &lt;text x='34' y='256' fill='#4A5568' fontSize='10.5'&gt;+ courier : Courier&lt;/text&gt;&#10;        &lt;text x='34' y='272' fill='#4A5568' fontSize='10.5'&gt;+ slot : TimeSlot&lt;/text&gt;&#10;        &lt;polygon points='122,156 112,176 132,176' fill='#FFFFFF' stroke='#1E4FA8' strokeWidth='1.6' /&gt;&#10;        &lt;line x1='122' y1='176' x2='122' y2='208' stroke='#1E4FA8' strokeWidth='1.6' /&gt;&#10;        &lt;text x='140' y='172' fill='#8B97A8' fontSize='11'&gt;hollow triangle = generalisation&lt;/text&gt;&#10;        &lt;text x='300' y='132' fill='#8B97A8' fontSize='11'&gt;solid line = association,&lt;/text&gt;&#10;        &lt;text x='300' y='148' fill='#8B97A8' fontSize='11'&gt;with a name and multiplicities&lt;/text&gt;&#10;      &lt;/svg&gt;&#10;      &lt;Text style={{ fontSize: 13, color: '#8B97A8', lineHeight: 1.5 }}&gt;Three compartments: name · attributes · operations. Sign visibility with + and −.&lt;/Text&gt;&#10;    &lt;/Box&gt;&#10;  &lt;/Box&gt;&#10;  &lt;Box style={{ height: 36, padding: '0 40px', flexDirection: 'row', alignItems: 'center', justifyContent: 'space-between' }}&gt;&#10;    &lt;Text style={{ fontSize: 13, color: '#8B97A8' }}&gt;ISAD · Fall 2026&lt;/Text&gt;&#10;    &lt;Text style={{ fontSize: 14, color: '#1E4FA8', fontWeight: 'bold' }}&gt;11 / 38&lt;/Text&gt;&#10;  &lt;/Box&gt;&#10;&lt;/Slide&gt;"/>
+        <p:cNvPr id="25" name=""/>
         <p:cNvGrpSpPr/>
         <p:nvPr/>
       </p:nvGrpSpPr>
@@ -2263,7 +2293,10 @@
         </p:spPr>
         <p:txBody>
           <a:bodyPr/>
-          <a:p/>
+          <a:p>
+            <a:pPr/>
+            <a:endParaRPr/>
+          </a:p>
         </p:txBody>
       </p:sp>
       <p:sp>
@@ -2287,7 +2320,10 @@
         </p:spPr>
         <p:txBody>
           <a:bodyPr/>
-          <a:p/>
+          <a:p>
+            <a:pPr/>
+            <a:endParaRPr/>
+          </a:p>
         </p:txBody>
       </p:sp>
       <p:sp>
@@ -2712,7 +2748,7 @@
   <p:cSld>
     <p:spTree>
       <p:nvGrpSpPr>
-        <p:cNvPr id="40" name="" descr="&lt;Slide style={{ background: '#FFFFFF', padding: 0 }}&gt;&#10;  &lt;Box style={{ height: 72, background: '#1E4FA8', padding: '0 40px', flexDirection: 'row', alignItems: 'center', justifyContent: 'space-between' }}&gt;&#10;    &lt;Text style={{ fontSize: 15, color: '#B9CDF0', letterSpacing: 1 }}&gt;ISAD · INFORMATION SYSTEMS ANALYSIS &amp;amp; DESIGN&lt;/Text&gt;&#10;    &lt;Text style={{ fontSize: 15, color: '#B9CDF0' }}&gt;W03 · NOTATION&lt;/Text&gt;&#10;  &lt;/Box&gt;&#10;  &lt;Box style={{ padding: '16px 40px 0 40px', flexDirection: 'row', alignItems: 'center', justifyContent: 'space-between' }}&gt;&#10;    &lt;Text style={{ fontSize: 30, fontWeight: 'bold', color: '#0E3F8C' }}&gt;Cheat Sheet — Sequence, State, Activity&lt;/Text&gt;&#10;    &lt;Text style={{ fontSize: 14, color: '#1E4FA8', fontWeight: 'bold' }}&gt;12 / 38&lt;/Text&gt;&#10;  &lt;/Box&gt;&#10;  &lt;Box style={{ flex: 1, padding: '8px 40px 0 40px', flexDirection: 'row', gap: 24 }}&gt;&#10;    &lt;Box style={{ flex: 4, flexDirection: 'column', gap: 6, justifyContent: 'center', alignItems: 'center' }}&gt;&#10;      &lt;Text style={{ fontSize: 17, fontWeight: 'bold', color: '#0E3F8C', alignSelf: 'flex-start' }}&gt;Sequence — time runs downward&lt;/Text&gt;&#10;      &lt;svg width={380} height={300} viewBox='0 0 380 300'&gt;&#10;        &lt;defs&gt;&#10;          &lt;marker id='ar12' markerWidth='8' markerHeight='8' refX='7' refY='4' orient='auto'&gt;&#10;            &lt;path d='M0,0 L8,4 L0,8 z' fill='#1E4FA8' /&gt;&#10;          &lt;/marker&gt;&#10;        &lt;/defs&gt;&#10;        &lt;rect x='40' y='26' width='70' height='26' rx='3' fill='#E8EFF8' stroke='#1E4FA8' strokeWidth='1.5' /&gt;&#10;        &lt;text x='75' y='44' textAnchor='middle' fill='#0E3F8C' fontSize='11' fontWeight='bold'&gt;: Customer&lt;/text&gt;&#10;        &lt;rect x='155' y='26' width='70' height='26' rx='3' fill='#E8EFF8' stroke='#1E4FA8' strokeWidth='1.5' /&gt;&#10;        &lt;text x='190' y='44' textAnchor='middle' fill='#0E3F8C' fontSize='11' fontWeight='bold'&gt;: Order&lt;/text&gt;&#10;        &lt;rect x='280' y='26' width='70' height='26' rx='3' fill='#E8EFF8' stroke='#1E4FA8' strokeWidth='1.5' /&gt;&#10;        &lt;text x='315' y='44' textAnchor='middle' fill='#0E3F8C' fontSize='11' fontWeight='bold'&gt;: Kitchen&lt;/text&gt;&#10;        &lt;line x1='75' y1='52' x2='75' y2='276' stroke='#8B97A8' strokeWidth='1' strokeDasharray='4 3' /&gt;&#10;        &lt;line x1='190' y1='52' x2='190' y2='276' stroke='#8B97A8' strokeWidth='1' strokeDasharray='4 3' /&gt;&#10;        &lt;line x1='315' y1='52' x2='315' y2='276' stroke='#8B97A8' strokeWidth='1' strokeDasharray='4 3' /&gt;&#10;        &lt;rect x='184' y='88' width='13' height='118' fill='#DCE8F8' stroke='#3D7BD9' strokeWidth='1' /&gt;&#10;        &lt;line x1='75' y1='88' x2='187' y2='88' stroke='#1E4FA8' strokeWidth='1.6' markerEnd='url(#ar12)' /&gt;&#10;        &lt;text x='82' y='81' fill='#1A2230' fontSize='11'&gt;placeOrder()&lt;/text&gt;&#10;        &lt;line x1='190' y1='140' x2='312' y2='140' stroke='#1E4FA8' strokeWidth='1.6' markerEnd='url(#ar12)' /&gt;&#10;        &lt;text x='198' y='133' fill='#1A2230' fontSize='11'&gt;notify()&lt;/text&gt;&#10;        &lt;line x1='315' y1='192' x2='194' y2='192' stroke='#3D7BD9' strokeWidth='1.6' strokeDasharray='5 3' markerEnd='url(#ar12)' /&gt;&#10;        &lt;text x='206' y='185' fill='#3D7BD9' fontSize='11'&gt;ready at 18:40 (return)&lt;/text&gt;&#10;        &lt;line x1='190' y1='240' x2='78' y2='240' stroke='#1E4FA8' strokeWidth='1.6' markerEnd='url(#ar12)' /&gt;&#10;        &lt;text x='96' y='233' fill='#1A2230' fontSize='11'&gt;confirmation&lt;/text&gt;&#10;        &lt;text x='75' y='292' textAnchor='middle' fill='#8B97A8' fontSize='10'&gt;lifeline&lt;/text&gt;&#10;      &lt;/svg&gt;&#10;      &lt;Text style={{ fontSize: 13, color: '#8B97A8', lineHeight: 1.5, alignSelf: 'flex-start' }}&gt;Dashed lifeline · narrow activation bar · solid arrow = call, dashed arrow = return.&lt;/Text&gt;&#10;    &lt;/Box&gt;&#10;    &lt;Box style={{ flex: 5, flexDirection: 'column', gap: 10, justifyContent: 'center' }}&gt;&#10;      &lt;Box style={{ flexDirection: 'column', gap: 4 }}&gt;&#10;        &lt;Text style={{ fontSize: 17, fontWeight: 'bold', color: '#0E3F8C' }}&gt;State — one object, its whole life&lt;/Text&gt;&#10;        &lt;svg width={420} height={168} viewBox='0 0 300 120'&gt;&#10;          &lt;defs&gt;&#10;            &lt;marker id='ar12b' markerWidth='7' markerHeight='7' refX='6' refY='3.5' orient='auto'&gt;&#10;              &lt;path d='M0,0 L7,3.5 L0,7 z' fill='#1E4FA8' /&gt;&#10;            &lt;/marker&gt;&#10;          &lt;/defs&gt;&#10;          &lt;circle cx='14' cy='30' r='7' fill='#1E4FA8' /&gt;&#10;          &lt;line x1='21' y1='30' x2='42' y2='30' stroke='#1E4FA8' strokeWidth='1.4' markerEnd='url(#ar12b)' /&gt;&#10;          &lt;rect x='44' y='14' width='84' height='32' rx='16' fill='#E8EFF8' stroke='#1E4FA8' strokeWidth='1.6' /&gt;&#10;          &lt;text x='86' y='35' textAnchor='middle' fill='#0E3F8C' fontSize='12' fontWeight='bold'&gt;Draft&lt;/text&gt;&#10;          &lt;line x1='128' y1='30' x2='172' y2='30' stroke='#1E4FA8' strokeWidth='1.4' markerEnd='url(#ar12b)' /&gt;&#10;          &lt;text x='132' y='23' fill='#4A5568' fontSize='10'&gt;submit&lt;/text&gt;&#10;          &lt;rect x='174' y='14' width='84' height='32' rx='16' fill='#E8EFF8' stroke='#1E4FA8' strokeWidth='1.6' /&gt;&#10;          &lt;text x='216' y='35' textAnchor='middle' fill='#0E3F8C' fontSize='12' fontWeight='bold'&gt;Placed&lt;/text&gt;&#10;          &lt;line x1='86' y1='46' x2='86' y2='76' stroke='#1E4FA8' strokeWidth='1.4' markerEnd='url(#ar12b)' /&gt;&#10;          &lt;text x='92' y='66' fill='#4A5568' fontSize='10'&gt;cancel&lt;/text&gt;&#10;          &lt;rect x='44' y='78' width='84' height='32' rx='16' fill='#F7F9FC' stroke='#8B97A8' strokeWidth='1.4' /&gt;&#10;          &lt;text x='86' y='99' textAnchor='middle' fill='#4A5568' fontSize='12' fontWeight='bold'&gt;Cancelled&lt;/text&gt;&#10;          &lt;line x1='216' y1='46' x2='216' y2='76' stroke='#1E4FA8' strokeWidth='1.4' markerEnd='url(#ar12b)' /&gt;&#10;          &lt;text x='222' y='66' fill='#4A5568' fontSize='10'&gt;deliver&lt;/text&gt;&#10;          &lt;rect x='174' y='78' width='84' height='32' rx='16' fill='#E8EFF8' stroke='#1E4FA8' strokeWidth='1.6' /&gt;&#10;          &lt;text x='216' y='99' textAnchor='middle' fill='#0E3F8C' fontSize='12' fontWeight='bold'&gt;Delivered&lt;/text&gt;&#10;          &lt;circle cx='282' cy='94' r='9' fill='#FFFFFF' stroke='#1E4FA8' strokeWidth='1.6' /&gt;&#10;          &lt;circle cx='282' cy='94' r='5' fill='#1E4FA8' /&gt;&#10;          &lt;line x1='258' y1='94' x2='272' y2='94' stroke='#1E4FA8' strokeWidth='1.4' markerEnd='url(#ar12b)' /&gt;&#10;        &lt;/svg&gt;&#10;      &lt;/Box&gt;&#10;      &lt;Box style={{ flexDirection: 'column', gap: 4 }}&gt;&#10;        &lt;Text style={{ fontSize: 17, fontWeight: 'bold', color: '#0E3F8C' }}&gt;Activity — steps, and the ones that overlap&lt;/Text&gt;&#10;        &lt;svg width={420} height={266} viewBox='0 0 300 190'&gt;&#10;          &lt;defs&gt;&#10;            &lt;marker id='ar12c' markerWidth='7' markerHeight='7' refX='6' refY='3.5' orient='auto'&gt;&#10;              &lt;path d='M0,0 L7,3.5 L0,7 z' fill='#1E4FA8' /&gt;&#10;            &lt;/marker&gt;&#10;          &lt;/defs&gt;&#10;          &lt;circle cx='16' cy='20' r='7' fill='#1E4FA8' /&gt;&#10;          &lt;line x1='23' y1='20' x2='42' y2='20' stroke='#1E4FA8' strokeWidth='1.4' markerEnd='url(#ar12c)' /&gt;&#10;          &lt;rect x='44' y='6' width='92' height='28' rx='14' fill='#E8EFF8' stroke='#1E4FA8' strokeWidth='1.6' /&gt;&#10;          &lt;text x='90' y='25' textAnchor='middle' fill='#0E3F8C' fontSize='11' fontWeight='bold'&gt;Take order&lt;/text&gt;&#10;          &lt;line x1='90' y1='34' x2='90' y2='56' stroke='#1E4FA8' strokeWidth='1.4' markerEnd='url(#ar12c)' /&gt;&#10;          &lt;line x1='30' y1='58' x2='250' y2='58' stroke='#1E4FA8' strokeWidth='5' /&gt;&#10;          &lt;line x1='30' y1='58' x2='30' y2='76' stroke='#1E4FA8' strokeWidth='1.4' markerEnd='url(#ar12c)' /&gt;&#10;          &lt;line x1='250' y1='58' x2='250' y2='76' stroke='#1E4FA8' strokeWidth='1.4' markerEnd='url(#ar12c)' /&gt;&#10;          &lt;rect x='4' y='78' width='112' height='30' rx='15' fill='#FFFFFF' stroke='#1E4FA8' strokeWidth='1.6' /&gt;&#10;          &lt;text x='60' y='97' textAnchor='middle' fill='#0E3F8C' fontSize='11' fontWeight='bold'&gt;Prepare food&lt;/text&gt;&#10;          &lt;rect x='184' y='78' width='116' height='30' rx='15' fill='#FFFFFF' stroke='#1E4FA8' strokeWidth='1.6' /&gt;&#10;          &lt;text x='242' y='97' textAnchor='middle' fill='#0E3F8C' fontSize='11' fontWeight='bold'&gt;Assign courier&lt;/text&gt;&#10;          &lt;line x1='60' y1='108' x2='60' y2='128' stroke='#1E4FA8' strokeWidth='1.4' markerEnd='url(#ar12c)' /&gt;&#10;          &lt;line x1='242' y1='108' x2='242' y2='128' stroke='#1E4FA8' strokeWidth='1.4' markerEnd='url(#ar12c)' /&gt;&#10;          &lt;line x1='30' y1='130' x2='250' y2='130' stroke='#1E4FA8' strokeWidth='5' /&gt;&#10;          &lt;line x1='140' y1='130' x2='140' y2='150' stroke='#1E4FA8' strokeWidth='1.4' markerEnd='url(#ar12c)' /&gt;&#10;          &lt;rect x='90' y='152' width='100' height='30' rx='15' fill='#E8EFF8' stroke='#1E4FA8' strokeWidth='1.6' /&gt;&#10;          &lt;text x='140' y='171' textAnchor='middle' fill='#0E3F8C' fontSize='11' fontWeight='bold'&gt;Notify customer&lt;/text&gt;&#10;        &lt;/svg&gt;&#10;      &lt;/Box&gt;&#10;    &lt;/Box&gt;&#10;  &lt;/Box&gt;&#10;  &lt;Box style={{ height: 34, padding: '0 40px', flexDirection: 'row', alignItems: 'center', justifyContent: 'space-between' }}&gt;&#10;    &lt;Text style={{ fontSize: 13, color: '#8B97A8' }}&gt;ISAD · Fall 2026 · thick bars are fork and join&lt;/Text&gt;&#10;    &lt;Text style={{ fontSize: 14, color: '#1E4FA8', fontWeight: 'bold' }}&gt;12 / 38&lt;/Text&gt;&#10;  &lt;/Box&gt;&#10;&lt;/Slide&gt;"/>
+        <p:cNvPr id="40" name=""/>
         <p:cNvGrpSpPr/>
         <p:nvPr/>
       </p:nvGrpSpPr>
@@ -2745,7 +2781,10 @@
         </p:spPr>
         <p:txBody>
           <a:bodyPr/>
-          <a:p/>
+          <a:p>
+            <a:pPr/>
+            <a:endParaRPr/>
+          </a:p>
         </p:txBody>
       </p:sp>
       <p:sp>
@@ -2769,7 +2808,10 @@
         </p:spPr>
         <p:txBody>
           <a:bodyPr/>
-          <a:p/>
+          <a:p>
+            <a:pPr/>
+            <a:endParaRPr/>
+          </a:p>
         </p:txBody>
       </p:sp>
       <p:sp>
@@ -3225,7 +3267,7 @@
   <p:cSld>
     <p:spTree>
       <p:nvGrpSpPr>
-        <p:cNvPr id="56" name="" descr="&lt;Slide style={{ background: '#0E3F8C', padding: 0 }}&gt;&#10;  &lt;Box style={{ flexDirection: 'row', height: '100%', position: 'relative' }}&gt;&#10;    &lt;Box style={{ position: 'absolute', top: 0, left: 0, right: 0, height: 8, background: '#1E4FA8' }} /&gt;&#10;    &lt;Box style={{ width: 300, justifyContent: 'center', alignItems: 'center', borderRight: '1px solid #2B5793' }}&gt;&#10;      &lt;Text style={{ fontSize: 220, fontWeight: 'bold', color: '#3D7BD9', fontFamily: 'Georgia, serif', lineHeight: 1 }}&gt;03&lt;/Text&gt;&#10;    &lt;/Box&gt;&#10;    &lt;Box style={{ flex: 1, padding: '70px 64px', flexDirection: 'column', justifyContent: 'center' }}&gt;&#10;      &lt;Text style={{ fontSize: 15, color: '#7FA2D6', letterSpacing: 2, marginBottom: 18 }}&gt;PART 1 · LECTURE&lt;/Text&gt;&#10;      &lt;Text style={{ fontSize: 48, fontWeight: 'bold', color: '#FFFFFF', lineHeight: 1.18 }}&gt;Notation&lt;br /&gt;Boot Camp&lt;/Text&gt;&#10;      &lt;Box style={{ width: 64, height: 4, background: '#FFC107', marginTop: 26, marginBottom: 26 }} /&gt;&#10;      &lt;Box style={{ flexDirection: 'column', gap: 12 }}&gt;&#10;        {[&#10;          'The class box, top to bottom',&#10;          'Associations: name, role, multiplicity, direction',&#10;          'Lifelines and the messages between them',&#10;        ].map((t) =&gt; (&#10;          &lt;Box key={t} style={{ flexDirection: 'row', alignItems: 'center', gap: 12 }}&gt;&#10;            &lt;Box style={{ width: 8, height: 8, borderRadius: 4, background: '#3D7BD9' }} /&gt;&#10;            &lt;Text style={{ fontSize: 20, color: '#C5D4EA' }}&gt;{t}&lt;/Text&gt;&#10;          &lt;/Box&gt;&#10;        ))}&#10;      &lt;/Box&gt;&#10;    &lt;/Box&gt;&#10;  &lt;/Box&gt;&#10;&lt;/Slide&gt;"/>
+        <p:cNvPr id="56" name=""/>
         <p:cNvGrpSpPr/>
         <p:nvPr/>
       </p:nvGrpSpPr>
@@ -3258,7 +3300,10 @@
         </p:spPr>
         <p:txBody>
           <a:bodyPr/>
-          <a:p/>
+          <a:p>
+            <a:pPr/>
+            <a:endParaRPr/>
+          </a:p>
         </p:txBody>
       </p:sp>
       <p:sp>
@@ -3298,7 +3343,10 @@
         </p:spPr>
         <p:txBody>
           <a:bodyPr/>
-          <a:p/>
+          <a:p>
+            <a:pPr/>
+            <a:endParaRPr/>
+          </a:p>
         </p:txBody>
       </p:sp>
       <p:sp>
@@ -3445,7 +3493,10 @@
         </p:spPr>
         <p:txBody>
           <a:bodyPr/>
-          <a:p/>
+          <a:p>
+            <a:pPr/>
+            <a:endParaRPr/>
+          </a:p>
         </p:txBody>
       </p:sp>
       <p:sp>
@@ -3471,7 +3522,10 @@
         </p:spPr>
         <p:txBody>
           <a:bodyPr/>
-          <a:p/>
+          <a:p>
+            <a:pPr/>
+            <a:endParaRPr/>
+          </a:p>
         </p:txBody>
       </p:sp>
       <p:sp>
@@ -3532,7 +3586,10 @@
         </p:spPr>
         <p:txBody>
           <a:bodyPr/>
-          <a:p/>
+          <a:p>
+            <a:pPr/>
+            <a:endParaRPr/>
+          </a:p>
         </p:txBody>
       </p:sp>
       <p:sp>
@@ -3593,7 +3650,10 @@
         </p:spPr>
         <p:txBody>
           <a:bodyPr/>
-          <a:p/>
+          <a:p>
+            <a:pPr/>
+            <a:endParaRPr/>
+          </a:p>
         </p:txBody>
       </p:sp>
       <p:sp>
@@ -3652,7 +3712,10 @@
         </p:spPr>
         <p:txBody>
           <a:bodyPr/>
-          <a:p/>
+          <a:p>
+            <a:pPr/>
+            <a:endParaRPr/>
+          </a:p>
         </p:txBody>
       </p:sp>
     </p:spTree>
@@ -3665,7 +3728,7 @@
   <p:cSld>
     <p:spTree>
       <p:nvGrpSpPr>
-        <p:cNvPr id="70" name="" descr="&lt;Slide style={{ background: '#FFFFFF', padding: 0 }}&gt;&#10;  &lt;Box style={{ height: 72, background: '#1E4FA8', padding: '0 40px', flexDirection: 'row', alignItems: 'center', justifyContent: 'space-between' }}&gt;&#10;    &lt;Text style={{ fontSize: 15, color: '#B9CDF0', letterSpacing: 1 }}&gt;ISAD · INFORMATION SYSTEMS ANALYSIS &amp;amp; DESIGN&lt;/Text&gt;&#10;    &lt;Text style={{ fontSize: 15, color: '#B9CDF0' }}&gt;W03 · NOTATION&lt;/Text&gt;&#10;  &lt;/Box&gt;&#10;  &lt;Box style={{ padding: '14px 40px 0 40px', flexDirection: 'row', alignItems: 'baseline', justifyContent: 'space-between' }}&gt;&#10;    &lt;Text style={{ fontSize: 30, fontWeight: 'bold', color: '#0E3F8C' }}&gt;Class Box Anatomy&lt;/Text&gt;&#10;    &lt;Text style={{ fontSize: 14, color: '#1E4FA8', fontWeight: 'bold' }}&gt;14 / 38&lt;/Text&gt;&#10;  &lt;/Box&gt;&#10;  &lt;Box style={{ flex: 1, padding: '4px 40px 0 40px', justifyContent: 'center', alignItems: 'center' }}&gt;&#10;    &lt;svg width={1180} height={380} viewBox='0 0 1180 380'&gt;&#10;      &lt;rect x='420' y='24' width='360' height='256' rx='4' fill='#FFFFFF' stroke='#1E4FA8' strokeWidth='2' /&gt;&#10;      &lt;line x1='420' y1='64' x2='780' y2='64' stroke='#1E4FA8' strokeWidth='1.6' /&gt;&#10;      &lt;line x1='420' y1='188' x2='780' y2='188' stroke='#1E4FA8' strokeWidth='1.6' /&gt;&#10;      &lt;text x='600' y='52' textAnchor='middle' fill='#0E3F8C' fontSize='17' fontWeight='bold'&gt;Order&lt;/text&gt;&#10;      &lt;text x='436' y='90' fill='#4A5568' fontSize='12.5'&gt;- status : OrderStatus&lt;/text&gt;&#10;      &lt;text x='436' y='113' fill='#4A5568' fontSize='12.5'&gt;- placedAt : LocalDateTime&lt;/text&gt;&#10;      &lt;text x='436' y='136' fill='#4A5568' fontSize='12.5'&gt;- lines : List&amp;amp;lt;OrderLine&amp;amp;gt;&lt;/text&gt;&#10;      &lt;text x='436' y='166' fill='#3D7BD9' fontSize='12.5' fontStyle='italic'&gt;/total : Money&lt;/text&gt;&#10;      &lt;text x='436' y='212' fill='#4A5568' fontSize='12.5'&gt;+ total() : Money&lt;/text&gt;&#10;      &lt;text x='436' y='235' fill='#4A5568' fontSize='12.5'&gt;+ addItem(item : MenuItem, qty : int)&lt;/text&gt;&#10;      &lt;text x='436' y='262' fill='#4A5568' fontSize='12.5'&gt;+ cancel(reason : String)&lt;/text&gt;&#10;&#10;      &lt;line x1='404' y1='48' x2='418' y2='48' stroke='#D6DCE5' strokeWidth='1.4' /&gt;&#10;      &lt;text x='400' y='40' textAnchor='end' fill='#0E3F8C' fontSize='16' fontWeight='bold'&gt;1 · Class name&lt;/text&gt;&#10;      &lt;text x='400' y='60' textAnchor='end' fill='#8B97A8' fontSize='12.5'&gt;Singular noun, UpperCamelCase&lt;/text&gt;&#10;&#10;      &lt;line x1='404' y1='130' x2='418' y2='130' stroke='#D6DCE5' strokeWidth='1.4' /&gt;&#10;      &lt;text x='400' y='122' textAnchor='end' fill='#0E3F8C' fontSize='16' fontWeight='bold'&gt;2 · Attributes&lt;/text&gt;&#10;      &lt;text x='400' y='142' textAnchor='end' fill='#8B97A8' fontSize='12.5'&gt;What each object knows&lt;/text&gt;&#10;&#10;      &lt;line x1='404' y1='238' x2='418' y2='238' stroke='#D6DCE5' strokeWidth='1.4' /&gt;&#10;      &lt;text x='400' y='230' textAnchor='end' fill='#0E3F8C' fontSize='16' fontWeight='bold'&gt;3 · Operations&lt;/text&gt;&#10;      &lt;text x='400' y='250' textAnchor='end' fill='#8B97A8' fontSize='12.5'&gt;What each object can be asked&lt;/text&gt;&#10;&#10;      &lt;line x1='782' y1='48' x2='796' y2='48' stroke='#D6DCE5' strokeWidth='1.4' /&gt;&#10;      &lt;text x='800' y='40' fill='#0E3F8C' fontSize='16' fontWeight='bold'&gt;Stereotypes&lt;/text&gt;&#10;      &lt;text x='800' y='60' fill='#8B97A8' fontSize='12.5'&gt;Name in italics = abstract&lt;/text&gt;&#10;      &lt;text x='800' y='78' fill='#8B97A8' fontSize='12.5'&gt;«interface» above the name = pure contract&lt;/text&gt;&#10;&#10;      &lt;line x1='782' y1='130' x2='796' y2='130' stroke='#D6DCE5' strokeWidth='1.4' /&gt;&#10;      &lt;text x='800' y='122' fill='#0E3F8C' fontSize='16' fontWeight='bold'&gt;Syntax&lt;/text&gt;&#10;      &lt;text x='800' y='142' fill='#4A5568' fontSize='12.5'&gt;visibility name : type&lt;/text&gt;&#10;      &lt;text x='800' y='160' fill='#8B97A8' fontSize='12'&gt;A leading / means the value is derived,&lt;/text&gt;&#10;      &lt;text x='800' y='177' fill='#8B97A8' fontSize='12'&gt;never stored — total() is computed.&lt;/text&gt;&#10;&#10;      &lt;line x1='782' y1='238' x2='796' y2='238' stroke='#D6DCE5' strokeWidth='1.4' /&gt;&#10;      &lt;text x='800' y='230' fill='#0E3F8C' fontSize='16' fontWeight='bold'&gt;Syntax&lt;/text&gt;&#10;      &lt;text x='800' y='250' fill='#4A5568' fontSize='12.5'&gt;vis name(params) : returnType&lt;/text&gt;&#10;      &lt;text x='800' y='268' fill='#8B97A8' fontSize='12'&gt;Skip the compartment you do not need.&lt;/text&gt;&#10;&#10;      &lt;line x1='20' y1='312' x2='1160' y2='312' stroke='#E5E7EB' strokeWidth='1' /&gt;&#10;      &lt;text x='20' y='342' fill='#1A2230' fontSize='15'&gt;Three compartments, not three obligations. On a whiteboard, a bare box with a name is a legitimate class — as long as the reader knows you chose it.&lt;/text&gt;&#10;      &lt;text x='20' y='366' fill='#8B97A8' fontSize='13'&gt;Weeks 06–07 decide what goes in these compartments. This week is only about reading them.&lt;/text&gt;&#10;    &lt;/svg&gt;&#10;  &lt;/Box&gt;&#10;  &lt;Box style={{ height: 34, padding: '0 40px', flexDirection: 'row', alignItems: 'center', justifyContent: 'space-between' }}&gt;&#10;    &lt;Text style={{ fontSize: 13, color: '#8B97A8' }}&gt;ISAD · Fall 2026&lt;/Text&gt;&#10;    &lt;Text style={{ fontSize: 14, color: '#1E4FA8', fontWeight: 'bold' }}&gt;14 / 38&lt;/Text&gt;&#10;  &lt;/Box&gt;&#10;&lt;/Slide&gt;"/>
+        <p:cNvPr id="70" name=""/>
         <p:cNvGrpSpPr/>
         <p:nvPr/>
       </p:nvGrpSpPr>
@@ -3698,7 +3761,10 @@
         </p:spPr>
         <p:txBody>
           <a:bodyPr/>
-          <a:p/>
+          <a:p>
+            <a:pPr/>
+            <a:endParaRPr/>
+          </a:p>
         </p:txBody>
       </p:sp>
       <p:sp>
@@ -3722,7 +3788,10 @@
         </p:spPr>
         <p:txBody>
           <a:bodyPr/>
-          <a:p/>
+          <a:p>
+            <a:pPr/>
+            <a:endParaRPr/>
+          </a:p>
         </p:txBody>
       </p:sp>
       <p:sp>
@@ -3976,7 +4045,7 @@
   <p:cSld>
     <p:spTree>
       <p:nvGrpSpPr>
-        <p:cNvPr id="80" name="" descr="&lt;Slide style={{ background: '#FFFFFF', padding: 0 }}&gt;&#10;  &lt;Box style={{ height: 72, background: '#1E4FA8', padding: '0 40px', flexDirection: 'row', alignItems: 'center', justifyContent: 'space-between' }}&gt;&#10;    &lt;Text style={{ fontSize: 15, color: '#B9CDF0', letterSpacing: 1 }}&gt;ISAD · INFORMATION SYSTEMS ANALYSIS &amp;amp; DESIGN&lt;/Text&gt;&#10;    &lt;Text style={{ fontSize: 15, color: '#B9CDF0' }}&gt;W03 · NOTATION&lt;/Text&gt;&#10;  &lt;/Box&gt;&#10;  &lt;Box style={{ padding: '16px 40px 0 40px' }}&gt;&#10;    &lt;Text style={{ fontSize: 30, fontWeight: 'bold', color: '#0E3F8C' }}&gt;Visibility Marks&lt;/Text&gt;&#10;  &lt;/Box&gt;&#10;  &lt;Box style={{ flex: 1, padding: '12px 40px 0 40px', flexDirection: 'row', gap: 16, alignItems: 'center' }}&gt;&#10;    {[&#10;      { m: '+', n: 'public', j: 'public', d: 'Part of the contract. Any class may call it.', hint: 'Use it for operations, rarely for fields.' },&#10;      { m: '−', n: 'private', j: 'private', d: 'Visible only inside this class. The default choice.', hint: 'If a field has no reason to be public, this is its mark.' },&#10;      { m: '#', n: 'protected', j: 'protected', d: 'This class and its subclasses.', hint: 'Legitimate — but it couples you to the hierarchy.' },&#10;      { m: '~', n: 'package', j: '(no keyword)', d: 'Everything in the same package.', hint: 'Rare in analysis models; appears in code-level diagrams.' },&#10;    ].map((v) =&gt; (&#10;      &lt;Box key={v.n} style={{ flex: 1, padding: '18px 18px', background: '#F7F9FC', borderRadius: 10, border: '1px solid #E5E7EB', flexDirection: 'column', gap: 8, alignItems: 'center' }}&gt;&#10;        &lt;Text style={{ fontSize: 62, fontWeight: 'bold', color: '#1E4FA8', fontFamily: 'Georgia, serif', lineHeight: 1 }}&gt;{v.m}&lt;/Text&gt;&#10;        &lt;Text style={{ fontSize: 19, fontWeight: 'bold', color: '#0E3F8C' }}&gt;{v.n}&lt;/Text&gt;&#10;        &lt;Box style={{ padding: '4px 12px', background: '#E8EFF8', borderRadius: 12 }}&gt;&#10;          &lt;Text style={{ fontSize: 12.5, color: '#1E4FA8', fontWeight: 'bold' }}&gt;In code: {v.j}&lt;/Text&gt;&#10;        &lt;/Box&gt;&#10;        &lt;Text style={{ fontSize: 13.5, color: '#4A5568', lineHeight: 1.5, textAlign: 'center' }}&gt;{v.d}&lt;/Text&gt;&#10;        &lt;Text style={{ fontSize: 12.5, color: '#8B97A8', lineHeight: 1.45, textAlign: 'center', fontStyle: 'italic' }}&gt;{v.hint}&lt;/Text&gt;&#10;      &lt;/Box&gt;&#10;    ))}&#10;  &lt;/Box&gt;&#10;  &lt;Box style={{ height: 46, background: '#0E3F8C', padding: '0 40px', flexDirection: 'row', alignItems: 'center', justifyContent: 'center' }}&gt;&#10;    &lt;Text style={{ fontSize: 17, color: '#FFFFFF', fontWeight: '600' }}&gt;Default to − and open up only with a reason. Encapsulation is a visibility decision before it is anything else.&lt;/Text&gt;&#10;  &lt;/Box&gt;&#10;&lt;/Slide&gt;"/>
+        <p:cNvPr id="80" name=""/>
         <p:cNvGrpSpPr/>
         <p:nvPr/>
       </p:nvGrpSpPr>
@@ -4009,7 +4078,10 @@
         </p:spPr>
         <p:txBody>
           <a:bodyPr/>
-          <a:p/>
+          <a:p>
+            <a:pPr/>
+            <a:endParaRPr/>
+          </a:p>
         </p:txBody>
       </p:sp>
       <p:sp>
@@ -4033,7 +4105,10 @@
         </p:spPr>
         <p:txBody>
           <a:bodyPr/>
-          <a:p/>
+          <a:p>
+            <a:pPr/>
+            <a:endParaRPr/>
+          </a:p>
         </p:txBody>
       </p:sp>
       <p:sp>
@@ -4169,7 +4244,10 @@
         </p:spPr>
         <p:txBody>
           <a:bodyPr/>
-          <a:p/>
+          <a:p>
+            <a:pPr/>
+            <a:endParaRPr/>
+          </a:p>
         </p:txBody>
       </p:sp>
       <p:sp>
@@ -4265,7 +4343,10 @@
         </p:spPr>
         <p:txBody>
           <a:bodyPr/>
-          <a:p/>
+          <a:p>
+            <a:pPr/>
+            <a:endParaRPr/>
+          </a:p>
         </p:txBody>
       </p:sp>
       <p:sp>
@@ -4411,7 +4492,10 @@
         </p:spPr>
         <p:txBody>
           <a:bodyPr/>
-          <a:p/>
+          <a:p>
+            <a:pPr/>
+            <a:endParaRPr/>
+          </a:p>
         </p:txBody>
       </p:sp>
       <p:sp>
@@ -4507,7 +4591,10 @@
         </p:spPr>
         <p:txBody>
           <a:bodyPr/>
-          <a:p/>
+          <a:p>
+            <a:pPr/>
+            <a:endParaRPr/>
+          </a:p>
         </p:txBody>
       </p:sp>
       <p:sp>
@@ -4657,7 +4744,10 @@
         </p:spPr>
         <p:txBody>
           <a:bodyPr/>
-          <a:p/>
+          <a:p>
+            <a:pPr/>
+            <a:endParaRPr/>
+          </a:p>
         </p:txBody>
       </p:sp>
       <p:sp>
@@ -4753,7 +4843,10 @@
         </p:spPr>
         <p:txBody>
           <a:bodyPr/>
-          <a:p/>
+          <a:p>
+            <a:pPr/>
+            <a:endParaRPr/>
+          </a:p>
         </p:txBody>
       </p:sp>
       <p:sp>
@@ -4901,7 +4994,10 @@
         </p:spPr>
         <p:txBody>
           <a:bodyPr/>
-          <a:p/>
+          <a:p>
+            <a:pPr/>
+            <a:endParaRPr/>
+          </a:p>
         </p:txBody>
       </p:sp>
       <p:sp>
@@ -4997,7 +5093,10 @@
         </p:spPr>
         <p:txBody>
           <a:bodyPr/>
-          <a:p/>
+          <a:p>
+            <a:pPr/>
+            <a:endParaRPr/>
+          </a:p>
         </p:txBody>
       </p:sp>
       <p:sp>
@@ -5138,7 +5237,10 @@
         </p:spPr>
         <p:txBody>
           <a:bodyPr/>
-          <a:p/>
+          <a:p>
+            <a:pPr/>
+            <a:endParaRPr/>
+          </a:p>
         </p:txBody>
       </p:sp>
       <p:sp>
@@ -5186,7 +5288,7 @@
   <p:cSld>
     <p:spTree>
       <p:nvGrpSpPr>
-        <p:cNvPr id="116" name="" descr="&lt;Slide style={{ background: '#FFFFFF', padding: 0 }}&gt;&#10;  &lt;Box style={{ height: 72, background: '#1E4FA8', padding: '0 40px', flexDirection: 'row', alignItems: 'center', justifyContent: 'space-between' }}&gt;&#10;    &lt;Text style={{ fontSize: 15, color: '#B9CDF0', letterSpacing: 1 }}&gt;ISAD · INFORMATION SYSTEMS ANALYSIS &amp;amp; DESIGN&lt;/Text&gt;&#10;    &lt;Text style={{ fontSize: 15, color: '#B9CDF0' }}&gt;W03 · NOTATION&lt;/Text&gt;&#10;  &lt;/Box&gt;&#10;  &lt;Box style={{ padding: '14px 40px 0 40px', flexDirection: 'row', alignItems: 'baseline', justifyContent: 'space-between' }}&gt;&#10;    &lt;Text style={{ fontSize: 30, fontWeight: 'bold', color: '#0E3F8C' }}&gt;Association Anatomy&lt;/Text&gt;&#10;    &lt;Text style={{ fontSize: 14, color: '#1E4FA8', fontWeight: 'bold' }}&gt;16 / 38&lt;/Text&gt;&#10;  &lt;/Box&gt;&#10;  &lt;Box style={{ flex: 1, padding: '2px 40px 0 40px', justifyContent: 'center', alignItems: 'center' }}&gt;&#10;    &lt;svg width={1180} height={372} viewBox='0 0 1180 372'&gt;&#10;      &lt;defs&gt;&#10;        &lt;marker id='ar16' markerWidth='10' markerHeight='10' refX='9' refY='5' orient='auto'&gt;&#10;          &lt;path d='M0,0 L10,5 L0,10 z' fill='none' stroke='#1E4FA8' strokeWidth='1.6' /&gt;&#10;        &lt;/marker&gt;&#10;      &lt;/defs&gt;&#10;&#10;      &lt;rect x='100' y='60' width='280' height='150' rx='4' fill='#FFFFFF' stroke='#1E4FA8' strokeWidth='2' /&gt;&#10;      &lt;line x1='100' y1='94' x2='380' y2='94' stroke='#1E4FA8' strokeWidth='1.6' /&gt;&#10;      &lt;text x='240' y='82' textAnchor='middle' fill='#0E3F8C' fontSize='16' fontWeight='bold'&gt;Order&lt;/text&gt;&#10;      &lt;text x='116' y='120' fill='#4A5568' fontSize='12'&gt;- status : OrderStatus&lt;/text&gt;&#10;      &lt;text x='116' y='142' fill='#4A5568' fontSize='12'&gt;- placedAt : LocalDateTime&lt;/text&gt;&#10;      &lt;text x='116' y='178' fill='#4A5568' fontSize='12'&gt;+ total() : Money&lt;/text&gt;&#10;&#10;      &lt;rect x='800' y='60' width='280' height='150' rx='4' fill='#FFFFFF' stroke='#1E4FA8' strokeWidth='2' /&gt;&#10;      &lt;line x1='800' y1='94' x2='1080' y2='94' stroke='#1E4FA8' strokeWidth='1.6' /&gt;&#10;      &lt;text x='940' y='82' textAnchor='middle' fill='#0E3F8C' fontSize='16' fontWeight='bold'&gt;MenuItem&lt;/text&gt;&#10;      &lt;text x='816' y='120' fill='#4A5568' fontSize='12'&gt;- name : String&lt;/text&gt;&#10;      &lt;text x='816' y='142' fill='#4A5568' fontSize='12'&gt;- price : Money&lt;/text&gt;&#10;      &lt;text x='816' y='178' fill='#4A5568' fontSize='12'&gt;+ isAvailable() : boolean&lt;/text&gt;&#10;&#10;      &lt;line x1='380' y1='155' x2='798' y2='155' stroke='#1E4FA8' strokeWidth='2' markerEnd='url(#ar16)' /&gt;&#10;&#10;      &lt;circle cx='392' cy='120' r='13' fill='#1E4FA8' /&gt;&#10;      &lt;text x='392' y='125' textAnchor='middle' fill='#FFFFFF' fontSize='13' fontWeight='bold'&gt;1&lt;/text&gt;&#10;      &lt;text x='392' y='147' textAnchor='middle' fill='#0E3F8C' fontSize='13' fontWeight='bold'&gt;1&lt;/text&gt;&#10;&#10;      &lt;text x='556' y='178' textAnchor='end' fill='#1A2230' fontSize='14' fontStyle='italic'&gt;contains&lt;/text&gt;&#10;      &lt;polygon points='566,171 578,174.5 566,178' fill='#1A2230' /&gt;&#10;      &lt;circle cx='560' cy='208' r='13' fill='#1E4FA8' /&gt;&#10;      &lt;text x='560' y='213' textAnchor='middle' fill='#FFFFFF' fontSize='13' fontWeight='bold'&gt;2&lt;/text&gt;&#10;&#10;      &lt;circle cx='668' cy='120' r='13' fill='#1E4FA8' /&gt;&#10;      &lt;text x='668' y='125' textAnchor='middle' fill='#FFFFFF' fontSize='13' fontWeight='bold'&gt;3&lt;/text&gt;&#10;      &lt;text x='668' y='147' textAnchor='middle' fill='#0E3F8C' fontSize='13' fontWeight='bold'&gt;items&lt;/text&gt;&#10;&#10;      &lt;text x='782' y='147' textAnchor='middle' fill='#0E3F8C' fontSize='13' fontWeight='bold'&gt;1..*&lt;/text&gt;&#10;      &lt;circle cx='775' cy='192' r='13' fill='#1E4FA8' /&gt;&#10;      &lt;text x='775' y='197' textAnchor='middle' fill='#FFFFFF' fontSize='13' fontWeight='bold'&gt;4&lt;/text&gt;&#10;&#10;      &lt;line x1='20' y1='248' x2='1160' y2='248' stroke='#E5E7EB' strokeWidth='1' /&gt;&#10;&#10;      &lt;g transform='translate(20,266)'&gt;&#10;        &lt;rect x='0' y='0' width='270' height='86' rx='8' fill='#F0F5FC' stroke='#D6DCE5' strokeWidth='1' /&gt;&#10;        &lt;circle cx='22' cy='22' r='12' fill='#1E4FA8' /&gt;&#10;        &lt;text x='22' y='27' textAnchor='middle' fill='#FFFFFF' fontSize='12' fontWeight='bold'&gt;1&lt;/text&gt;&#10;        &lt;text x='42' y='20' fill='#0E3F8C' fontSize='15' fontWeight='bold'&gt;Multiplicity&lt;/text&gt;&#10;        &lt;text x='42' y='40' fill='#4A5568' fontSize='12'&gt;How many may sit at this end.&lt;/text&gt;&#10;        &lt;text x='42' y='58' fill='#4A5568' fontSize='12'&gt;Read it aloud: one Order&lt;/text&gt;&#10;        &lt;text x='42' y='75' fill='#4A5568' fontSize='12'&gt;contains 1..* items.&lt;/text&gt;&#10;      &lt;/g&gt;&#10;      &lt;g transform='translate(315,266)'&gt;&#10;        &lt;rect x='0' y='0' width='270' height='86' rx='8' fill='#F0F5FC' stroke='#D6DCE5' strokeWidth='1' /&gt;&#10;        &lt;circle cx='22' cy='22' r='12' fill='#1E4FA8' /&gt;&#10;        &lt;text x='22' y='27' textAnchor='middle' fill='#FFFFFF' fontSize='12' fontWeight='bold'&gt;2&lt;/text&gt;&#10;        &lt;text x='42' y='20' fill='#0E3F8C' fontSize='15' fontWeight='bold'&gt;Association name&lt;/text&gt;&#10;        &lt;text x='42' y='40' fill='#4A5568' fontSize='12'&gt;What the link means, read left&lt;/text&gt;&#10;        &lt;text x='42' y='58' fill='#4A5568' fontSize='12'&gt;to right. Optional — but it&lt;/text&gt;&#10;        &lt;text x='42' y='75' fill='#4A5568' fontSize='12'&gt;removes every second guess.&lt;/text&gt;&#10;      &lt;/g&gt;&#10;      &lt;g transform='translate(610,266)'&gt;&#10;        &lt;rect x='0' y='0' width='270' height='86' rx='8' fill='#F0F5FC' stroke='#D6DCE5' strokeWidth='1' /&gt;&#10;        &lt;circle cx='22' cy='22' r='12' fill='#1E4FA8' /&gt;&#10;        &lt;text x='22' y='27' textAnchor='middle' fill='#FFFFFF' fontSize='12' fontWeight='bold'&gt;3&lt;/text&gt;&#10;        &lt;text x='42' y='20' fill='#0E3F8C' fontSize='15' fontWeight='bold'&gt;Role&lt;/text&gt;&#10;        &lt;text x='42' y='40' fill='#4A5568' fontSize='12'&gt;The name this class gives the&lt;/text&gt;&#10;        &lt;text x='42' y='58' fill='#4A5568' fontSize='12'&gt;other one. It usually becomes&lt;/text&gt;&#10;        &lt;text x='42' y='75' fill='#4A5568' fontSize='12'&gt;a field name in the code.&lt;/text&gt;&#10;      &lt;/g&gt;&#10;      &lt;g transform='translate(905,266)'&gt;&#10;        &lt;rect x='0' y='0' width='255' height='86' rx='8' fill='#F0F5FC' stroke='#D6DCE5' strokeWidth='1' /&gt;&#10;        &lt;circle cx='22' cy='22' r='12' fill='#1E4FA8' /&gt;&#10;        &lt;text x='22' y='27' textAnchor='middle' fill='#FFFFFF' fontSize='12' fontWeight='bold'&gt;4&lt;/text&gt;&#10;        &lt;text x='42' y='20' fill='#0E3F8C' fontSize='15' fontWeight='bold'&gt;Navigability&lt;/text&gt;&#10;        &lt;text x='42' y='40' fill='#4A5568' fontSize='12'&gt;The open arrow says: Order&lt;/text&gt;&#10;        &lt;text x='42' y='58' fill='#4A5568' fontSize='12'&gt;holds a reference, MenuItem&lt;/text&gt;&#10;        &lt;text x='42' y='75' fill='#4A5568' fontSize='12'&gt;does not look back.&lt;/text&gt;&#10;      &lt;/g&gt;&#10;    &lt;/svg&gt;&#10;  &lt;/Box&gt;&#10;  &lt;Box style={{ height: 32, padding: '0 40px', flexDirection: 'row', alignItems: 'center', justifyContent: 'space-between' }}&gt;&#10;    &lt;Text style={{ fontSize: 13, color: '#8B97A8' }}&gt;ISAD · Fall 2026 · aggregation and composition diamonds: Week 07&lt;/Text&gt;&#10;    &lt;Text style={{ fontSize: 14, color: '#1E4FA8', fontWeight: 'bold' }}&gt;16 / 38&lt;/Text&gt;&#10;  &lt;/Box&gt;&#10;&lt;/Slide&gt;"/>
+        <p:cNvPr id="116" name=""/>
         <p:cNvGrpSpPr/>
         <p:nvPr/>
       </p:nvGrpSpPr>
@@ -5219,7 +5321,10 @@
         </p:spPr>
         <p:txBody>
           <a:bodyPr/>
-          <a:p/>
+          <a:p>
+            <a:pPr/>
+            <a:endParaRPr/>
+          </a:p>
         </p:txBody>
       </p:sp>
       <p:sp>
@@ -5243,7 +5348,10 @@
         </p:spPr>
         <p:txBody>
           <a:bodyPr/>
-          <a:p/>
+          <a:p>
+            <a:pPr/>
+            <a:endParaRPr/>
+          </a:p>
         </p:txBody>
       </p:sp>
       <p:sp>
@@ -5497,7 +5605,7 @@
   <p:cSld>
     <p:spTree>
       <p:nvGrpSpPr>
-        <p:cNvPr id="126" name="" descr="&lt;Slide style={{ background: '#FFFFFF', padding: 0 }}&gt;&#10;  &lt;Box style={{ height: 72, background: '#1E4FA8', padding: '0 40px', flexDirection: 'row', alignItems: 'center', justifyContent: 'space-between' }}&gt;&#10;    &lt;Text style={{ fontSize: 15, color: '#B9CDF0', letterSpacing: 1 }}&gt;ISAD · INFORMATION SYSTEMS ANALYSIS &amp;amp; DESIGN&lt;/Text&gt;&#10;    &lt;Text style={{ fontSize: 15, color: '#B9CDF0' }}&gt;W03 · NOTATION&lt;/Text&gt;&#10;  &lt;/Box&gt;&#10;  &lt;Box style={{ flex: 1, padding: '18px 40px 0 40px', flexDirection: 'row', gap: 28 }}&gt;&#10;    &lt;Box style={{ width: 330, flexDirection: 'column', gap: 14, justifyContent: 'center' }}&gt;&#10;      &lt;Text style={{ fontSize: 32, fontWeight: 'bold', color: '#0E3F8C', lineHeight: 1.2 }}&gt;Multiplicity&lt;br /&gt;in Practice&lt;/Text&gt;&#10;      &lt;Box style={{ width: 56, height: 4, background: '#FFC107' }} /&gt;&#10;      &lt;Text style={{ fontSize: 15, color: '#4A5568', lineHeight: 1.6 }}&gt;A multiplicity is a constraint, not a comment. It is the first thing a reviewer should attack, because a wrong one silently breaks the code that follows.&lt;/Text&gt;&#10;      &lt;Box style={{ padding: '14px 16px', background: '#F0F5FC', borderRadius: 9, borderLeft: '4px solid #1E4FA8' }}&gt;&#10;        &lt;Text style={{ fontSize: 14, color: '#0E3F8C', lineHeight: 1.5, fontWeight: 'bold' }}&gt;Read it from the far end, out loud.&lt;/Text&gt;&#10;      &lt;/Box&gt;&#10;      &lt;Text style={{ fontSize: 13.5, color: '#8B97A8', lineHeight: 1.5 }}&gt;&quot;One Restaurant offers 1..* MenuItems.&quot; If the sentence sounds wrong, the number is wrong.&lt;/Text&gt;&#10;    &lt;/Box&gt;&#10;    &lt;Box style={{ flex: 1, flexDirection: 'column', gap: 10, justifyContent: 'center' }}&gt;&#10;      {[&#10;        { m: '1', n: 'exactly one', e: 'Each OrderLine belongs to exactly 1 Order.', w: 'A line with no order is meaningless — so the model forbids it.' },&#10;        { m: '0..1', n: 'optional', e: 'An Order has 0..1 Payment.', w: 'Unpaid is a legal state; do not force a Payment at construction.' },&#10;        { m: '*', n: 'zero or more', e: 'A Restaurant offers * MenuItems.', w: 'A brand-new restaurant with an empty menu is still valid.' },&#10;        { m: '1..*', n: 'at least one', e: 'An Order has 1..* OrderLines.', w: 'This is the rule that stops the empty order reaching the kitchen.' },&#10;        { m: 'm..n', n: 'a bounded range', e: 'A delivery slot takes 1..5 Orders.', w: 'Ranges carry a real business limit — the courier has one bag.' },&#10;      ].map((r) =&gt; (&#10;        &lt;Box key={r.m} style={{ flexDirection: 'row', alignItems: 'center', gap: 16, padding: '12px 18px', background: '#F7F9FC', borderRadius: 10, border: '1px solid #E5E7EB' }}&gt;&#10;          &lt;Box style={{ width: 92, alignItems: 'center', padding: '6px 0', background: '#0E3F8C', borderRadius: 8 }}&gt;&#10;            &lt;Text style={{ fontSize: 18, fontWeight: 'bold', color: '#FFFFFF', fontFamily: 'Georgia, serif' }}&gt;{r.m}&lt;/Text&gt;&#10;          &lt;/Box&gt;&#10;          &lt;Box style={{ flex: 1, flexDirection: 'column', gap: 2 }}&gt;&#10;            &lt;Text style={{ fontSize: 16, fontWeight: 'bold', color: '#0E3F8C' }}&gt;{r.n} — &lt;Text style={{ fontWeight: 'normal', color: '#1A2230' }}&gt;{r.e}&lt;/Text&gt;&lt;/Text&gt;&#10;            &lt;Text style={{ fontSize: 13, color: '#8B97A8', lineHeight: 1.4 }}&gt;{r.w}&lt;/Text&gt;&#10;          &lt;/Box&gt;&#10;        &lt;/Box&gt;&#10;      ))}&#10;    &lt;/Box&gt;&#10;  &lt;/Box&gt;&#10;  &lt;Box style={{ height: 44, background: '#0E3F8C', padding: '0 40px', flexDirection: 'row', alignItems: 'center', justifyContent: 'center' }}&gt;&#10;    &lt;Text style={{ fontSize: 17, color: '#FFFFFF', fontWeight: '600' }}&gt;Every multiplicity you write is a rule the database and the constructor will have to enforce.&lt;/Text&gt;&#10;  &lt;/Box&gt;&#10;&lt;/Slide&gt;"/>
+        <p:cNvPr id="126" name=""/>
         <p:cNvGrpSpPr/>
         <p:nvPr/>
       </p:nvGrpSpPr>
@@ -5530,7 +5638,10 @@
         </p:spPr>
         <p:txBody>
           <a:bodyPr/>
-          <a:p/>
+          <a:p>
+            <a:pPr/>
+            <a:endParaRPr/>
+          </a:p>
         </p:txBody>
       </p:sp>
       <p:sp>
@@ -5554,7 +5665,10 @@
         </p:spPr>
         <p:txBody>
           <a:bodyPr/>
-          <a:p/>
+          <a:p>
+            <a:pPr/>
+            <a:endParaRPr/>
+          </a:p>
         </p:txBody>
       </p:sp>
       <p:sp>
@@ -5701,7 +5815,10 @@
         </p:spPr>
         <p:txBody>
           <a:bodyPr/>
-          <a:p/>
+          <a:p>
+            <a:pPr/>
+            <a:endParaRPr/>
+          </a:p>
         </p:txBody>
       </p:sp>
       <p:sp>
@@ -5764,7 +5881,10 @@
         </p:spPr>
         <p:txBody>
           <a:bodyPr/>
-          <a:p/>
+          <a:p>
+            <a:pPr/>
+            <a:endParaRPr/>
+          </a:p>
         </p:txBody>
       </p:sp>
       <p:sp>
@@ -5821,7 +5941,10 @@
         </p:spPr>
         <p:txBody>
           <a:bodyPr/>
-          <a:p/>
+          <a:p>
+            <a:pPr/>
+            <a:endParaRPr/>
+          </a:p>
         </p:txBody>
       </p:sp>
       <p:sp>
@@ -5924,7 +6047,10 @@
         </p:spPr>
         <p:txBody>
           <a:bodyPr/>
-          <a:p/>
+          <a:p>
+            <a:pPr/>
+            <a:endParaRPr/>
+          </a:p>
         </p:txBody>
       </p:sp>
       <p:sp>
@@ -5950,7 +6076,10 @@
         </p:spPr>
         <p:txBody>
           <a:bodyPr/>
-          <a:p/>
+          <a:p>
+            <a:pPr/>
+            <a:endParaRPr/>
+          </a:p>
         </p:txBody>
       </p:sp>
       <p:sp>
@@ -6106,7 +6235,10 @@
         </p:spPr>
         <p:txBody>
           <a:bodyPr/>
-          <a:p/>
+          <a:p>
+            <a:pPr/>
+            <a:endParaRPr/>
+          </a:p>
         </p:txBody>
       </p:sp>
       <p:sp>
@@ -6132,7 +6264,10 @@
         </p:spPr>
         <p:txBody>
           <a:bodyPr/>
-          <a:p/>
+          <a:p>
+            <a:pPr/>
+            <a:endParaRPr/>
+          </a:p>
         </p:txBody>
       </p:sp>
       <p:sp>
@@ -6288,7 +6423,10 @@
         </p:spPr>
         <p:txBody>
           <a:bodyPr/>
-          <a:p/>
+          <a:p>
+            <a:pPr/>
+            <a:endParaRPr/>
+          </a:p>
         </p:txBody>
       </p:sp>
       <p:sp>
@@ -6314,7 +6452,10 @@
         </p:spPr>
         <p:txBody>
           <a:bodyPr/>
-          <a:p/>
+          <a:p>
+            <a:pPr/>
+            <a:endParaRPr/>
+          </a:p>
         </p:txBody>
       </p:sp>
       <p:sp>
@@ -6470,7 +6611,10 @@
         </p:spPr>
         <p:txBody>
           <a:bodyPr/>
-          <a:p/>
+          <a:p>
+            <a:pPr/>
+            <a:endParaRPr/>
+          </a:p>
         </p:txBody>
       </p:sp>
       <p:sp>
@@ -6496,7 +6640,10 @@
         </p:spPr>
         <p:txBody>
           <a:bodyPr/>
-          <a:p/>
+          <a:p>
+            <a:pPr/>
+            <a:endParaRPr/>
+          </a:p>
         </p:txBody>
       </p:sp>
       <p:sp>
@@ -6652,7 +6799,10 @@
         </p:spPr>
         <p:txBody>
           <a:bodyPr/>
-          <a:p/>
+          <a:p>
+            <a:pPr/>
+            <a:endParaRPr/>
+          </a:p>
         </p:txBody>
       </p:sp>
       <p:sp>
@@ -6678,7 +6828,10 @@
         </p:spPr>
         <p:txBody>
           <a:bodyPr/>
-          <a:p/>
+          <a:p>
+            <a:pPr/>
+            <a:endParaRPr/>
+          </a:p>
         </p:txBody>
       </p:sp>
       <p:sp>
@@ -6827,7 +6980,10 @@
         </p:spPr>
         <p:txBody>
           <a:bodyPr/>
-          <a:p/>
+          <a:p>
+            <a:pPr/>
+            <a:endParaRPr/>
+          </a:p>
         </p:txBody>
       </p:sp>
       <p:sp>
@@ -6875,7 +7031,7 @@
   <p:cSld>
     <p:spTree>
       <p:nvGrpSpPr>
-        <p:cNvPr id="165" name="" descr="&lt;Slide style={{ background: '#FFFFFF', padding: 0 }}&gt;&#10;  &lt;Box style={{ height: 72, background: '#1E4FA8', padding: '0 40px', flexDirection: 'row', alignItems: 'center', justifyContent: 'space-between' }}&gt;&#10;    &lt;Text style={{ fontSize: 15, color: '#B9CDF0', letterSpacing: 1 }}&gt;ISAD · INFORMATION SYSTEMS ANALYSIS &amp;amp; DESIGN&lt;/Text&gt;&#10;    &lt;Text style={{ fontSize: 15, color: '#B9CDF0' }}&gt;W03 · NOTATION&lt;/Text&gt;&#10;  &lt;/Box&gt;&#10;  &lt;Box style={{ padding: '14px 40px 0 40px', flexDirection: 'row', alignItems: 'center', justifyContent: 'space-between' }}&gt;&#10;    &lt;Text style={{ fontSize: 30, fontWeight: 'bold', color: '#0E3F8C' }}&gt;Lifelines &amp;amp; Messages&lt;/Text&gt;&#10;    &lt;Text style={{ fontSize: 14, color: '#1E4FA8', fontWeight: 'bold' }}&gt;18 / 38&lt;/Text&gt;&#10;  &lt;/Box&gt;&#10;  &lt;Box style={{ flex: 1, padding: '6px 40px 0 40px', flexDirection: 'row', gap: 26 }}&gt;&#10;    &lt;Box style={{ flex: 5, justifyContent: 'center', alignItems: 'center' }}&gt;&#10;      &lt;svg width={560} height={400} viewBox='0 0 560 400'&gt;&#10;        &lt;defs&gt;&#10;          &lt;marker id='f18' markerWidth='9' markerHeight='9' refX='8' refY='4.5' orient='auto'&gt;&#10;            &lt;path d='M0,0 L9,4.5 L0,9 z' fill='#1E4FA8' /&gt;&#10;          &lt;/marker&gt;&#10;          &lt;marker id='o18' markerWidth='9' markerHeight='9' refX='8' refY='4.5' orient='auto'&gt;&#10;            &lt;path d='M0,0 L9,4.5 L0,9 z' fill='#FFFFFF' stroke='#1E4FA8' strokeWidth='1.4' /&gt;&#10;          &lt;/marker&gt;&#10;        &lt;/defs&gt;&#10;&#10;        &lt;rect x='20' y='18' width='150' height='30' rx='3' fill='#E8EFF8' stroke='#1E4FA8' strokeWidth='1.6' /&gt;&#10;        &lt;text x='95' y='38' textAnchor='middle' fill='#0E3F8C' fontSize='11.5' fontWeight='bold'&gt;:OrderController&lt;/text&gt;&#10;        &lt;rect x='200' y='18' width='150' height='30' rx='3' fill='#E8EFF8' stroke='#1E4FA8' strokeWidth='1.6' /&gt;&#10;        &lt;text x='275' y='38' textAnchor='middle' fill='#0E3F8C' fontSize='11.5' fontWeight='bold'&gt;: Order&lt;/text&gt;&#10;&#10;        &lt;line x1='95' y1='48' x2='95' y2='384' stroke='#8B97A8' strokeWidth='1' strokeDasharray='4 3' /&gt;&#10;        &lt;line x1='275' y1='48' x2='275' y2='384' stroke='#8B97A8' strokeWidth='1' strokeDasharray='4 3' /&gt;&#10;        &lt;line x1='465' y1='190' x2='465' y2='384' stroke='#8B97A8' strokeWidth='1' strokeDasharray='4 3' /&gt;&#10;&#10;        &lt;rect x='269' y='80' width='13' height='190' fill='#DCE8F8' stroke='#3D7BD9' strokeWidth='1' /&gt;&#10;        &lt;rect x='459' y='222' width='13' height='56' fill='#DCE8F8' stroke='#3D7BD9' strokeWidth='1' /&gt;&#10;&#10;        &lt;line x1='95' y1='80' x2='267' y2='80' stroke='#1E4FA8' strokeWidth='1.6' markerEnd='url(#f18)' /&gt;&#10;        &lt;text x='104' y='74' fill='#1A2230' fontSize='11'&gt;submit(cart)&lt;/text&gt;&#10;        &lt;text x='288' y='74' fill='#8B97A8' fontSize='10'&gt;synchronous call&lt;/text&gt;&#10;&#10;        &lt;path d='M275,118 L308,118 L308,138 L279,138' fill='none' stroke='#1E4FA8' strokeWidth='1.6' markerEnd='url(#f18)' /&gt;&#10;        &lt;text x='316' y='130' fill='#1A2230' fontSize='11'&gt;validate()&lt;/text&gt;&#10;        &lt;text x='316' y='146' fill='#8B97A8' fontSize='10'&gt;self-message&lt;/text&gt;&#10;&#10;        &lt;rect x='390' y='160' width='150' height='30' rx='3' fill='#FFFFFF' stroke='#1E4FA8' strokeWidth='1.6' /&gt;&#10;        &lt;text x='465' y='180' textAnchor='middle' fill='#0E3F8C' fontSize='11.5' fontWeight='bold'&gt;: OrderLine&lt;/text&gt;&#10;        &lt;line x1='275' y1='175' x2='386' y2='175' stroke='#1E4FA8' strokeWidth='1.6' markerEnd='url(#f18)' /&gt;&#10;        &lt;text x='286' y='169' fill='#3D7BD9' fontSize='11'&gt;«create»&lt;/text&gt;&#10;&#10;        &lt;line x1='275' y1='238' x2='457' y2='238' stroke='#1E4FA8' strokeWidth='1.6' markerEnd='url(#f18)' /&gt;&#10;        &lt;text x='286' y='232' fill='#1A2230' fontSize='11'&gt;setQty(2)&lt;/text&gt;&#10;&#10;        &lt;line x1='465' y1='272' x2='279' y2='272' stroke='#3D7BD9' strokeWidth='1.6' strokeDasharray='5 3' markerEnd='url(#f18)' /&gt;&#10;        &lt;text x='292' y='266' fill='#3D7BD9' fontSize='11'&gt;subtotal : Money&lt;/text&gt;&#10;        &lt;text x='292' y='290' fill='#8B97A8' fontSize='10'&gt;dashed = return&lt;/text&gt;&#10;&#10;        &lt;line x1='275' y1='330' x2='99' y2='330' stroke='#1E4FA8' strokeWidth='1.6' markerEnd='url(#o18)' /&gt;&#10;        &lt;text x='120' y='324' fill='#1A2230' fontSize='11'&gt;notify()&lt;/text&gt;&#10;        &lt;text x='120' y='346' fill='#8B97A8' fontSize='10'&gt;open head = asynchronous&lt;/text&gt;&#10;      &lt;/svg&gt;&#10;    &lt;/Box&gt;&#10;    &lt;Box style={{ flex: 4, flexDirection: 'column', gap: 11, justifyContent: 'center' }}&gt;&#10;      {[&#10;        ['grip-lines-vertical', 'Lifeline', 'A dashed vertical line: this object exists and is available. It is not a thread.'],&#10;        ['bars-progress', 'Activation bar', 'The narrow box on the lifeline: this object is on the call stack right now.'],&#10;        ['arrow-right', 'Message', 'Filled head = a call that blocks. Open head = fire and forget. Dashed = the answer.'],&#10;        ['plus', 'Creation', 'The arrow points at the box, not at the lifeline — the object starts life mid-scenario.'],&#10;      ].map(([icon, t, d]) =&gt; (&#10;        &lt;Box key={t} style={{ flexDirection: 'row', gap: 12, alignItems: 'flex-start', padding: '13px 16px', background: '#F7F9FC', borderRadius: 10, border: '1px solid #E5E7EB' }}&gt;&#10;          &lt;Box style={{ width: 38, height: 38, borderRadius: 9, background: '#E8EFF8', justifyContent: 'center', alignItems: 'center' }}&gt;&#10;            &lt;FAIcon name={icon} style={{ fill: '#1E4FA8', width: 18, height: 18 }} /&gt;&#10;          &lt;/Box&gt;&#10;          &lt;Box style={{ flex: 1, flexDirection: 'column', gap: 2 }}&gt;&#10;            &lt;Text style={{ fontSize: 16, fontWeight: 'bold', color: '#0E3F8C' }}&gt;{t}&lt;/Text&gt;&#10;            &lt;Text style={{ fontSize: 13.5, color: '#4A5568', lineHeight: 1.45 }}&gt;{d}&lt;/Text&gt;&#10;          &lt;/Box&gt;&#10;        &lt;/Box&gt;&#10;      ))}&#10;      &lt;Box style={{ padding: '13px 16px', background: '#FDF3F3', borderRadius: 10, borderLeft: '4px solid #D9534F' }}&gt;&#10;        &lt;Text style={{ fontSize: 14, color: '#4A5568', lineHeight: 1.5 }}&gt;&lt;Text style={{ fontWeight: 'bold', color: '#D9534F' }}&gt;One diagram, one scenario.&lt;/Text&gt; Do not draw every branch on the same sheet — Week 08 shows what to do instead.&lt;/Text&gt;&#10;      &lt;/Box&gt;&#10;    &lt;/Box&gt;&#10;  &lt;/Box&gt;&#10;  &lt;Box style={{ height: 34, padding: '0 40px', flexDirection: 'row', alignItems: 'center', justifyContent: 'space-between' }}&gt;&#10;    &lt;Text style={{ fontSize: 13, color: '#8B97A8' }}&gt;ISAD · Fall 2026&lt;/Text&gt;&#10;    &lt;Text style={{ fontSize: 14, color: '#1E4FA8', fontWeight: 'bold' }}&gt;18 / 38&lt;/Text&gt;&#10;  &lt;/Box&gt;&#10;&lt;/Slide&gt;"/>
+        <p:cNvPr id="165" name=""/>
         <p:cNvGrpSpPr/>
         <p:nvPr/>
       </p:nvGrpSpPr>
@@ -6908,7 +7064,10 @@
         </p:spPr>
         <p:txBody>
           <a:bodyPr/>
-          <a:p/>
+          <a:p>
+            <a:pPr/>
+            <a:endParaRPr/>
+          </a:p>
         </p:txBody>
       </p:sp>
       <p:sp>
@@ -6932,7 +7091,10 @@
         </p:spPr>
         <p:txBody>
           <a:bodyPr/>
-          <a:p/>
+          <a:p>
+            <a:pPr/>
+            <a:endParaRPr/>
+          </a:p>
         </p:txBody>
       </p:sp>
       <p:sp>
@@ -7134,7 +7296,10 @@
         </p:spPr>
         <p:txBody>
           <a:bodyPr/>
-          <a:p/>
+          <a:p>
+            <a:pPr/>
+            <a:endParaRPr/>
+          </a:p>
         </p:txBody>
       </p:sp>
       <p:sp>
@@ -7160,7 +7325,10 @@
         </p:spPr>
         <p:txBody>
           <a:bodyPr/>
-          <a:p/>
+          <a:p>
+            <a:pPr/>
+            <a:endParaRPr/>
+          </a:p>
         </p:txBody>
       </p:sp>
       <p:pic>
@@ -7292,7 +7460,10 @@
         </p:spPr>
         <p:txBody>
           <a:bodyPr/>
-          <a:p/>
+          <a:p>
+            <a:pPr/>
+            <a:endParaRPr/>
+          </a:p>
         </p:txBody>
       </p:sp>
       <p:sp>
@@ -7318,7 +7489,10 @@
         </p:spPr>
         <p:txBody>
           <a:bodyPr/>
-          <a:p/>
+          <a:p>
+            <a:pPr/>
+            <a:endParaRPr/>
+          </a:p>
         </p:txBody>
       </p:sp>
       <p:pic>
@@ -7450,7 +7624,10 @@
         </p:spPr>
         <p:txBody>
           <a:bodyPr/>
-          <a:p/>
+          <a:p>
+            <a:pPr/>
+            <a:endParaRPr/>
+          </a:p>
         </p:txBody>
       </p:sp>
       <p:sp>
@@ -7476,7 +7653,10 @@
         </p:spPr>
         <p:txBody>
           <a:bodyPr/>
-          <a:p/>
+          <a:p>
+            <a:pPr/>
+            <a:endParaRPr/>
+          </a:p>
         </p:txBody>
       </p:sp>
       <p:pic>
@@ -7610,7 +7790,10 @@
         </p:spPr>
         <p:txBody>
           <a:bodyPr/>
-          <a:p/>
+          <a:p>
+            <a:pPr/>
+            <a:endParaRPr/>
+          </a:p>
         </p:txBody>
       </p:sp>
       <p:sp>
@@ -7636,7 +7819,10 @@
         </p:spPr>
         <p:txBody>
           <a:bodyPr/>
-          <a:p/>
+          <a:p>
+            <a:pPr/>
+            <a:endParaRPr/>
+          </a:p>
         </p:txBody>
       </p:sp>
       <p:pic>
@@ -7765,7 +7951,10 @@
         </p:spPr>
         <p:txBody>
           <a:bodyPr/>
-          <a:p/>
+          <a:p>
+            <a:pPr/>
+            <a:endParaRPr/>
+          </a:p>
         </p:txBody>
       </p:sp>
       <p:sp>
@@ -7822,7 +8011,10 @@
         </p:spPr>
         <p:txBody>
           <a:bodyPr/>
-          <a:p/>
+          <a:p>
+            <a:pPr/>
+            <a:endParaRPr/>
+          </a:p>
         </p:txBody>
       </p:sp>
       <p:sp>
@@ -7952,7 +8144,7 @@
   <p:cSld>
     <p:spTree>
       <p:nvGrpSpPr>
-        <p:cNvPr id="198" name="" descr="&lt;Slide style={{ background: '#FFFFFF', padding: 0 }}&gt;&#10;  &lt;Box style={{ height: 72, background: '#1E4FA8', padding: '0 40px', flexDirection: 'row', alignItems: 'center', justifyContent: 'space-between' }}&gt;&#10;    &lt;Text style={{ fontSize: 15, color: '#B9CDF0', letterSpacing: 1 }}&gt;ISAD · INFORMATION SYSTEMS ANALYSIS &amp;amp; DESIGN&lt;/Text&gt;&#10;    &lt;Text style={{ fontSize: 15, color: '#B9CDF0' }}&gt;W03 · NOTATION&lt;/Text&gt;&#10;  &lt;/Box&gt;&#10;  &lt;Box style={{ flex: 1, padding: '30px 80px 0 80px', flexDirection: 'column', justifyContent: 'center', alignItems: 'center', gap: 28 }}&gt;&#10;    &lt;Text style={{ fontSize: 40, fontWeight: 'bold', color: '#0E3F8C', fontFamily: 'Georgia, serif', textAlign: 'center', lineHeight: 1.25 }}&gt;&#10;      Drawing it correctly is not&lt;br /&gt;the same as saying something.&#10;    &lt;/Text&gt;&#10;    &lt;Box style={{ width: 80, height: 4, background: '#FFC107' }} /&gt;&#10;    &lt;Box style={{ flexDirection: 'column', gap: 16, width: '100%' }}&gt;&#10;      {[&#10;        {&#10;          i: 'check-double',&#10;          t: 'Syntax is the easy half',&#10;          d: 'Correct arrowheads, matching multiplicities, legal compartment syntax. A tool can check all of it for you — and a correct diagram can still say nothing at all.',&#10;        },&#10;        {&#10;          i: 'triangle-exclamation',&#10;          t: 'Semantics is where models fail',&#10;          d: 'A class called &quot;OrderManager&quot;, an association nobody can read aloud, a state diagram with no events. Every box is legal; the model conveys no decision.',&#10;        },&#10;      ].map((a) =&gt; (&#10;        &lt;Box key={a.t} style={{ flexDirection: 'row', gap: 18, padding: '20px 24px', background: '#F7F9FC', borderRadius: 12, border: '1px solid #E5E7EB', alignItems: 'flex-start' }}&gt;&#10;          &lt;Box style={{ width: 46, height: 46, borderRadius: 11, background: '#E8EFF8', justifyContent: 'center', alignItems: 'center' }}&gt;&#10;            &lt;FAIcon name={a.i} style={{ fill: '#1E4FA8', width: 22, height: 22 }} /&gt;&#10;          &lt;/Box&gt;&#10;          &lt;Box style={{ flex: 1, flexDirection: 'column', gap: 5 }}&gt;&#10;            &lt;Text style={{ fontSize: 19, fontWeight: 'bold', color: '#0E3F8C' }}&gt;{a.t}&lt;/Text&gt;&#10;            &lt;Text style={{ fontSize: 15, color: '#4A5568', lineHeight: 1.6 }}&gt;{a.d}&lt;/Text&gt;&#10;          &lt;/Box&gt;&#10;        &lt;/Box&gt;&#10;      ))}&#10;    &lt;/Box&gt;&#10;    &lt;Box style={{ padding: '16px 24px', background: '#0E3F8C', borderRadius: 10, width: '100%', flexDirection: 'column', gap: 4 }}&gt;&#10;      &lt;Text style={{ fontSize: 16, color: '#FFFFFF', fontWeight: 'bold' }}&gt;The test to apply to every diagram you draw this term&lt;/Text&gt;&#10;      &lt;Text style={{ fontSize: 15, color: '#C5D4EA', lineHeight: 1.55 }}&gt;Hand it to someone who was not in the room. If they cannot state back the decision you made, the notation was fine and the model was empty.&lt;/Text&gt;&#10;    &lt;/Box&gt;&#10;  &lt;/Box&gt;&#10;  &lt;Box style={{ height: 36, padding: '0 40px', flexDirection: 'row', alignItems: 'center', justifyContent: 'space-between' }}&gt;&#10;    &lt;Text style={{ fontSize: 13, color: '#8B97A8' }}&gt;ISAD · Fall 2026&lt;/Text&gt;&#10;    &lt;Text style={{ fontSize: 14, color: '#1E4FA8', fontWeight: 'bold' }}&gt;19 / 38&lt;/Text&gt;&#10;  &lt;/Box&gt;&#10;&lt;/Slide&gt;"/>
+        <p:cNvPr id="198" name=""/>
         <p:cNvGrpSpPr/>
         <p:nvPr/>
       </p:nvGrpSpPr>
@@ -7985,7 +8177,10 @@
         </p:spPr>
         <p:txBody>
           <a:bodyPr/>
-          <a:p/>
+          <a:p>
+            <a:pPr/>
+            <a:endParaRPr/>
+          </a:p>
         </p:txBody>
       </p:sp>
       <p:sp>
@@ -8009,7 +8204,10 @@
         </p:spPr>
         <p:txBody>
           <a:bodyPr/>
-          <a:p/>
+          <a:p>
+            <a:pPr/>
+            <a:endParaRPr/>
+          </a:p>
         </p:txBody>
       </p:sp>
       <p:sp>
@@ -8156,7 +8354,10 @@
         </p:spPr>
         <p:txBody>
           <a:bodyPr/>
-          <a:p/>
+          <a:p>
+            <a:pPr/>
+            <a:endParaRPr/>
+          </a:p>
         </p:txBody>
       </p:sp>
       <p:sp>
@@ -8187,7 +8388,10 @@
         </p:spPr>
         <p:txBody>
           <a:bodyPr/>
-          <a:p/>
+          <a:p>
+            <a:pPr/>
+            <a:endParaRPr/>
+          </a:p>
         </p:txBody>
       </p:sp>
       <p:sp>
@@ -8213,7 +8417,10 @@
         </p:spPr>
         <p:txBody>
           <a:bodyPr/>
-          <a:p/>
+          <a:p>
+            <a:pPr/>
+            <a:endParaRPr/>
+          </a:p>
         </p:txBody>
       </p:sp>
       <p:pic>
@@ -8347,7 +8554,10 @@
         </p:spPr>
         <p:txBody>
           <a:bodyPr/>
-          <a:p/>
+          <a:p>
+            <a:pPr/>
+            <a:endParaRPr/>
+          </a:p>
         </p:txBody>
       </p:sp>
       <p:sp>
@@ -8373,7 +8583,10 @@
         </p:spPr>
         <p:txBody>
           <a:bodyPr/>
-          <a:p/>
+          <a:p>
+            <a:pPr/>
+            <a:endParaRPr/>
+          </a:p>
         </p:txBody>
       </p:sp>
       <p:pic>
@@ -8502,7 +8715,10 @@
         </p:spPr>
         <p:txBody>
           <a:bodyPr/>
-          <a:p/>
+          <a:p>
+            <a:pPr/>
+            <a:endParaRPr/>
+          </a:p>
         </p:txBody>
       </p:sp>
       <p:sp>
@@ -8655,7 +8871,7 @@
   <p:cSld>
     <p:spTree>
       <p:nvGrpSpPr>
-        <p:cNvPr id="220" name="" descr="&lt;Slide style={{ background: '#FFFFFF', padding: 0 }}&gt;&#10;  &lt;Box style={{ flexDirection: 'row', height: '100%' }}&gt;&#10;    &lt;Box style={{ width: 320, background: '#0E3F8C', padding: '60px 44px', flexDirection: 'column', justifyContent: 'space-between' }}&gt;&#10;      &lt;Box&gt;&#10;        &lt;Box style={{ width: 40, height: 4, background: '#FFC107', marginBottom: 24 }} /&gt;&#10;        &lt;Text style={{ fontSize: 46, fontWeight: 'bold', color: '#FFFFFF', fontFamily: 'Georgia, serif', lineHeight: 1.15 }}&gt;Contents&lt;/Text&gt;&#10;        &lt;Text style={{ fontSize: 16, color: '#7FA2D6', marginTop: 18, letterSpacing: 1 }}&gt;WEEK 03 · ROADMAP&lt;/Text&gt;&#10;      &lt;/Box&gt;&#10;      &lt;Text style={{ fontSize: 15, color: '#5B84C4', lineHeight: 1.5 }}&gt;UML Essentials&lt;br /&gt;&amp;amp; Modeling Workflow&lt;/Text&gt;&#10;    &lt;/Box&gt;&#10;    &lt;Box style={{ flex: 1, padding: '56px 56px', flexDirection: 'column', gap: 18 }}&gt;&#10;      {[&#10;        { n: '01', t: 'Recap &amp;amp; Why Models', p: '03' },&#10;        { n: '02', t: 'The UML Map', p: '07' },&#10;        { n: '03', t: 'Notation Boot Camp', p: '13' },&#10;        { n: '04', t: 'The Modeling Workflow', p: '20' },&#10;        { n: '05', t: 'Toolchain', p: '26' },&#10;        { n: '06', t: 'Lab — Exercises &amp;amp; Team Setup', p: '31' },&#10;      ].map((item) =&gt; (&#10;        &lt;Box key={item.n} style={{ flexDirection: 'row', alignItems: 'center', gap: 20, padding: '16px 20px', background: '#F7F9FC', borderRadius: 10, border: '1px solid #E5E7EB' }}&gt;&#10;          &lt;Box style={{ width: 52, height: 52, borderRadius: 8, background: '#1E4FA8', justifyContent: 'center', alignItems: 'center' }}&gt;&#10;            &lt;Text style={{ fontSize: 22, fontWeight: 'bold', color: '#FFFFFF' }}&gt;{item.n}&lt;/Text&gt;&#10;          &lt;/Box&gt;&#10;          &lt;Text style={{ flex: 1, fontSize: 21, color: '#1A2230', fontWeight: '600' }}&gt;{item.t}&lt;/Text&gt;&#10;          &lt;Text style={{ fontSize: 20, color: '#8B97A8', fontWeight: 'bold' }}&gt;{item.p}&lt;/Text&gt;&#10;        &lt;/Box&gt;&#10;      ))}&#10;    &lt;/Box&gt;&#10;  &lt;/Box&gt;&#10;&lt;/Slide&gt;"/>
+        <p:cNvPr id="220" name=""/>
         <p:cNvGrpSpPr/>
         <p:nvPr/>
       </p:nvGrpSpPr>
@@ -8688,7 +8904,10 @@
         </p:spPr>
         <p:txBody>
           <a:bodyPr/>
-          <a:p/>
+          <a:p>
+            <a:pPr/>
+            <a:endParaRPr/>
+          </a:p>
         </p:txBody>
       </p:sp>
       <p:sp>
@@ -8712,7 +8931,10 @@
         </p:spPr>
         <p:txBody>
           <a:bodyPr/>
-          <a:p/>
+          <a:p>
+            <a:pPr/>
+            <a:endParaRPr/>
+          </a:p>
         </p:txBody>
       </p:sp>
       <p:sp>
@@ -8736,7 +8958,10 @@
         </p:spPr>
         <p:txBody>
           <a:bodyPr/>
-          <a:p/>
+          <a:p>
+            <a:pPr/>
+            <a:endParaRPr/>
+          </a:p>
         </p:txBody>
       </p:sp>
       <p:sp>
@@ -8890,7 +9115,10 @@
         </p:spPr>
         <p:txBody>
           <a:bodyPr/>
-          <a:p/>
+          <a:p>
+            <a:pPr/>
+            <a:endParaRPr/>
+          </a:p>
         </p:txBody>
       </p:sp>
       <p:sp>
@@ -8916,7 +9144,10 @@
         </p:spPr>
         <p:txBody>
           <a:bodyPr/>
-          <a:p/>
+          <a:p>
+            <a:pPr/>
+            <a:endParaRPr/>
+          </a:p>
         </p:txBody>
       </p:sp>
       <p:sp>
@@ -9052,7 +9283,10 @@
         </p:spPr>
         <p:txBody>
           <a:bodyPr/>
-          <a:p/>
+          <a:p>
+            <a:pPr/>
+            <a:endParaRPr/>
+          </a:p>
         </p:txBody>
       </p:sp>
       <p:sp>
@@ -9078,7 +9312,10 @@
         </p:spPr>
         <p:txBody>
           <a:bodyPr/>
-          <a:p/>
+          <a:p>
+            <a:pPr/>
+            <a:endParaRPr/>
+          </a:p>
         </p:txBody>
       </p:sp>
       <p:sp>
@@ -9214,7 +9451,10 @@
         </p:spPr>
         <p:txBody>
           <a:bodyPr/>
-          <a:p/>
+          <a:p>
+            <a:pPr/>
+            <a:endParaRPr/>
+          </a:p>
         </p:txBody>
       </p:sp>
       <p:sp>
@@ -9240,7 +9480,10 @@
         </p:spPr>
         <p:txBody>
           <a:bodyPr/>
-          <a:p/>
+          <a:p>
+            <a:pPr/>
+            <a:endParaRPr/>
+          </a:p>
         </p:txBody>
       </p:sp>
       <p:sp>
@@ -9376,7 +9619,10 @@
         </p:spPr>
         <p:txBody>
           <a:bodyPr/>
-          <a:p/>
+          <a:p>
+            <a:pPr/>
+            <a:endParaRPr/>
+          </a:p>
         </p:txBody>
       </p:sp>
       <p:sp>
@@ -9402,7 +9648,10 @@
         </p:spPr>
         <p:txBody>
           <a:bodyPr/>
-          <a:p/>
+          <a:p>
+            <a:pPr/>
+            <a:endParaRPr/>
+          </a:p>
         </p:txBody>
       </p:sp>
       <p:sp>
@@ -9538,7 +9787,10 @@
         </p:spPr>
         <p:txBody>
           <a:bodyPr/>
-          <a:p/>
+          <a:p>
+            <a:pPr/>
+            <a:endParaRPr/>
+          </a:p>
         </p:txBody>
       </p:sp>
       <p:sp>
@@ -9564,7 +9816,10 @@
         </p:spPr>
         <p:txBody>
           <a:bodyPr/>
-          <a:p/>
+          <a:p>
+            <a:pPr/>
+            <a:endParaRPr/>
+          </a:p>
         </p:txBody>
       </p:sp>
       <p:sp>
@@ -9700,7 +9955,10 @@
         </p:spPr>
         <p:txBody>
           <a:bodyPr/>
-          <a:p/>
+          <a:p>
+            <a:pPr/>
+            <a:endParaRPr/>
+          </a:p>
         </p:txBody>
       </p:sp>
       <p:sp>
@@ -9726,7 +9984,10 @@
         </p:spPr>
         <p:txBody>
           <a:bodyPr/>
-          <a:p/>
+          <a:p>
+            <a:pPr/>
+            <a:endParaRPr/>
+          </a:p>
         </p:txBody>
       </p:sp>
       <p:sp>
@@ -9844,7 +10105,7 @@
   <p:cSld>
     <p:spTree>
       <p:nvGrpSpPr>
-        <p:cNvPr id="257" name="" descr="&lt;Slide style={{ background: '#0E3F8C', padding: 0 }}&gt;&#10;  &lt;Box style={{ flexDirection: 'row', height: '100%', position: 'relative' }}&gt;&#10;    &lt;Box style={{ position: 'absolute', top: 0, left: 0, right: 0, height: 8, background: '#1E4FA8' }} /&gt;&#10;    &lt;Box style={{ width: 300, justifyContent: 'center', alignItems: 'center', borderRight: '1px solid #2B5793' }}&gt;&#10;      &lt;Text style={{ fontSize: 220, fontWeight: 'bold', color: '#3D7BD9', fontFamily: 'Georgia, serif', lineHeight: 1 }}&gt;04&lt;/Text&gt;&#10;    &lt;/Box&gt;&#10;    &lt;Box style={{ flex: 1, padding: '70px 64px', flexDirection: 'column', justifyContent: 'center' }}&gt;&#10;      &lt;Text style={{ fontSize: 15, color: '#7FA2D6', letterSpacing: 2, marginBottom: 18 }}&gt;PART 1 · LECTURE&lt;/Text&gt;&#10;      &lt;Text style={{ fontSize: 48, fontWeight: 'bold', color: '#FFFFFF', lineHeight: 1.18 }}&gt;The Modeling&lt;br /&gt;Workflow&lt;/Text&gt;&#10;      &lt;Box style={{ width: 64, height: 4, background: '#FFC107', marginTop: 26, marginBottom: 26 }} /&gt;&#10;      &lt;Box style={{ flexDirection: 'column', gap: 12 }}&gt;&#10;        {[&#10;          'Use case → domain model → sequence → design class',&#10;          'Each artefact feeds the next one',&#10;          'Iterate in passes; never finish one before starting two',&#10;        ].map((t) =&gt; (&#10;          &lt;Box key={t} style={{ flexDirection: 'row', alignItems: 'center', gap: 12 }}&gt;&#10;            &lt;Box style={{ width: 8, height: 8, borderRadius: 4, background: '#3D7BD9' }} /&gt;&#10;            &lt;Text style={{ fontSize: 20, color: '#C5D4EA' }}&gt;{t}&lt;/Text&gt;&#10;          &lt;/Box&gt;&#10;        ))}&#10;      &lt;/Box&gt;&#10;    &lt;/Box&gt;&#10;  &lt;/Box&gt;&#10;&lt;/Slide&gt;"/>
+        <p:cNvPr id="257" name=""/>
         <p:cNvGrpSpPr/>
         <p:nvPr/>
       </p:nvGrpSpPr>
@@ -9877,7 +10138,10 @@
         </p:spPr>
         <p:txBody>
           <a:bodyPr/>
-          <a:p/>
+          <a:p>
+            <a:pPr/>
+            <a:endParaRPr/>
+          </a:p>
         </p:txBody>
       </p:sp>
       <p:sp>
@@ -9917,7 +10181,10 @@
         </p:spPr>
         <p:txBody>
           <a:bodyPr/>
-          <a:p/>
+          <a:p>
+            <a:pPr/>
+            <a:endParaRPr/>
+          </a:p>
         </p:txBody>
       </p:sp>
       <p:sp>
@@ -10064,7 +10331,10 @@
         </p:spPr>
         <p:txBody>
           <a:bodyPr/>
-          <a:p/>
+          <a:p>
+            <a:pPr/>
+            <a:endParaRPr/>
+          </a:p>
         </p:txBody>
       </p:sp>
       <p:sp>
@@ -10090,7 +10360,10 @@
         </p:spPr>
         <p:txBody>
           <a:bodyPr/>
-          <a:p/>
+          <a:p>
+            <a:pPr/>
+            <a:endParaRPr/>
+          </a:p>
         </p:txBody>
       </p:sp>
       <p:sp>
@@ -10151,7 +10424,10 @@
         </p:spPr>
         <p:txBody>
           <a:bodyPr/>
-          <a:p/>
+          <a:p>
+            <a:pPr/>
+            <a:endParaRPr/>
+          </a:p>
         </p:txBody>
       </p:sp>
       <p:sp>
@@ -10212,7 +10488,10 @@
         </p:spPr>
         <p:txBody>
           <a:bodyPr/>
-          <a:p/>
+          <a:p>
+            <a:pPr/>
+            <a:endParaRPr/>
+          </a:p>
         </p:txBody>
       </p:sp>
       <p:sp>
@@ -10271,7 +10550,10 @@
         </p:spPr>
         <p:txBody>
           <a:bodyPr/>
-          <a:p/>
+          <a:p>
+            <a:pPr/>
+            <a:endParaRPr/>
+          </a:p>
         </p:txBody>
       </p:sp>
     </p:spTree>
@@ -10284,7 +10566,7 @@
   <p:cSld>
     <p:spTree>
       <p:nvGrpSpPr>
-        <p:cNvPr id="271" name="" descr="&lt;Slide style={{ background: '#FFFFFF', padding: 0 }}&gt;&#10;  &lt;Box style={{ height: 72, background: '#1E4FA8', padding: '0 40px', flexDirection: 'row', alignItems: 'center', justifyContent: 'space-between' }}&gt;&#10;    &lt;Text style={{ fontSize: 15, color: '#B9CDF0', letterSpacing: 1 }}&gt;ISAD · INFORMATION SYSTEMS ANALYSIS &amp;amp; DESIGN&lt;/Text&gt;&#10;    &lt;Text style={{ fontSize: 15, color: '#B9CDF0' }}&gt;W03 · WORKFLOW&lt;/Text&gt;&#10;  &lt;/Box&gt;&#10;  &lt;Box style={{ padding: '14px 40px 0 40px', flexDirection: 'row', alignItems: 'baseline', justifyContent: 'space-between' }}&gt;&#10;    &lt;Text style={{ fontSize: 30, fontWeight: 'bold', color: '#0E3F8C' }}&gt;From Use Case to Design Class&lt;/Text&gt;&#10;    &lt;Text style={{ fontSize: 14, color: '#1E4FA8', fontWeight: 'bold' }}&gt;21 / 38&lt;/Text&gt;&#10;  &lt;/Box&gt;&#10;  &lt;Box style={{ flex: 1, padding: '4px 40px 0 40px', justifyContent: 'center', alignItems: 'center' }}&gt;&#10;    &lt;svg width={1180} height={372} viewBox='0 0 1180 372'&gt;&#10;      &lt;defs&gt;&#10;        &lt;marker id='ar21' markerWidth='10' markerHeight='10' refX='9' refY='5' orient='auto'&gt;&#10;          &lt;path d='M0,0 L10,5 L0,10 z' fill='#1E4FA8' /&gt;&#10;        &lt;/marker&gt;&#10;        &lt;marker id='ar21b' markerWidth='10' markerHeight='10' refX='9' refY='5' orient='auto'&gt;&#10;          &lt;path d='M0,0 L10,5 L0,10 z' fill='#FFC107' /&gt;&#10;        &lt;/marker&gt;&#10;      &lt;/defs&gt;&#10;&#10;      &lt;rect x='20' y='30' width='250' height='170' rx='8' fill='#FFFFFF' stroke='#1E4FA8' strokeWidth='2' /&gt;&#10;      &lt;rect x='20' y='30' width='250' height='34' rx='8' fill='#0E3F8C' /&gt;&#10;      &lt;text x='38' y='53' fill='#FFFFFF' fontSize='14' fontWeight='bold'&gt;01 · USE CASE&lt;/text&gt;&#10;      &lt;text x='145' y='92' textAnchor='middle' fill='#0E3F8C' fontSize='17' fontWeight='bold'&gt;Place an order&lt;/text&gt;&#10;      &lt;text x='38' y='122' fill='#8B97A8' fontSize='11.5' letterSpacing='1'&gt;ANSWERS&lt;/text&gt;&#10;      &lt;text x='38' y='142' fill='#1A2230' fontSize='13'&gt;What must the system do?&lt;/text&gt;&#10;      &lt;text x='38' y='172' fill='#8B97A8' fontSize='11.5' letterSpacing='1'&gt;PRODUCES&lt;/text&gt;&#10;      &lt;text x='38' y='192' fill='#1E4FA8' fontSize='13' fontWeight='bold'&gt;A scenario, step by step&lt;/text&gt;&#10;      &lt;line x1='270' y1='115' x2='316' y2='115' stroke='#1E4FA8' strokeWidth='2' markerEnd='url(#ar21)' /&gt;&#10;&#10;      &lt;rect x='320' y='30' width='250' height='170' rx='8' fill='#FFFFFF' stroke='#1E4FA8' strokeWidth='2' /&gt;&#10;      &lt;rect x='320' y='30' width='250' height='34' rx='8' fill='#1E4FA8' /&gt;&#10;      &lt;text x='338' y='53' fill='#FFFFFF' fontSize='14' fontWeight='bold'&gt;02 · DOMAIN MODEL&lt;/text&gt;&#10;      &lt;text x='445' y='92' textAnchor='middle' fill='#0E3F8C' fontSize='17' fontWeight='bold'&gt;The business words&lt;/text&gt;&#10;      &lt;text x='338' y='122' fill='#8B97A8' fontSize='11.5' letterSpacing='1'&gt;ANSWERS&lt;/text&gt;&#10;      &lt;text x='338' y='142' fill='#1A2230' fontSize='13'&gt;Which concepts exist?&lt;/text&gt;&#10;      &lt;text x='338' y='172' fill='#8B97A8' fontSize='11.5' letterSpacing='1'&gt;PRODUCES&lt;/text&gt;&#10;      &lt;text x='338' y='192' fill='#1E4FA8' fontSize='13' fontWeight='bold'&gt;Candidate classes, links&lt;/text&gt;&#10;      &lt;line x1='570' y1='115' x2='616' y2='115' stroke='#1E4FA8' strokeWidth='2' markerEnd='url(#ar21)' /&gt;&#10;&#10;      &lt;rect x='620' y='30' width='250' height='170' rx='8' fill='#FFFFFF' stroke='#1E4FA8' strokeWidth='2' /&gt;&#10;      &lt;rect x='620' y='30' width='250' height='34' rx='8' fill='#1E4FA8' /&gt;&#10;      &lt;text x='638' y='53' fill='#FFFFFF' fontSize='14' fontWeight='bold'&gt;03 · SEQUENCE&lt;/text&gt;&#10;      &lt;text x='745' y='92' textAnchor='middle' fill='#0E3F8C' fontSize='17' fontWeight='bold'&gt;Walk the scenario&lt;/text&gt;&#10;      &lt;text x='638' y='122' fill='#8B97A8' fontSize='11.5' letterSpacing='1'&gt;ANSWERS&lt;/text&gt;&#10;      &lt;text x='638' y='142' fill='#1A2230' fontSize='13'&gt;Who calls whom, when?&lt;/text&gt;&#10;      &lt;text x='638' y='172' fill='#8B97A8' fontSize='11.5' letterSpacing='1'&gt;PRODUCES&lt;/text&gt;&#10;      &lt;text x='638' y='192' fill='#1E4FA8' fontSize='13' fontWeight='bold'&gt;The messages = the methods&lt;/text&gt;&#10;      &lt;line x1='870' y1='115' x2='916' y2='115' stroke='#1E4FA8' strokeWidth='2' markerEnd='url(#ar21)' /&gt;&#10;&#10;      &lt;rect x='920' y='30' width='260' height='170' rx='8' fill='#FFFFFF' stroke='#1E4FA8' strokeWidth='2' /&gt;&#10;      &lt;rect x='920' y='30' width='260' height='34' rx='8' fill='#0E3F8C' /&gt;&#10;      &lt;text x='938' y='53' fill='#FFFFFF' fontSize='14' fontWeight='bold'&gt;04 · DESIGN CLASS&lt;/text&gt;&#10;      &lt;text x='1050' y='92' textAnchor='middle' fill='#0E3F8C' fontSize='17' fontWeight='bold'&gt;What you will code&lt;/text&gt;&#10;      &lt;text x='938' y='122' fill='#8B97A8' fontSize='11.5' letterSpacing='1'&gt;ANSWERS&lt;/text&gt;&#10;      &lt;text x='938' y='142' fill='#1A2230' fontSize='13'&gt;What does each class own?&lt;/text&gt;&#10;      &lt;text x='938' y='172' fill='#8B97A8' fontSize='11.5' letterSpacing='1'&gt;PRODUCES&lt;/text&gt;&#10;      &lt;text x='938' y='192' fill='#1E4FA8' fontSize='13' fontWeight='bold'&gt;Attributes + method signatures&lt;/text&gt;&#10;&#10;      &lt;text x='145' y='228' textAnchor='middle' fill='#8B97A8' fontSize='12'&gt;Source: the stakeholders&lt;/text&gt;&#10;      &lt;text x='445' y='228' textAnchor='middle' fill='#8B97A8' fontSize='12'&gt;Source: the nouns in step 01&lt;/text&gt;&#10;      &lt;text x='745' y='228' textAnchor='middle' fill='#8B97A8' fontSize='12'&gt;Source: step 01 + step 02 together&lt;/text&gt;&#10;      &lt;text x='1050' y='228' textAnchor='middle' fill='#8B97A8' fontSize='12'&gt;Source: the arrows of step 03&lt;/text&gt;&#10;&#10;      &lt;path d='M1050,206 L1050,316 L145,316 L145,208' fill='none' stroke='#FFC107' strokeWidth='2.4' markerEnd='url(#ar21b)' /&gt;&#10;      &lt;rect x='470' y='296' width='256' height='24' rx='4' fill='#FFFFFF' /&gt;&#10;      &lt;text x='598' y='313' textAnchor='middle' fill='#B08A00' fontSize='13' fontWeight='bold'&gt;the next pass adds a layer&lt;/text&gt;&#10;&#10;      &lt;line x1='20' y1='340' x2='1160' y2='340' stroke='#E5E7EB' strokeWidth='1' /&gt;&#10;      &lt;text x='20' y='364' fill='#1A2230' fontSize='15'&gt;Each artefact is produced by the one before it and constrains the one after it. That dependency is what makes this a workflow instead of four separate diagrams.&lt;/text&gt;&#10;    &lt;/svg&gt;&#10;  &lt;/Box&gt;&#10;  &lt;Box style={{ height: 30, padding: '0 40px', flexDirection: 'row', alignItems: 'center', justifyContent: 'space-between' }}&gt;&#10;    &lt;Text style={{ fontSize: 13, color: '#8B97A8' }}&gt;ISAD · Fall 2026&lt;/Text&gt;&#10;    &lt;Text style={{ fontSize: 14, color: '#1E4FA8', fontWeight: 'bold' }}&gt;21 / 38&lt;/Text&gt;&#10;  &lt;/Box&gt;&#10;&lt;/Slide&gt;"/>
+        <p:cNvPr id="271" name=""/>
         <p:cNvGrpSpPr/>
         <p:nvPr/>
       </p:nvGrpSpPr>
@@ -10317,7 +10599,10 @@
         </p:spPr>
         <p:txBody>
           <a:bodyPr/>
-          <a:p/>
+          <a:p>
+            <a:pPr/>
+            <a:endParaRPr/>
+          </a:p>
         </p:txBody>
       </p:sp>
       <p:sp>
@@ -10341,7 +10626,10 @@
         </p:spPr>
         <p:txBody>
           <a:bodyPr/>
-          <a:p/>
+          <a:p>
+            <a:pPr/>
+            <a:endParaRPr/>
+          </a:p>
         </p:txBody>
       </p:sp>
       <p:sp>
@@ -10595,7 +10883,7 @@
   <p:cSld>
     <p:spTree>
       <p:nvGrpSpPr>
-        <p:cNvPr id="281" name="" descr="&lt;Slide style={{ background: '#FFFFFF', padding: 0 }}&gt;&#10;  &lt;Box style={{ height: 72, background: '#1E4FA8', padding: '0 40px', flexDirection: 'row', alignItems: 'center', justifyContent: 'space-between' }}&gt;&#10;    &lt;Text style={{ fontSize: 15, color: '#B9CDF0', letterSpacing: 1 }}&gt;ISAD · INFORMATION SYSTEMS ANALYSIS &amp;amp; DESIGN&lt;/Text&gt;&#10;    &lt;Text style={{ fontSize: 15, color: '#B9CDF0' }}&gt;W03 · WORKFLOW&lt;/Text&gt;&#10;  &lt;/Box&gt;&#10;  &lt;Box style={{ padding: '16px 40px 0 40px', flexDirection: 'row', alignItems: 'center', justifyContent: 'space-between' }}&gt;&#10;    &lt;Text style={{ fontSize: 30, fontWeight: 'bold', color: '#0E3F8C' }}&gt;Steps 1–2 — Use Case to Domain&lt;/Text&gt;&#10;    &lt;Text style={{ fontSize: 14, color: '#1E4FA8', fontWeight: 'bold' }}&gt;22 / 38&lt;/Text&gt;&#10;  &lt;/Box&gt;&#10;  &lt;Box style={{ flex: 1, padding: '12px 40px 0 40px', flexDirection: 'row', gap: 24 }}&gt;&#10;    &lt;Box style={{ flex: 4, flexDirection: 'column', gap: 10, justifyContent: 'center' }}&gt;&#10;      &lt;Box style={{ flexDirection: 'row', alignItems: 'center', gap: 10 }}&gt;&#10;        &lt;Box style={{ padding: '5px 12px', background: '#0E3F8C', borderRadius: 6 }}&gt;&#10;          &lt;Text style={{ fontSize: 13, color: '#FFFFFF', fontWeight: 'bold', letterSpacing: 1 }}&gt;STEP 01&lt;/Text&gt;&#10;        &lt;/Box&gt;&#10;        &lt;Text style={{ fontSize: 19, fontWeight: 'bold', color: '#0E3F8C' }}&gt;The use case gives behaviour&lt;/Text&gt;&#10;      &lt;/Box&gt;&#10;      &lt;Box style={{ padding: '16px 20px', background: '#F7F9FC', borderRadius: 10, border: '1px solid #E5E7EB', flexDirection: 'column', gap: 8 }}&gt;&#10;        {[&#10;          '1. The student picks a restaurant and adds items to a cart.',&#10;          '2. The system shows the subtotal and the delivery fee.',&#10;          '3. The student chooses a payment method and confirms.',&#10;          '4. The system charges the payment and notifies the kitchen.',&#10;        ].map((s) =&gt; (&#10;          &lt;Text key={s} style={{ fontSize: 14.5, color: '#4A5568', lineHeight: 1.5 }}&gt;{s}&lt;/Text&gt;&#10;        ))}&#10;      &lt;/Box&gt;&#10;      &lt;Box style={{ padding: '13px 18px', background: '#F0F5FC', borderRadius: 9, borderLeft: '4px solid #1E4FA8' }}&gt;&#10;        &lt;Text style={{ fontSize: 14, color: '#0E3F8C', lineHeight: 1.5, fontWeight: 'bold' }}&gt;A use case is a verb. It tells you what happens — not what the pieces are called.&lt;/Text&gt;&#10;      &lt;/Box&gt;&#10;    &lt;/Box&gt;&#10;    &lt;Box style={{ flex: 3, flexDirection: 'column', gap: 10, justifyContent: 'center' }}&gt;&#10;      &lt;Box style={{ flexDirection: 'row', alignItems: 'center', gap: 10 }}&gt;&#10;        &lt;Box style={{ padding: '5px 12px', background: '#1E4FA8', borderRadius: 6 }}&gt;&#10;          &lt;Text style={{ fontSize: 13, color: '#FFFFFF', fontWeight: 'bold', letterSpacing: 1 }}&gt;STEP 02&lt;/Text&gt;&#10;        &lt;/Box&gt;&#10;        &lt;Text style={{ fontSize: 19, fontWeight: 'bold', color: '#0E3F8C' }}&gt;The domain gives vocabulary&lt;/Text&gt;&#10;      &lt;/Box&gt;&#10;      &lt;Box style={{ flexDirection: 'row', flexWrap: 'wrap', gap: 8 }}&gt;&#10;        {['Order', 'OrderLine', 'MenuItem', 'Restaurant', 'Cart', 'Payment', 'Courier', 'Delivery'].map((c) =&gt; (&#10;          &lt;Box key={c} style={{ padding: '8px 14px', background: '#E8EFF8', borderRadius: 16, border: '1px solid #C9D9F2' }}&gt;&#10;            &lt;Text style={{ fontSize: 14, color: '#0E3F8C', fontWeight: 'bold' }}&gt;{c}&lt;/Text&gt;&#10;          &lt;/Box&gt;&#10;        ))}&#10;      &lt;/Box&gt;&#10;      &lt;Box style={{ padding: '13px 18px', background: '#FFFFFF', borderRadius: 9, border: '1px dashed #D6DCE5', flexDirection: 'column', gap: 5 }}&gt;&#10;        &lt;Text style={{ fontSize: 14, color: '#4A5568', lineHeight: 1.5 }}&gt;Nouns in the scenario become candidate concepts. Verbs become the associations and, later, the methods.&lt;/Text&gt;&#10;        &lt;Text style={{ fontSize: 13.5, color: '#8B97A8', lineHeight: 1.5 }}&gt;&quot;Notifies the kitchen&quot; is not a class — it is a message you will draw in step 03.&lt;/Text&gt;&#10;      &lt;/Box&gt;&#10;      &lt;Box style={{ padding: '12px 16px', background: '#FDF3F3', borderRadius: 9, borderLeft: '4px solid #D9534F' }}&gt;&#10;        &lt;Text style={{ fontSize: 13.5, color: '#4A5568', lineHeight: 1.5 }}&gt;&lt;Text style={{ fontWeight: 'bold', color: '#D9534F' }}&gt;Do not add classes for the software itself.&lt;/Text&gt; &quot;Database&quot;, &quot;System&quot;, &quot;Logger&quot; are not domain concepts.&lt;/Text&gt;&#10;      &lt;/Box&gt;&#10;    &lt;/Box&gt;&#10;  &lt;/Box&gt;&#10;  &lt;Box style={{ height: 44, background: '#0E3F8C', padding: '0 40px', flexDirection: 'row', alignItems: 'center', justifyContent: 'center' }}&gt;&#10;    &lt;Text style={{ fontSize: 17, color: '#FFFFFF', fontWeight: '600' }}&gt;Week 06 turns this noun list into a real domain model. Today you only need to see where it comes from.&lt;/Text&gt;&#10;  &lt;/Box&gt;&#10;&lt;/Slide&gt;"/>
+        <p:cNvPr id="281" name=""/>
         <p:cNvGrpSpPr/>
         <p:nvPr/>
       </p:nvGrpSpPr>
@@ -10628,7 +10916,10 @@
         </p:spPr>
         <p:txBody>
           <a:bodyPr/>
-          <a:p/>
+          <a:p>
+            <a:pPr/>
+            <a:endParaRPr/>
+          </a:p>
         </p:txBody>
       </p:sp>
       <p:sp>
@@ -10652,7 +10943,10 @@
         </p:spPr>
         <p:txBody>
           <a:bodyPr/>
-          <a:p/>
+          <a:p>
+            <a:pPr/>
+            <a:endParaRPr/>
+          </a:p>
         </p:txBody>
       </p:sp>
       <p:sp>
@@ -10818,7 +11112,10 @@
         </p:spPr>
         <p:txBody>
           <a:bodyPr/>
-          <a:p/>
+          <a:p>
+            <a:pPr/>
+            <a:endParaRPr/>
+          </a:p>
         </p:txBody>
       </p:sp>
       <p:sp>
@@ -10919,7 +11216,10 @@
         </p:spPr>
         <p:txBody>
           <a:bodyPr/>
-          <a:p/>
+          <a:p>
+            <a:pPr/>
+            <a:endParaRPr/>
+          </a:p>
         </p:txBody>
       </p:sp>
       <p:sp>
@@ -11085,7 +11385,10 @@
         </p:spPr>
         <p:txBody>
           <a:bodyPr/>
-          <a:p/>
+          <a:p>
+            <a:pPr/>
+            <a:endParaRPr/>
+          </a:p>
         </p:txBody>
       </p:sp>
       <p:sp>
@@ -11142,7 +11445,10 @@
         </p:spPr>
         <p:txBody>
           <a:bodyPr/>
-          <a:p/>
+          <a:p>
+            <a:pPr/>
+            <a:endParaRPr/>
+          </a:p>
         </p:txBody>
       </p:sp>
       <p:sp>
@@ -11203,7 +11509,10 @@
         </p:spPr>
         <p:txBody>
           <a:bodyPr/>
-          <a:p/>
+          <a:p>
+            <a:pPr/>
+            <a:endParaRPr/>
+          </a:p>
         </p:txBody>
       </p:sp>
       <p:sp>
@@ -11304,7 +11613,10 @@
         </p:spPr>
         <p:txBody>
           <a:bodyPr/>
-          <a:p/>
+          <a:p>
+            <a:pPr/>
+            <a:endParaRPr/>
+          </a:p>
         </p:txBody>
       </p:sp>
       <p:sp>
@@ -11370,7 +11682,10 @@
         </p:spPr>
         <p:txBody>
           <a:bodyPr/>
-          <a:p/>
+          <a:p>
+            <a:pPr/>
+            <a:endParaRPr/>
+          </a:p>
         </p:txBody>
       </p:sp>
       <p:sp>
@@ -11436,7 +11751,10 @@
         </p:spPr>
         <p:txBody>
           <a:bodyPr/>
-          <a:p/>
+          <a:p>
+            <a:pPr/>
+            <a:endParaRPr/>
+          </a:p>
         </p:txBody>
       </p:sp>
       <p:sp>
@@ -11502,7 +11820,10 @@
         </p:spPr>
         <p:txBody>
           <a:bodyPr/>
-          <a:p/>
+          <a:p>
+            <a:pPr/>
+            <a:endParaRPr/>
+          </a:p>
         </p:txBody>
       </p:sp>
       <p:sp>
@@ -11568,7 +11889,10 @@
         </p:spPr>
         <p:txBody>
           <a:bodyPr/>
-          <a:p/>
+          <a:p>
+            <a:pPr/>
+            <a:endParaRPr/>
+          </a:p>
         </p:txBody>
       </p:sp>
       <p:sp>
@@ -11634,7 +11958,10 @@
         </p:spPr>
         <p:txBody>
           <a:bodyPr/>
-          <a:p/>
+          <a:p>
+            <a:pPr/>
+            <a:endParaRPr/>
+          </a:p>
         </p:txBody>
       </p:sp>
       <p:sp>
@@ -11700,7 +12027,10 @@
         </p:spPr>
         <p:txBody>
           <a:bodyPr/>
-          <a:p/>
+          <a:p>
+            <a:pPr/>
+            <a:endParaRPr/>
+          </a:p>
         </p:txBody>
       </p:sp>
       <p:sp>
@@ -11766,7 +12096,10 @@
         </p:spPr>
         <p:txBody>
           <a:bodyPr/>
-          <a:p/>
+          <a:p>
+            <a:pPr/>
+            <a:endParaRPr/>
+          </a:p>
         </p:txBody>
       </p:sp>
       <p:sp>
@@ -11832,7 +12165,10 @@
         </p:spPr>
         <p:txBody>
           <a:bodyPr/>
-          <a:p/>
+          <a:p>
+            <a:pPr/>
+            <a:endParaRPr/>
+          </a:p>
         </p:txBody>
       </p:sp>
       <p:sp>
@@ -11930,7 +12266,10 @@
         </p:spPr>
         <p:txBody>
           <a:bodyPr/>
-          <a:p/>
+          <a:p>
+            <a:pPr/>
+            <a:endParaRPr/>
+          </a:p>
         </p:txBody>
       </p:sp>
       <p:sp>
@@ -11987,7 +12326,10 @@
         </p:spPr>
         <p:txBody>
           <a:bodyPr/>
-          <a:p/>
+          <a:p>
+            <a:pPr/>
+            <a:endParaRPr/>
+          </a:p>
         </p:txBody>
       </p:sp>
       <p:sp>
@@ -12058,7 +12400,10 @@
         </p:spPr>
         <p:txBody>
           <a:bodyPr/>
-          <a:p/>
+          <a:p>
+            <a:pPr/>
+            <a:endParaRPr/>
+          </a:p>
         </p:txBody>
       </p:sp>
       <p:sp>
@@ -12106,7 +12451,7 @@
   <p:cSld>
     <p:spTree>
       <p:nvGrpSpPr>
-        <p:cNvPr id="326" name="" descr="&lt;Slide style={{ background: '#FFFFFF', padding: 0 }}&gt;&#10;  &lt;Box style={{ height: 72, background: '#1E4FA8', padding: '0 40px', flexDirection: 'row', alignItems: 'center', justifyContent: 'space-between' }}&gt;&#10;    &lt;Text style={{ fontSize: 15, color: '#B9CDF0', letterSpacing: 1 }}&gt;ISAD · INFORMATION SYSTEMS ANALYSIS &amp;amp; DESIGN&lt;/Text&gt;&#10;    &lt;Text style={{ fontSize: 15, color: '#B9CDF0' }}&gt;W03 · WORKFLOW&lt;/Text&gt;&#10;  &lt;/Box&gt;&#10;  &lt;Box style={{ padding: '14px 40px 0 40px', flexDirection: 'row', alignItems: 'center', justifyContent: 'space-between' }}&gt;&#10;    &lt;Text style={{ fontSize: 30, fontWeight: 'bold', color: '#0E3F8C' }}&gt;Step 3 — Sequence Drives Design&lt;/Text&gt;&#10;    &lt;Text style={{ fontSize: 14, color: '#1E4FA8', fontWeight: 'bold' }}&gt;23 / 38&lt;/Text&gt;&#10;  &lt;/Box&gt;&#10;  &lt;Box style={{ flex: 1, padding: '10px 40px 0 40px', flexDirection: 'row', gap: 26 }}&gt;&#10;    &lt;Box style={{ flex: 5, justifyContent: 'center' }}&gt;&#10;      &lt;CodeBlock theme='one-dark-pro' code={`# Draw the arrow, then write the operation.&#10;# Every message on the diagram is one&#10;# operation on the class at the arrow head.&#10;&#10;:OrderController  -&gt;  :Order&#10;        submit(cart)&#10;&#10;Class OrderController&#10;    + submit(cart)&#10;&#10;:Order  -&gt;  :OrderLine&#10;        create(item, qty)&#10;&#10;Class Order&#10;    + create(item, qty) : OrderLine&#10;&#10;:Order  -&gt;  :Order&#10;        total() : Money&#10;&#10;Class Order&#10;    + total() : Money`} language='text' width={620} fontSize={11.5} /&gt;&#10;    &lt;/Box&gt;&#10;    &lt;Box style={{ flex: 4, flexDirection: 'column', gap: 11, justifyContent: 'center' }}&gt;&#10;      &lt;Box style={{ padding: '16px 18px', background: '#F0F5FC', borderRadius: 10, borderLeft: '4px solid #1E4FA8' }}&gt;&#10;        &lt;Text style={{ fontSize: 17, fontWeight: 'bold', color: '#0E3F8C', lineHeight: 1.45 }}&gt;One arrow, one method. That is the whole trick.&lt;/Text&gt;&#10;      &lt;/Box&gt;&#10;      {[&#10;        ['sign-in-alt', 'Receiver decides the class', 'The arrow head lands on a lifeline — that class must own the method.'],&#10;        ['font', 'Name and parameters come free', 'A message is already a signature; you are transcribing, not inventing.'],&#10;        ['reply', 'The return becomes the type', 'If you drew a dashed reply with a name, the method returns it.'],&#10;      ].map(([icon, t, d]) =&gt; (&#10;        &lt;Box key={t} style={{ flexDirection: 'row', gap: 12, alignItems: 'flex-start', padding: '13px 16px', background: '#F7F9FC', borderRadius: 10, border: '1px solid #E5E7EB' }}&gt;&#10;          &lt;Box style={{ width: 36, height: 36, borderRadius: 9, background: '#E8EFF8', justifyContent: 'center', alignItems: 'center' }}&gt;&#10;            &lt;FAIcon name={icon} style={{ fill: '#1E4FA8', width: 17, height: 17 }} /&gt;&#10;          &lt;/Box&gt;&#10;          &lt;Box style={{ flex: 1, flexDirection: 'column', gap: 2 }}&gt;&#10;            &lt;Text style={{ fontSize: 15.5, fontWeight: 'bold', color: '#0E3F8C' }}&gt;{t}&lt;/Text&gt;&#10;            &lt;Text style={{ fontSize: 13.5, color: '#4A5568', lineHeight: 1.45 }}&gt;{d}&lt;/Text&gt;&#10;          &lt;/Box&gt;&#10;        &lt;/Box&gt;&#10;      ))}&#10;      &lt;Box style={{ padding: '12px 16px', background: '#FFFFFF', borderRadius: 9, border: '1px dashed #D6DCE5' }}&gt;&#10;        &lt;Text style={{ fontSize: 13.5, color: '#8B97A8', lineHeight: 1.5 }}&gt;This is why the sequence diagram is drawn &lt;Text style={{ fontWeight: 'bold', color: '#4A5568' }}&gt;before&lt;/Text&gt; the design class diagram — the methods are discovered, not guessed.&lt;/Text&gt;&#10;      &lt;/Box&gt;&#10;    &lt;/Box&gt;&#10;  &lt;/Box&gt;&#10;  &lt;Box style={{ height: 40, padding: '0 40px', flexDirection: 'row', alignItems: 'center', justifyContent: 'space-between' }}&gt;&#10;    &lt;Text style={{ fontSize: 13, color: '#8B97A8' }}&gt;ISAD · Fall 2026&lt;/Text&gt;&#10;    &lt;Text style={{ fontSize: 14, color: '#1E4FA8', fontWeight: 'bold' }}&gt;23 / 38&lt;/Text&gt;&#10;  &lt;/Box&gt;&#10;&lt;/Slide&gt;"/>
+        <p:cNvPr id="326" name=""/>
         <p:cNvGrpSpPr/>
         <p:nvPr/>
       </p:nvGrpSpPr>
@@ -12139,7 +12484,10 @@
         </p:spPr>
         <p:txBody>
           <a:bodyPr/>
-          <a:p/>
+          <a:p>
+            <a:pPr/>
+            <a:endParaRPr/>
+          </a:p>
         </p:txBody>
       </p:sp>
       <p:sp>
@@ -12163,7 +12511,10 @@
         </p:spPr>
         <p:txBody>
           <a:bodyPr/>
-          <a:p/>
+          <a:p>
+            <a:pPr/>
+            <a:endParaRPr/>
+          </a:p>
         </p:txBody>
       </p:sp>
       <p:sp>
@@ -12329,7 +12680,10 @@
         </p:spPr>
         <p:txBody>
           <a:bodyPr/>
-          <a:p/>
+          <a:p>
+            <a:pPr/>
+            <a:endParaRPr/>
+          </a:p>
         </p:txBody>
       </p:sp>
       <p:sp>
@@ -12386,7 +12740,10 @@
         </p:spPr>
         <p:txBody>
           <a:bodyPr/>
-          <a:p/>
+          <a:p>
+            <a:pPr/>
+            <a:endParaRPr/>
+          </a:p>
         </p:txBody>
       </p:sp>
       <p:sp>
@@ -12452,7 +12809,10 @@
         </p:spPr>
         <p:txBody>
           <a:bodyPr/>
-          <a:p/>
+          <a:p>
+            <a:pPr/>
+            <a:endParaRPr/>
+          </a:p>
         </p:txBody>
       </p:sp>
       <p:sp>
@@ -12478,7 +12838,10 @@
         </p:spPr>
         <p:txBody>
           <a:bodyPr/>
-          <a:p/>
+          <a:p>
+            <a:pPr/>
+            <a:endParaRPr/>
+          </a:p>
         </p:txBody>
       </p:sp>
       <p:pic>
@@ -12610,7 +12973,10 @@
         </p:spPr>
         <p:txBody>
           <a:bodyPr/>
-          <a:p/>
+          <a:p>
+            <a:pPr/>
+            <a:endParaRPr/>
+          </a:p>
         </p:txBody>
       </p:sp>
       <p:sp>
@@ -12636,7 +13002,10 @@
         </p:spPr>
         <p:txBody>
           <a:bodyPr/>
-          <a:p/>
+          <a:p>
+            <a:pPr/>
+            <a:endParaRPr/>
+          </a:p>
         </p:txBody>
       </p:sp>
       <p:pic>
@@ -12768,7 +13137,10 @@
         </p:spPr>
         <p:txBody>
           <a:bodyPr/>
-          <a:p/>
+          <a:p>
+            <a:pPr/>
+            <a:endParaRPr/>
+          </a:p>
         </p:txBody>
       </p:sp>
       <p:sp>
@@ -12794,7 +13166,10 @@
         </p:spPr>
         <p:txBody>
           <a:bodyPr/>
-          <a:p/>
+          <a:p>
+            <a:pPr/>
+            <a:endParaRPr/>
+          </a:p>
         </p:txBody>
       </p:sp>
       <p:pic>
@@ -12926,7 +13301,10 @@
         </p:spPr>
         <p:txBody>
           <a:bodyPr/>
-          <a:p/>
+          <a:p>
+            <a:pPr/>
+            <a:endParaRPr/>
+          </a:p>
         </p:txBody>
       </p:sp>
       <p:sp>
@@ -13079,7 +13457,10 @@
         </p:spPr>
         <p:txBody>
           <a:bodyPr/>
-          <a:p/>
+          <a:p>
+            <a:pPr/>
+            <a:endParaRPr/>
+          </a:p>
         </p:txBody>
       </p:sp>
       <p:sp>
@@ -13139,7 +13520,7 @@
   <p:cSld>
     <p:spTree>
       <p:nvGrpSpPr>
-        <p:cNvPr id="357" name="" descr="&lt;Slide style={{ background: '#FFFFFF', padding: 0 }}&gt;&#10;  &lt;Box style={{ height: 72, background: '#1E4FA8', padding: '0 40px', flexDirection: 'row', alignItems: 'center', justifyContent: 'space-between' }}&gt;&#10;    &lt;Text style={{ fontSize: 15, color: '#B9CDF0', letterSpacing: 1 }}&gt;ISAD · INFORMATION SYSTEMS ANALYSIS &amp;amp; DESIGN&lt;/Text&gt;&#10;    &lt;Text style={{ fontSize: 15, color: '#B9CDF0' }}&gt;W03 · WORKFLOW&lt;/Text&gt;&#10;  &lt;/Box&gt;&#10;  &lt;Box style={{ padding: '14px 40px 0 40px', flexDirection: 'row', alignItems: 'center', justifyContent: 'space-between' }}&gt;&#10;    &lt;Text style={{ fontSize: 30, fontWeight: 'bold', color: '#0E3F8C' }}&gt;Where State Diagrams Fit&lt;/Text&gt;&#10;    &lt;Text style={{ fontSize: 14, color: '#1E4FA8', fontWeight: 'bold' }}&gt;24 / 38&lt;/Text&gt;&#10;  &lt;/Box&gt;&#10;  &lt;Box style={{ flex: 1, padding: '6px 40px 0 40px', flexDirection: 'row', gap: 26 }}&gt;&#10;    &lt;Box style={{ flex: 5, justifyContent: 'center', alignItems: 'center' }}&gt;&#10;      &lt;svg width={560} height={300} viewBox='0 0 560 300'&gt;&#10;        &lt;defs&gt;&#10;          &lt;marker id='ar24' markerWidth='9' markerHeight='9' refX='8' refY='4.5' orient='auto'&gt;&#10;            &lt;path d='M0,0 L9,4.5 L0,9 z' fill='#1E4FA8' /&gt;&#10;          &lt;/marker&gt;&#10;        &lt;/defs&gt;&#10;        &lt;circle cx='12' cy='52' r='7' fill='#1E4FA8' /&gt;&#10;        &lt;line x1='19' y1='52' x2='27' y2='52' stroke='#1E4FA8' strokeWidth='1.5' markerEnd='url(#ar24)' /&gt;&#10;&#10;        &lt;rect x='30' y='30' width='120' height='44' rx='22' fill='#E8EFF8' stroke='#1E4FA8' strokeWidth='1.8' /&gt;&#10;        &lt;text x='90' y='58' textAnchor='middle' fill='#0E3F8C' fontSize='14' fontWeight='bold'&gt;Draft&lt;/text&gt;&#10;        &lt;rect x='200' y='30' width='120' height='44' rx='22' fill='#E8EFF8' stroke='#1E4FA8' strokeWidth='1.8' /&gt;&#10;        &lt;text x='260' y='58' textAnchor='middle' fill='#0E3F8C' fontSize='14' fontWeight='bold'&gt;Placed&lt;/text&gt;&#10;        &lt;rect x='370' y='30' width='120' height='44' rx='22' fill='#E8EFF8' stroke='#1E4FA8' strokeWidth='1.8' /&gt;&#10;        &lt;text x='430' y='58' textAnchor='middle' fill='#0E3F8C' fontSize='14' fontWeight='bold'&gt;Ready&lt;/text&gt;&#10;        &lt;rect x='370' y='170' width='120' height='44' rx='22' fill='#E8EFF8' stroke='#1E4FA8' strokeWidth='1.8' /&gt;&#10;        &lt;text x='430' y='198' textAnchor='middle' fill='#0E3F8C' fontSize='14' fontWeight='bold'&gt;Delivered&lt;/text&gt;&#10;        &lt;rect x='200' y='170' width='120' height='44' rx='22' fill='#F7F9FC' stroke='#8B97A8' strokeWidth='1.5' /&gt;&#10;        &lt;text x='260' y='198' textAnchor='middle' fill='#4A5568' fontSize='14' fontWeight='bold'&gt;Cancelled&lt;/text&gt;&#10;&#10;        &lt;line x1='150' y1='52' x2='197' y2='52' stroke='#1E4FA8' strokeWidth='1.6' markerEnd='url(#ar24)' /&gt;&#10;        &lt;text x='174' y='44' textAnchor='middle' fill='#4A5568' fontSize='11'&gt;submit&lt;/text&gt;&#10;        &lt;line x1='320' y1='52' x2='367' y2='52' stroke='#1E4FA8' strokeWidth='1.6' markerEnd='url(#ar24)' /&gt;&#10;        &lt;text x='344' y='44' textAnchor='middle' fill='#4A5568' fontSize='11'&gt;ready&lt;/text&gt;&#10;        &lt;line x1='430' y1='74' x2='430' y2='167' stroke='#1E4FA8' strokeWidth='1.6' markerEnd='url(#ar24)' /&gt;&#10;        &lt;text x='440' y='124' fill='#4A5568' fontSize='11'&gt;handed over&lt;/text&gt;&#10;        &lt;line x1='260' y1='74' x2='260' y2='167' stroke='#D9534F' strokeWidth='1.6' markerEnd='url(#ar24)' /&gt;&#10;        &lt;text x='270' y='124' fill='#D9534F' fontSize='11'&gt;cancel&lt;/text&gt;&#10;        &lt;line x1='490' y1='192' x2='534' y2='192' stroke='#1E4FA8' strokeWidth='1.6' markerEnd='url(#ar24)' /&gt;&#10;        &lt;circle cx='546' cy='192' r='9' fill='#FFFFFF' stroke='#1E4FA8' strokeWidth='1.8' /&gt;&#10;        &lt;circle cx='546' cy='192' r='5' fill='#1E4FA8' /&gt;&#10;&#10;        &lt;text x='20' y='262' fill='#8B97A8' fontSize='12'&gt;Order — an object whose behaviour depends on where it has been.&lt;/text&gt;&#10;        &lt;text x='20' y='282' fill='#8B97A8' fontSize='12'&gt;addItem() succeeds in Draft, and must be refused in Placed.&lt;/text&gt;&#10;      &lt;/svg&gt;&#10;    &lt;/Box&gt;&#10;    &lt;Box style={{ flex: 4, flexDirection: 'column', gap: 11, justifyContent: 'center' }}&gt;&#10;      &lt;Box style={{ padding: '16px 18px', background: '#F0F5FC', borderRadius: 10, borderLeft: '4px solid #1E4FA8' }}&gt;&#10;        &lt;Text style={{ fontSize: 17, fontWeight: 'bold', color: '#0E3F8C', lineHeight: 1.45 }}&gt;Not every class deserves a state diagram.&lt;/Text&gt;&#10;      &lt;/Box&gt;&#10;      {[&#10;        ['history', 'Draw one when history matters', 'The same message gets a different answer depending on the state. That is the only real trigger.'],&#10;        ['ban', 'Skip it for passive records', 'MenuItem has a price and a name. It has no life. A state diagram adds nothing.'],&#10;      ].map(([icon, t, d]) =&gt; (&#10;        &lt;Box key={t} style={{ flexDirection: 'row', gap: 12, alignItems: 'flex-start', padding: '13px 16px', background: '#F7F9FC', borderRadius: 10, border: '1px solid #E5E7EB' }}&gt;&#10;          &lt;Box style={{ width: 36, height: 36, borderRadius: 9, background: '#E8EFF8', justifyContent: 'center', alignItems: 'center' }}&gt;&#10;            &lt;FAIcon name={icon} style={{ fill: '#1E4FA8', width: 17, height: 17 }} /&gt;&#10;          &lt;/Box&gt;&#10;          &lt;Box style={{ flex: 1, flexDirection: 'column', gap: 2 }}&gt;&#10;            &lt;Text style={{ fontSize: 15.5, fontWeight: 'bold', color: '#0E3F8C' }}&gt;{t}&lt;/Text&gt;&#10;            &lt;Text style={{ fontSize: 13.5, color: '#4A5568', lineHeight: 1.45 }}&gt;{d}&lt;/Text&gt;&#10;          &lt;/Box&gt;&#10;        &lt;/Box&gt;&#10;      ))}&#10;      &lt;Box style={{ padding: '13px 16px', background: '#FFFFFF', borderRadius: 9, border: '1px dashed #D6DCE5' }}&gt;&#10;        &lt;Text style={{ fontSize: 13.5, color: '#4A5568', lineHeight: 1.5 }}&gt;&lt;Text style={{ fontWeight: 'bold', color: '#0E3F8C' }}&gt;The one-line test:&lt;/Text&gt; if you cannot name the events, there are no states — only attributes.&lt;/Text&gt;&#10;      &lt;/Box&gt;&#10;      &lt;Box style={{ padding: '12px 16px', background: '#FDF3F3', borderRadius: 9, borderLeft: '4px solid #D9534F' }}&gt;&#10;        &lt;Text style={{ fontSize: 13.5, color: '#4A5568', lineHeight: 1.5 }}&gt;CampusBites needs exactly two: &lt;Text style={{ fontWeight: 'bold', color: '#D9534F' }}&gt;Order&lt;/Text&gt; and &lt;Text style={{ fontWeight: 'bold', color: '#D9534F' }}&gt;Delivery&lt;/Text&gt;. Everything else can wait for Week 09.&lt;/Text&gt;&#10;      &lt;/Box&gt;&#10;    &lt;/Box&gt;&#10;  &lt;/Box&gt;&#10;  &lt;Box style={{ height: 34, padding: '0 40px', flexDirection: 'row', alignItems: 'center', justifyContent: 'space-between' }}&gt;&#10;    &lt;Text style={{ fontSize: 13, color: '#8B97A8' }}&gt;ISAD · Fall 2026&lt;/Text&gt;&#10;    &lt;Text style={{ fontSize: 14, color: '#1E4FA8', fontWeight: 'bold' }}&gt;24 / 38&lt;/Text&gt;&#10;  &lt;/Box&gt;&#10;&lt;/Slide&gt;"/>
+        <p:cNvPr id="357" name=""/>
         <p:cNvGrpSpPr/>
         <p:nvPr/>
       </p:nvGrpSpPr>
@@ -13172,7 +13553,10 @@
         </p:spPr>
         <p:txBody>
           <a:bodyPr/>
-          <a:p/>
+          <a:p>
+            <a:pPr/>
+            <a:endParaRPr/>
+          </a:p>
         </p:txBody>
       </p:sp>
       <p:sp>
@@ -13196,7 +13580,10 @@
         </p:spPr>
         <p:txBody>
           <a:bodyPr/>
-          <a:p/>
+          <a:p>
+            <a:pPr/>
+            <a:endParaRPr/>
+          </a:p>
         </p:txBody>
       </p:sp>
       <p:sp>
@@ -13393,7 +13780,10 @@
         </p:spPr>
         <p:txBody>
           <a:bodyPr/>
-          <a:p/>
+          <a:p>
+            <a:pPr/>
+            <a:endParaRPr/>
+          </a:p>
         </p:txBody>
       </p:sp>
       <p:sp>
@@ -13450,7 +13840,10 @@
         </p:spPr>
         <p:txBody>
           <a:bodyPr/>
-          <a:p/>
+          <a:p>
+            <a:pPr/>
+            <a:endParaRPr/>
+          </a:p>
         </p:txBody>
       </p:sp>
       <p:sp>
@@ -13516,7 +13909,10 @@
         </p:spPr>
         <p:txBody>
           <a:bodyPr/>
-          <a:p/>
+          <a:p>
+            <a:pPr/>
+            <a:endParaRPr/>
+          </a:p>
         </p:txBody>
       </p:sp>
       <p:sp>
@@ -13542,7 +13938,10 @@
         </p:spPr>
         <p:txBody>
           <a:bodyPr/>
-          <a:p/>
+          <a:p>
+            <a:pPr/>
+            <a:endParaRPr/>
+          </a:p>
         </p:txBody>
       </p:sp>
       <p:pic>
@@ -13676,7 +14075,10 @@
         </p:spPr>
         <p:txBody>
           <a:bodyPr/>
-          <a:p/>
+          <a:p>
+            <a:pPr/>
+            <a:endParaRPr/>
+          </a:p>
         </p:txBody>
       </p:sp>
       <p:sp>
@@ -13702,7 +14104,10 @@
         </p:spPr>
         <p:txBody>
           <a:bodyPr/>
-          <a:p/>
+          <a:p>
+            <a:pPr/>
+            <a:endParaRPr/>
+          </a:p>
         </p:txBody>
       </p:sp>
       <p:pic>
@@ -13836,7 +14241,10 @@
         </p:spPr>
         <p:txBody>
           <a:bodyPr/>
-          <a:p/>
+          <a:p>
+            <a:pPr/>
+            <a:endParaRPr/>
+          </a:p>
         </p:txBody>
       </p:sp>
       <p:sp>
@@ -13909,7 +14317,10 @@
         </p:spPr>
         <p:txBody>
           <a:bodyPr/>
-          <a:p/>
+          <a:p>
+            <a:pPr/>
+            <a:endParaRPr/>
+          </a:p>
         </p:txBody>
       </p:sp>
       <p:sp>
@@ -13966,7 +14377,10 @@
         </p:spPr>
         <p:txBody>
           <a:bodyPr/>
-          <a:p/>
+          <a:p>
+            <a:pPr/>
+            <a:endParaRPr/>
+          </a:p>
         </p:txBody>
       </p:sp>
       <p:sp>
@@ -14126,7 +14540,7 @@
   <p:cSld>
     <p:spTree>
       <p:nvGrpSpPr>
-        <p:cNvPr id="385" name="" descr="&lt;Slide style={{ background: '#FFFFFF', padding: 0 }}&gt;&#10;  &lt;Box style={{ height: 72, background: '#1E4FA8', padding: '0 40px', flexDirection: 'row', alignItems: 'center', justifyContent: 'space-between' }}&gt;&#10;    &lt;Text style={{ fontSize: 15, color: '#B9CDF0', letterSpacing: 1 }}&gt;ISAD · INFORMATION SYSTEMS ANALYSIS &amp;amp; DESIGN&lt;/Text&gt;&#10;    &lt;Text style={{ fontSize: 15, color: '#B9CDF0' }}&gt;W03 · WORKFLOW&lt;/Text&gt;&#10;  &lt;/Box&gt;&#10;  &lt;Box style={{ flex: 1, padding: '24px 80px 0 80px', flexDirection: 'column', justifyContent: 'center', alignItems: 'center', gap: 22 }}&gt;&#10;    &lt;Text style={{ fontSize: 38, fontWeight: 'bold', color: '#0E3F8C', fontFamily: 'Georgia, serif', textAlign: 'center', lineHeight: 1.25 }}&gt;&#10;      One workflow, many passes.&#10;    &lt;/Text&gt;&#10;    &lt;Box style={{ width: 76, height: 4, background: '#FFC107' }} /&gt;&#10;    &lt;Box style={{ flexDirection: 'column', gap: 14, width: '100%' }}&gt;&#10;      {[&#10;        { n: '01', t: 'Breadth first, depth later', d: 'Sketch every use case at one line each before you write a single full scenario. You will throw away fewer pages that way.' },&#10;        { n: '02', t: 'Ten per cent of the use cases, ten per cent of the classes', d: 'Larman\'s rule of thumb: one short pass across the whole system beats a perfect model of one corner of it.' },&#10;        { n: '03', t: 'Stop when modelling costs more than coding', d: 'The moment a diagram stops changing a decision, put it down and write the code. You can always come back with a better question.' },&#10;      ].map((p) =&gt; (&#10;        &lt;Box key={p.n} style={{ flexDirection: 'row', gap: 18, padding: '17px 22px', background: '#F7F9FC', borderRadius: 12, border: '1px solid #E5E7EB', alignItems: 'flex-start' }}&gt;&#10;          &lt;Text style={{ fontSize: 30, fontWeight: 'bold', color: '#3D7BD9', fontFamily: 'Georgia, serif', lineHeight: 1 }}&gt;{p.n}&lt;/Text&gt;&#10;          &lt;Box style={{ flex: 1, flexDirection: 'column', gap: 4 }}&gt;&#10;            &lt;Text style={{ fontSize: 18, fontWeight: 'bold', color: '#0E3F8C' }}&gt;{p.t}&lt;/Text&gt;&#10;            &lt;Text style={{ fontSize: 14.5, color: '#4A5568', lineHeight: 1.55 }}&gt;{p.d}&lt;/Text&gt;&#10;          &lt;/Box&gt;&#10;        &lt;/Box&gt;&#10;      ))}&#10;    &lt;/Box&gt;&#10;    &lt;Box style={{ padding: '15px 24px', background: '#0E3F8C', borderRadius: 10, width: '100%' }}&gt;&#10;      &lt;Text style={{ fontSize: 16, color: '#FFFFFF', fontWeight: '600', lineHeight: 1.5 }}&gt;Your M1 submission is the end of pass one — not the end of modelling. Expect to redraw all of it in Week 06, and again in Week 08.&lt;/Text&gt;&#10;    &lt;/Box&gt;&#10;  &lt;/Box&gt;&#10;  &lt;Box style={{ height: 34, padding: '0 40px', flexDirection: 'row', alignItems: 'center', justifyContent: 'space-between' }}&gt;&#10;    &lt;Text style={{ fontSize: 13, color: '#8B97A8' }}&gt;ISAD · Fall 2026&lt;/Text&gt;&#10;    &lt;Text style={{ fontSize: 14, color: '#1E4FA8', fontWeight: 'bold' }}&gt;25 / 38&lt;/Text&gt;&#10;  &lt;/Box&gt;&#10;&lt;/Slide&gt;"/>
+        <p:cNvPr id="385" name=""/>
         <p:cNvGrpSpPr/>
         <p:nvPr/>
       </p:nvGrpSpPr>
@@ -14159,7 +14573,10 @@
         </p:spPr>
         <p:txBody>
           <a:bodyPr/>
-          <a:p/>
+          <a:p>
+            <a:pPr/>
+            <a:endParaRPr/>
+          </a:p>
         </p:txBody>
       </p:sp>
       <p:sp>
@@ -14183,7 +14600,10 @@
         </p:spPr>
         <p:txBody>
           <a:bodyPr/>
-          <a:p/>
+          <a:p>
+            <a:pPr/>
+            <a:endParaRPr/>
+          </a:p>
         </p:txBody>
       </p:sp>
       <p:sp>
@@ -14312,7 +14732,10 @@
         </p:spPr>
         <p:txBody>
           <a:bodyPr/>
-          <a:p/>
+          <a:p>
+            <a:pPr/>
+            <a:endParaRPr/>
+          </a:p>
         </p:txBody>
       </p:sp>
       <p:sp>
@@ -14343,7 +14766,10 @@
         </p:spPr>
         <p:txBody>
           <a:bodyPr/>
-          <a:p/>
+          <a:p>
+            <a:pPr/>
+            <a:endParaRPr/>
+          </a:p>
         </p:txBody>
       </p:sp>
       <p:sp>
@@ -14479,7 +14905,10 @@
         </p:spPr>
         <p:txBody>
           <a:bodyPr/>
-          <a:p/>
+          <a:p>
+            <a:pPr/>
+            <a:endParaRPr/>
+          </a:p>
         </p:txBody>
       </p:sp>
       <p:sp>
@@ -14615,7 +15044,10 @@
         </p:spPr>
         <p:txBody>
           <a:bodyPr/>
-          <a:p/>
+          <a:p>
+            <a:pPr/>
+            <a:endParaRPr/>
+          </a:p>
         </p:txBody>
       </p:sp>
       <p:sp>
@@ -14746,7 +15178,10 @@
         </p:spPr>
         <p:txBody>
           <a:bodyPr/>
-          <a:p/>
+          <a:p>
+            <a:pPr/>
+            <a:endParaRPr/>
+          </a:p>
         </p:txBody>
       </p:sp>
       <p:sp>
@@ -14864,7 +15299,7 @@
   <p:cSld>
     <p:spTree>
       <p:nvGrpSpPr>
-        <p:cNvPr id="408" name="" descr="&lt;Slide style={{ background: '#0E3F8C', padding: 0 }}&gt;&#10;  &lt;Box style={{ flexDirection: 'row', height: '100%', position: 'relative' }}&gt;&#10;    &lt;Box style={{ position: 'absolute', top: 0, left: 0, right: 0, height: 8, background: '#1E4FA8' }} /&gt;&#10;    &lt;Box style={{ width: 300, justifyContent: 'center', alignItems: 'center', borderRight: '1px solid #2B5793' }}&gt;&#10;      &lt;Text style={{ fontSize: 220, fontWeight: 'bold', color: '#3D7BD9', fontFamily: 'Georgia, serif', lineHeight: 1 }}&gt;05&lt;/Text&gt;&#10;    &lt;/Box&gt;&#10;    &lt;Box style={{ flex: 1, padding: '70px 64px', flexDirection: 'column', justifyContent: 'center' }}&gt;&#10;      &lt;Text style={{ fontSize: 15, color: '#7FA2D6', letterSpacing: 2, marginBottom: 18 }}&gt;PART 1 · LECTURE&lt;/Text&gt;&#10;      &lt;Text style={{ fontSize: 48, fontWeight: 'bold', color: '#FFFFFF', lineHeight: 1.18 }}&gt;Toolchain&lt;/Text&gt;&#10;      &lt;Box style={{ width: 64, height: 4, background: '#FFC107', marginTop: 26, marginBottom: 26 }} /&gt;&#10;      &lt;Box style={{ flexDirection: 'column', gap: 12 }}&gt;&#10;        {[&#10;          'draw.io for the diagrams you will present',&#10;          'PlantUML for the diagrams you will maintain',&#10;          'Both live in the repository, next to the code',&#10;        ].map((t) =&gt; (&#10;          &lt;Box key={t} style={{ flexDirection: 'row', alignItems: 'center', gap: 12 }}&gt;&#10;            &lt;Box style={{ width: 8, height: 8, borderRadius: 4, background: '#3D7BD9' }} /&gt;&#10;            &lt;Text style={{ fontSize: 20, color: '#C5D4EA' }}&gt;{t}&lt;/Text&gt;&#10;          &lt;/Box&gt;&#10;        ))}&#10;      &lt;/Box&gt;&#10;    &lt;/Box&gt;&#10;  &lt;/Box&gt;&#10;&lt;/Slide&gt;"/>
+        <p:cNvPr id="408" name=""/>
         <p:cNvGrpSpPr/>
         <p:nvPr/>
       </p:nvGrpSpPr>
@@ -14897,7 +15332,10 @@
         </p:spPr>
         <p:txBody>
           <a:bodyPr/>
-          <a:p/>
+          <a:p>
+            <a:pPr/>
+            <a:endParaRPr/>
+          </a:p>
         </p:txBody>
       </p:sp>
       <p:sp>
@@ -14937,7 +15375,10 @@
         </p:spPr>
         <p:txBody>
           <a:bodyPr/>
-          <a:p/>
+          <a:p>
+            <a:pPr/>
+            <a:endParaRPr/>
+          </a:p>
         </p:txBody>
       </p:sp>
       <p:sp>
@@ -15066,7 +15507,10 @@
         </p:spPr>
         <p:txBody>
           <a:bodyPr/>
-          <a:p/>
+          <a:p>
+            <a:pPr/>
+            <a:endParaRPr/>
+          </a:p>
         </p:txBody>
       </p:sp>
       <p:sp>
@@ -15092,7 +15536,10 @@
         </p:spPr>
         <p:txBody>
           <a:bodyPr/>
-          <a:p/>
+          <a:p>
+            <a:pPr/>
+            <a:endParaRPr/>
+          </a:p>
         </p:txBody>
       </p:sp>
       <p:sp>
@@ -15153,7 +15600,10 @@
         </p:spPr>
         <p:txBody>
           <a:bodyPr/>
-          <a:p/>
+          <a:p>
+            <a:pPr/>
+            <a:endParaRPr/>
+          </a:p>
         </p:txBody>
       </p:sp>
       <p:sp>
@@ -15214,7 +15664,10 @@
         </p:spPr>
         <p:txBody>
           <a:bodyPr/>
-          <a:p/>
+          <a:p>
+            <a:pPr/>
+            <a:endParaRPr/>
+          </a:p>
         </p:txBody>
       </p:sp>
       <p:sp>
@@ -15273,7 +15726,10 @@
         </p:spPr>
         <p:txBody>
           <a:bodyPr/>
-          <a:p/>
+          <a:p>
+            <a:pPr/>
+            <a:endParaRPr/>
+          </a:p>
         </p:txBody>
       </p:sp>
     </p:spTree>
@@ -15286,7 +15742,7 @@
   <p:cSld>
     <p:spTree>
       <p:nvGrpSpPr>
-        <p:cNvPr id="422" name="" descr="&lt;Slide style={{ background: '#FFFFFF', padding: 0 }}&gt;&#10;  &lt;Box style={{ height: 72, background: '#1E4FA8', padding: '0 40px', flexDirection: 'row', alignItems: 'center', justifyContent: 'space-between' }}&gt;&#10;    &lt;Text style={{ fontSize: 15, color: '#B9CDF0', letterSpacing: 1 }}&gt;ISAD · INFORMATION SYSTEMS ANALYSIS &amp;amp; DESIGN&lt;/Text&gt;&#10;    &lt;Text style={{ fontSize: 15, color: '#B9CDF0' }}&gt;W03 · TOOLCHAIN&lt;/Text&gt;&#10;  &lt;/Box&gt;&#10;  &lt;Box style={{ padding: '16px 40px 2px 40px', flexDirection: 'row', alignItems: 'center', justifyContent: 'space-between' }}&gt;&#10;    &lt;Text style={{ fontSize: 30, fontWeight: 'bold', color: '#0E3F8C' }}&gt;draw.io or PlantUML?&lt;/Text&gt;&#10;    &lt;Text style={{ fontSize: 14, color: '#1E4FA8', fontWeight: 'bold' }}&gt;27 / 38&lt;/Text&gt;&#10;  &lt;/Box&gt;&#10;  &lt;Box style={{ flex: 1, padding: '8px 40px 4px 40px' }}&gt;&#10;    &lt;Table&#10;      style={{ width: '100%', height: '100%' }}&#10;      defaultTextStyle={{ fontSize: 13.5, textAlign: 'left', color: '#1A2230' }}&#10;      defaultCellStyle={{&#10;        border: {&#10;          left: { width: 1, color: '#E5E7EB' },&#10;          right: { width: 1, color: '#E5E7EB' },&#10;          top: { width: 1, color: '#E5E7EB' },&#10;          bottom: { width: 1, color: '#E5E7EB' },&#10;        },&#10;      }}&#10;      cells={[&#10;        [&#10;          { text: 'Dimension', textStyle: { bold: true, color: '#FFFFFF', textAlign: 'left' }, cellStyle: { background: { color: '#0E3F8C' } } },&#10;          { text: 'draw.io', textStyle: { bold: true, color: '#FFFFFF', textAlign: 'left' }, cellStyle: { background: { color: '#1E4FA8' } } },&#10;          { text: 'PlantUML', textStyle: { bold: true, color: '#FFFFFF', textAlign: 'left' }, cellStyle: { background: { color: '#3D7BD9' } } },&#10;        ],&#10;        [&#10;          { text: 'How you draw', textStyle: { bold: true, color: '#0E3F8C' }, cellStyle: { background: { color: '#F7F9FC' } } },&#10;          { text: 'Drag shapes with the mouse', textStyle: { color: '#4A5568' }, cellStyle: { background: { color: '#F7F9FC' } } },&#10;          { text: 'Type text, see the picture appear', textStyle: { color: '#4A5568' }, cellStyle: { background: { color: '#F7F9FC' } } },&#10;        ],&#10;        [&#10;          { text: 'Source file', textStyle: { bold: true, color: '#0E3F8C' } },&#10;          { text: '.drawio — compressed XML', textStyle: { color: '#4A5568' } },&#10;          { text: '.puml — plain text, readable', textStyle: { color: '#4A5568' } },&#10;        ],&#10;        [&#10;          { text: 'Free-form layout', textStyle: { bold: true, color: '#0E3F8C' }, cellStyle: { background: { color: '#F7F9FC' } } },&#10;          { text: 'Excellent — you place every box', textStyle: { color: '#1E4FA8', bold: true }, cellStyle: { background: { color: '#F7F9FC' } } },&#10;          { text: 'The tool decides; you live with it', textStyle: { color: '#4A5568' }, cellStyle: { background: { color: '#F7F9FC' } } },&#10;        ],&#10;        [&#10;          { text: 'Speed of a small edit', textStyle: { bold: true, color: '#0E3F8C' } },&#10;          { text: 'Fast for one box, slow for a rename', textStyle: { color: '#4A5568' } },&#10;          { text: 'Find and replace; instant', textStyle: { color: '#1E4FA8', bold: true }, cellStyle: {} },&#10;        ],&#10;        [&#10;          { text: 'Diff in a pull request', textStyle: { bold: true, color: '#0E3F8C' }, cellStyle: { background: { color: '#F7F9FC' } } },&#10;          { text: 'Unreadable — the whole file changes', textStyle: { color: '#D9534F' }, cellStyle: { background: { color: '#F7F9FC' } } },&#10;          { text: 'One line per change', textStyle: { color: '#1E4FA8', bold: true }, cellStyle: { background: { color: '#F7F9FC' } } },&#10;        ],&#10;        [&#10;          { text: 'Learning curve', textStyle: { bold: true, color: '#0E3F8C' } },&#10;          { text: 'Ten minutes', textStyle: { color: '#4A5568' } },&#10;          { text: 'An afternoon', textStyle: { color: '#4A5568' } },&#10;        ],&#10;        [&#10;          { text: 'Best used for', textStyle: { bold: true, color: '#0E3F8C' }, cellStyle: { background: { color: '#F7F9FC' } } },&#10;          { text: 'Presentation diagrams, posters, one-offs', textStyle: { color: '#4A5568' }, cellStyle: { background: { color: '#F7F9FC' } } },&#10;          { text: 'Models the team edits all term', textStyle: { color: '#4A5568' }, cellStyle: { background: { color: '#F7F9FC' } } },&#10;        ],&#10;      ]}&#10;    /&gt;&#10;  &lt;/Box&gt;&#10;  &lt;Box style={{ height: 48, background: '#0E3F8C', padding: '0 40px', flexDirection: 'row', alignItems: 'center', justifyContent: 'center' }}&gt;&#10;    &lt;Text style={{ fontSize: 16.5, color: '#FFFFFF', fontWeight: '600' }}&gt;Course default: model in PlantUML, present in draw.io. Both source files go in the repository — a PNG on its own is not a submission.&lt;/Text&gt;&#10;  &lt;/Box&gt;&#10;&lt;/Slide&gt;"/>
+        <p:cNvPr id="422" name=""/>
         <p:cNvGrpSpPr/>
         <p:nvPr/>
       </p:nvGrpSpPr>
@@ -15319,7 +15775,10 @@
         </p:spPr>
         <p:txBody>
           <a:bodyPr/>
-          <a:p/>
+          <a:p>
+            <a:pPr/>
+            <a:endParaRPr/>
+          </a:p>
         </p:txBody>
       </p:sp>
       <p:sp>
@@ -15343,7 +15802,10 @@
         </p:spPr>
         <p:txBody>
           <a:bodyPr/>
-          <a:p/>
+          <a:p>
+            <a:pPr/>
+            <a:endParaRPr/>
+          </a:p>
         </p:txBody>
       </p:sp>
       <p:sp>
@@ -16584,7 +17046,10 @@
         </p:spPr>
         <p:txBody>
           <a:bodyPr/>
-          <a:p/>
+          <a:p>
+            <a:pPr/>
+            <a:endParaRPr/>
+          </a:p>
         </p:txBody>
       </p:sp>
       <p:sp>
@@ -16632,7 +17097,7 @@
   <p:cSld>
     <p:spTree>
       <p:nvGrpSpPr>
-        <p:cNvPr id="432" name="" descr="&lt;Slide style={{ background: '#FFFFFF', padding: 0 }}&gt;&#10;  &lt;Box style={{ height: 72, background: '#1E4FA8', padding: '0 40px', flexDirection: 'row', alignItems: 'center', justifyContent: 'space-between' }}&gt;&#10;    &lt;Text style={{ fontSize: 15, color: '#B9CDF0', letterSpacing: 1 }}&gt;ISAD · INFORMATION SYSTEMS ANALYSIS &amp;amp; DESIGN&lt;/Text&gt;&#10;    &lt;Text style={{ fontSize: 15, color: '#B9CDF0' }}&gt;W03 · TOOLCHAIN&lt;/Text&gt;&#10;  &lt;/Box&gt;&#10;  &lt;Box style={{ padding: '14px 40px 0 40px', flexDirection: 'row', alignItems: 'center', justifyContent: 'space-between' }}&gt;&#10;    &lt;Text style={{ fontSize: 30, fontWeight: 'bold', color: '#0E3F8C' }}&gt;PlantUML by Example&lt;/Text&gt;&#10;    &lt;Text style={{ fontSize: 14, color: '#1E4FA8', fontWeight: 'bold' }}&gt;28 / 38&lt;/Text&gt;&#10;  &lt;/Box&gt;&#10;  &lt;Box style={{ flex: 1, padding: '8px 40px 0 40px', flexDirection: 'row', gap: 26 }}&gt;&#10;    &lt;Box style={{ flex: 5, justifyContent: 'center' }}&gt;&#10;      &lt;CodeBlock theme='one-dark-pro' code={`@startuml&#10;class Library {&#10;  - name : String&#10;  + addBook(b : Book) : void&#10;  + findByIsbn(isbn : String) : Book&#10;}&#10;&#10;class Book {&#10;  - isbn : String&#10;  - title : String&#10;  + isAvailable() : boolean&#10;}&#10;&#10;class Member {&#10;  - id : String&#10;  - name : String&#10;  + borrow(b : Book) : void&#10;}&#10;&#10;Library &quot;1&quot; *-- &quot;0..*&quot; Book : holds&#10;Library &quot;1&quot; o-- &quot;0..*&quot; Member : registers&#10;@enduml`} language='text' width={600} fontSize={12.5} /&gt;&#10;    &lt;/Box&gt;&#10;    &lt;Box style={{ flex: 4, flexDirection: 'column', gap: 11, justifyContent: 'center' }}&gt;&#10;      {[&#10;        ['cube', 'class Name { ... }', 'Everything between the braces is the class box — name, attributes, operations, in that order.'],&#10;        ['grip-lines', 'The line between classes', 'Read it left to right: multiplicity, the line style, multiplicity, then a colon and the association name.'],&#10;        ['shapes', '*-- and o--', 'A filled diamond is composition: the parts die with the whole. A hollow one is aggregation. A bare -- is a plain association.'],&#10;      ].map(([icon, t, d]) =&gt; (&#10;        &lt;Box key={t} style={{ flexDirection: 'row', gap: 12, alignItems: 'flex-start', padding: '14px 16px', background: '#F7F9FC', borderRadius: 10, border: '1px solid #E5E7EB' }}&gt;&#10;          &lt;Box style={{ width: 38, height: 38, borderRadius: 9, background: '#E8EFF8', justifyContent: 'center', alignItems: 'center' }}&gt;&#10;            &lt;FAIcon name={icon} style={{ fill: '#1E4FA8', width: 18, height: 18 }} /&gt;&#10;          &lt;/Box&gt;&#10;          &lt;Box style={{ flex: 1, flexDirection: 'column', gap: 3 }}&gt;&#10;            &lt;Text style={{ fontSize: 15.5, fontWeight: 'bold', color: '#0E3F8C' }}&gt;{t}&lt;/Text&gt;&#10;            &lt;Text style={{ fontSize: 13.5, color: '#4A5568', lineHeight: 1.5 }}&gt;{d}&lt;/Text&gt;&#10;          &lt;/Box&gt;&#10;        &lt;/Box&gt;&#10;      ))}&#10;      &lt;Box style={{ padding: '12px 16px', background: '#F0F5FC', borderRadius: 9, borderLeft: '4px solid #1E4FA8' }}&gt;&#10;        &lt;Text style={{ fontSize: 13.5, color: '#0E3F8C', lineHeight: 1.5, fontWeight: 'bold' }}&gt;You will write exactly this file in Exercise 3.2 — with two lines left blank for you to fill in.&lt;/Text&gt;&#10;      &lt;/Box&gt;&#10;    &lt;/Box&gt;&#10;  &lt;/Box&gt;&#10;  &lt;Box style={{ height: 34, padding: '0 40px', flexDirection: 'row', alignItems: 'center', justifyContent: 'space-between' }}&gt;&#10;    &lt;Text style={{ fontSize: 13, color: '#8B97A8' }}&gt;ISAD · Fall 2026 · PlantUML renders in VS Code and on plantuml.com/plantuml&lt;/Text&gt;&#10;    &lt;Text style={{ fontSize: 14, color: '#1E4FA8', fontWeight: 'bold' }}&gt;28 / 38&lt;/Text&gt;&#10;  &lt;/Box&gt;&#10;&lt;/Slide&gt;"/>
+        <p:cNvPr id="432" name=""/>
         <p:cNvGrpSpPr/>
         <p:nvPr/>
       </p:nvGrpSpPr>
@@ -16665,7 +17130,10 @@
         </p:spPr>
         <p:txBody>
           <a:bodyPr/>
-          <a:p/>
+          <a:p>
+            <a:pPr/>
+            <a:endParaRPr/>
+          </a:p>
         </p:txBody>
       </p:sp>
       <p:sp>
@@ -16689,7 +17157,10 @@
         </p:spPr>
         <p:txBody>
           <a:bodyPr/>
-          <a:p/>
+          <a:p>
+            <a:pPr/>
+            <a:endParaRPr/>
+          </a:p>
         </p:txBody>
       </p:sp>
       <p:sp>
@@ -16860,7 +17331,10 @@
         </p:spPr>
         <p:txBody>
           <a:bodyPr/>
-          <a:p/>
+          <a:p>
+            <a:pPr/>
+            <a:endParaRPr/>
+          </a:p>
         </p:txBody>
       </p:sp>
       <p:sp>
@@ -16886,7 +17360,10 @@
         </p:spPr>
         <p:txBody>
           <a:bodyPr/>
-          <a:p/>
+          <a:p>
+            <a:pPr/>
+            <a:endParaRPr/>
+          </a:p>
         </p:txBody>
       </p:sp>
       <p:pic>
@@ -17020,7 +17497,10 @@
         </p:spPr>
         <p:txBody>
           <a:bodyPr/>
-          <a:p/>
+          <a:p>
+            <a:pPr/>
+            <a:endParaRPr/>
+          </a:p>
         </p:txBody>
       </p:sp>
       <p:sp>
@@ -17046,7 +17526,10 @@
         </p:spPr>
         <p:txBody>
           <a:bodyPr/>
-          <a:p/>
+          <a:p>
+            <a:pPr/>
+            <a:endParaRPr/>
+          </a:p>
         </p:txBody>
       </p:sp>
       <p:pic>
@@ -17180,7 +17663,10 @@
         </p:spPr>
         <p:txBody>
           <a:bodyPr/>
-          <a:p/>
+          <a:p>
+            <a:pPr/>
+            <a:endParaRPr/>
+          </a:p>
         </p:txBody>
       </p:sp>
       <p:sp>
@@ -17206,7 +17692,10 @@
         </p:spPr>
         <p:txBody>
           <a:bodyPr/>
-          <a:p/>
+          <a:p>
+            <a:pPr/>
+            <a:endParaRPr/>
+          </a:p>
         </p:txBody>
       </p:sp>
       <p:pic>
@@ -17335,7 +17824,10 @@
         </p:spPr>
         <p:txBody>
           <a:bodyPr/>
-          <a:p/>
+          <a:p>
+            <a:pPr/>
+            <a:endParaRPr/>
+          </a:p>
         </p:txBody>
       </p:sp>
       <p:sp>
@@ -17392,7 +17884,10 @@
         </p:spPr>
         <p:txBody>
           <a:bodyPr/>
-          <a:p/>
+          <a:p>
+            <a:pPr/>
+            <a:endParaRPr/>
+          </a:p>
         </p:txBody>
       </p:sp>
       <p:sp>
@@ -17525,7 +18020,10 @@
         </p:spPr>
         <p:txBody>
           <a:bodyPr/>
-          <a:p/>
+          <a:p>
+            <a:pPr/>
+            <a:endParaRPr/>
+          </a:p>
         </p:txBody>
       </p:sp>
       <p:sp>
@@ -17589,7 +18087,7 @@
   <p:cSld>
     <p:spTree>
       <p:nvGrpSpPr>
-        <p:cNvPr id="461" name="" descr="&lt;Slide style={{ background: '#FFFFFF', padding: 0 }}&gt;&#10;  &lt;Box style={{ height: 72, background: '#1E4FA8', padding: '0 40px', flexDirection: 'row', alignItems: 'center', justifyContent: 'space-between' }}&gt;&#10;    &lt;Text style={{ fontSize: 15, color: '#B9CDF0', letterSpacing: 1 }}&gt;ISAD · INFORMATION SYSTEMS ANALYSIS &amp;amp; DESIGN&lt;/Text&gt;&#10;    &lt;Text style={{ fontSize: 15, color: '#B9CDF0' }}&gt;W03 · TOOLCHAIN&lt;/Text&gt;&#10;  &lt;/Box&gt;&#10;  &lt;Box style={{ padding: '14px 40px 0 40px', flexDirection: 'row', alignItems: 'center', justifyContent: 'space-between' }}&gt;&#10;    &lt;Text style={{ fontSize: 30, fontWeight: 'bold', color: '#0E3F8C' }}&gt;Version-Controlling Diagrams&lt;/Text&gt;&#10;    &lt;Text style={{ fontSize: 14, color: '#1E4FA8', fontWeight: 'bold' }}&gt;29 / 38&lt;/Text&gt;&#10;  &lt;/Box&gt;&#10;  &lt;Box style={{ flex: 1, padding: '8px 40px 0 40px', flexDirection: 'row', gap: 24 }}&gt;&#10;    &lt;Box style={{ flex: 5, flexDirection: 'column', gap: 8, justifyContent: 'center' }}&gt;&#10;      &lt;Box style={{ flexDirection: 'row', alignItems: 'center', gap: 8 }}&gt;&#10;        &lt;Box style={{ padding: '3px 10px', background: '#FDF3F3', borderRadius: 6, border: '1px solid #F0C9C7' }}&gt;&#10;          &lt;Text style={{ fontSize: 12, color: '#D9534F', fontWeight: 'bold' }}&gt;.drawio&lt;/Text&gt;&#10;        &lt;/Box&gt;&#10;        &lt;Text style={{ fontSize: 12.5, color: '#8B97A8' }}&gt;one box moved — 340 lines rewritten&lt;/Text&gt;&#10;      &lt;/Box&gt;&#10;      &lt;CodeBlock theme='one-dark-pro' code={`-  &lt;mxCell id=&quot;9&quot; value=&quot;Book&quot; style=&quot;rounded=0;&#10;-     whiteSpace=wrap;html=1;&quot; vertex=&quot;1&quot; parent=&quot;1&quot;&gt;&#10;-    &lt;mxGeometry x=&quot;320&quot; y=&quot;80&quot; width=&quot;160&quot;&#10;-       height=&quot;60&quot; as=&quot;geometry&quot; /&gt;&#10;+  &lt;mxCell id=&quot;9&quot; value=&quot;Book&quot; style=&quot;rounded=0;&#10;+     whiteSpace=wrap;html=1;fillColor=#E8EFF8;&quot;&#10;+     vertex=&quot;1&quot; parent=&quot;1&quot;&gt;&#10;+    &lt;mxGeometry x=&quot;320&quot; y=&quot;80&quot; width=&quot;160&quot;&#10;+       height=&quot;86&quot; as=&quot;geometry&quot; /&gt;`} language='text' width={600} fontSize={10.5} /&gt;&#10;      &lt;Box style={{ flexDirection: 'row', alignItems: 'center', gap: 8 }}&gt;&#10;        &lt;Box style={{ padding: '3px 10px', background: '#E8EFF8', borderRadius: 6, border: '1px solid #C9D9F2' }}&gt;&#10;          &lt;Text style={{ fontSize: 12, color: '#1E4FA8', fontWeight: 'bold' }}&gt;.puml&lt;/Text&gt;&#10;        &lt;/Box&gt;&#10;        &lt;Text style={{ fontSize: 12.5, color: '#8B97A8' }}&gt;the same edit — two lines&lt;/Text&gt;&#10;      &lt;/Box&gt;&#10;      &lt;CodeBlock theme='one-dark-pro' code={`- Member &quot;1&quot;     -- &quot;0..*&quot; Book : borrows&#10;+ Member &quot;0..1&quot;  -- &quot;0..*&quot; Book : borrows&#10;+ Member &quot;1&quot;     -- &quot;0..1&quot; Library : registers`} language='text' width={600} fontSize={11.5} /&gt;&#10;    &lt;/Box&gt;&#10;    &lt;Box style={{ flex: 4, flexDirection: 'column', gap: 11, justifyContent: 'center' }}&gt;&#10;      {[&#10;        ['code-branch', 'A diff you can actually read', 'Two lines instead of three hundred. A reviewer can see what changed and disagree with it in writing.'],&#10;        ['user-clock', 'History becomes evidence', 'The log shows who added the multiplicity and when. That is what makes the contribution review possible at all.'],&#10;        ['users', 'This is why it touches your grade', 'Individual work is 40% of the mark and is assessed from the repository. If your edit is invisible, it cannot be counted.'],&#10;      ].map(([icon, t, d]) =&gt; (&#10;        &lt;Box key={t} style={{ flexDirection: 'row', gap: 12, alignItems: 'flex-start', padding: '13px 16px', background: '#F7F9FC', borderRadius: 10, border: '1px solid #E5E7EB' }}&gt;&#10;          &lt;Box style={{ width: 36, height: 36, borderRadius: 9, background: '#E8EFF8', justifyContent: 'center', alignItems: 'center' }}&gt;&#10;            &lt;FAIcon name={icon} style={{ fill: '#1E4FA8', width: 17, height: 17 }} /&gt;&#10;          &lt;/Box&gt;&#10;          &lt;Box style={{ flex: 1, flexDirection: 'column', gap: 2 }}&gt;&#10;            &lt;Text style={{ fontSize: 15, fontWeight: 'bold', color: '#0E3F8C' }}&gt;{t}&lt;/Text&gt;&#10;            &lt;Text style={{ fontSize: 13, color: '#4A5568', lineHeight: 1.45 }}&gt;{d}&lt;/Text&gt;&#10;          &lt;/Box&gt;&#10;        &lt;/Box&gt;&#10;      ))}&#10;      &lt;Box style={{ padding: '12px 16px', background: '#0E3F8C', borderRadius: 9 }}&gt;&#10;        &lt;Text style={{ fontSize: 13.5, color: '#FFFFFF', lineHeight: 1.5 }}&gt;A PNG with no source file is worth zero. The source is the deliverable; the image is only its shadow.&lt;/Text&gt;&#10;      &lt;/Box&gt;&#10;    &lt;/Box&gt;&#10;  &lt;/Box&gt;&#10;  &lt;Box style={{ height: 32, padding: '0 40px', flexDirection: 'row', alignItems: 'center', justifyContent: 'space-between' }}&gt;&#10;    &lt;Text style={{ fontSize: 13, color: '#8B97A8' }}&gt;ISAD · Fall 2026&lt;/Text&gt;&#10;    &lt;Text style={{ fontSize: 14, color: '#1E4FA8', fontWeight: 'bold' }}&gt;29 / 38&lt;/Text&gt;&#10;  &lt;/Box&gt;&#10;&lt;/Slide&gt;"/>
+        <p:cNvPr id="461" name=""/>
         <p:cNvGrpSpPr/>
         <p:nvPr/>
       </p:nvGrpSpPr>
@@ -17622,7 +18120,10 @@
         </p:spPr>
         <p:txBody>
           <a:bodyPr/>
-          <a:p/>
+          <a:p>
+            <a:pPr/>
+            <a:endParaRPr/>
+          </a:p>
         </p:txBody>
       </p:sp>
       <p:sp>
@@ -17646,7 +18147,10 @@
         </p:spPr>
         <p:txBody>
           <a:bodyPr/>
-          <a:p/>
+          <a:p>
+            <a:pPr/>
+            <a:endParaRPr/>
+          </a:p>
         </p:txBody>
       </p:sp>
       <p:sp>
@@ -17817,7 +18321,10 @@
         </p:spPr>
         <p:txBody>
           <a:bodyPr/>
-          <a:p/>
+          <a:p>
+            <a:pPr/>
+            <a:endParaRPr/>
+          </a:p>
         </p:txBody>
       </p:sp>
       <p:sp>
@@ -17918,7 +18425,10 @@
         </p:spPr>
         <p:txBody>
           <a:bodyPr/>
-          <a:p/>
+          <a:p>
+            <a:pPr/>
+            <a:endParaRPr/>
+          </a:p>
         </p:txBody>
       </p:sp>
       <p:sp>
@@ -18019,7 +18529,10 @@
         </p:spPr>
         <p:txBody>
           <a:bodyPr/>
-          <a:p/>
+          <a:p>
+            <a:pPr/>
+            <a:endParaRPr/>
+          </a:p>
         </p:txBody>
       </p:sp>
       <p:sp>
@@ -18045,7 +18558,10 @@
         </p:spPr>
         <p:txBody>
           <a:bodyPr/>
-          <a:p/>
+          <a:p>
+            <a:pPr/>
+            <a:endParaRPr/>
+          </a:p>
         </p:txBody>
       </p:sp>
       <p:pic>
@@ -18179,7 +18695,10 @@
         </p:spPr>
         <p:txBody>
           <a:bodyPr/>
-          <a:p/>
+          <a:p>
+            <a:pPr/>
+            <a:endParaRPr/>
+          </a:p>
         </p:txBody>
       </p:sp>
       <p:sp>
@@ -18205,7 +18724,10 @@
         </p:spPr>
         <p:txBody>
           <a:bodyPr/>
-          <a:p/>
+          <a:p>
+            <a:pPr/>
+            <a:endParaRPr/>
+          </a:p>
         </p:txBody>
       </p:sp>
       <p:pic>
@@ -18339,7 +18861,10 @@
         </p:spPr>
         <p:txBody>
           <a:bodyPr/>
-          <a:p/>
+          <a:p>
+            <a:pPr/>
+            <a:endParaRPr/>
+          </a:p>
         </p:txBody>
       </p:sp>
       <p:sp>
@@ -18365,7 +18890,10 @@
         </p:spPr>
         <p:txBody>
           <a:bodyPr/>
-          <a:p/>
+          <a:p>
+            <a:pPr/>
+            <a:endParaRPr/>
+          </a:p>
         </p:txBody>
       </p:sp>
       <p:pic>
@@ -18494,7 +19022,10 @@
         </p:spPr>
         <p:txBody>
           <a:bodyPr/>
-          <a:p/>
+          <a:p>
+            <a:pPr/>
+            <a:endParaRPr/>
+          </a:p>
         </p:txBody>
       </p:sp>
       <p:sp>
@@ -18528,7 +19059,7 @@
                 <a:latin typeface="Microsoft YaHei"/>
                 <a:ea typeface="Microsoft YaHei"/>
               </a:rPr>
-              <a:t>A PNG with no source file is worth zero. The source is the deliverable; the image is only its shadow.</a:t>
+              <a:t>A PNG with no source file is worth zero. The source is what is graded — but export the PNG and commit it beside it.</a:t>
             </a:r>
             <a:endParaRPr/>
           </a:p>
@@ -18627,7 +19158,10 @@
         </p:spPr>
         <p:txBody>
           <a:bodyPr/>
-          <a:p/>
+          <a:p>
+            <a:pPr/>
+            <a:endParaRPr/>
+          </a:p>
         </p:txBody>
       </p:sp>
       <p:sp>
@@ -18694,7 +19228,10 @@
         </p:spPr>
         <p:txBody>
           <a:bodyPr/>
-          <a:p/>
+          <a:p>
+            <a:pPr/>
+            <a:endParaRPr/>
+          </a:p>
         </p:txBody>
       </p:sp>
       <p:sp>
@@ -18742,7 +19279,7 @@
   <p:cSld>
     <p:spTree>
       <p:nvGrpSpPr>
-        <p:cNvPr id="497" name="" descr="&lt;Slide style={{ background: '#0E3F8C', padding: 0 }}&gt;&#10;  &lt;Box style={{ flexDirection: 'row', height: '100%', position: 'relative' }}&gt;&#10;    &lt;Box style={{ position: 'absolute', top: 0, left: 0, right: 0, height: 8, background: '#1E4FA8' }} /&gt;&#10;    &lt;Box style={{ width: 300, justifyContent: 'center', alignItems: 'center', borderRight: '1px solid #2B5793' }}&gt;&#10;      &lt;Text style={{ fontSize: 220, fontWeight: 'bold', color: '#3D7BD9', fontFamily: 'Georgia, serif', lineHeight: 1 }}&gt;01&lt;/Text&gt;&#10;    &lt;/Box&gt;&#10;    &lt;Box style={{ flex: 1, padding: '70px 64px', flexDirection: 'column', justifyContent: 'center' }}&gt;&#10;      &lt;Text style={{ fontSize: 15, color: '#7FA2D6', letterSpacing: 2, marginBottom: 18 }}&gt;PART 1 · LECTURE&lt;/Text&gt;&#10;      &lt;Text style={{ fontSize: 48, fontWeight: 'bold', color: '#FFFFFF', lineHeight: 1.18 }}&gt;Recap &amp;amp;&lt;br /&gt;Why Models&lt;/Text&gt;&#10;      &lt;Box style={{ width: 64, height: 4, background: '#FFC107', marginTop: 26, marginBottom: 26 }} /&gt;&#10;      &lt;Box style={{ flexDirection: 'column', gap: 12 }}&gt;&#10;        {[&#10;          'Last week gave you the ideas',&#10;          'This week gives you the notation to write them down',&#10;          'A model is true enough — not complete',&#10;        ].map((t) =&gt; (&#10;          &lt;Box key={t} style={{ flexDirection: 'row', alignItems: 'center', gap: 12 }}&gt;&#10;            &lt;Box style={{ width: 8, height: 8, borderRadius: 4, background: '#3D7BD9' }} /&gt;&#10;            &lt;Text style={{ fontSize: 20, color: '#C5D4EA' }}&gt;{t}&lt;/Text&gt;&#10;          &lt;/Box&gt;&#10;        ))}&#10;      &lt;/Box&gt;&#10;    &lt;/Box&gt;&#10;  &lt;/Box&gt;&#10;&lt;/Slide&gt;"/>
+        <p:cNvPr id="497" name=""/>
         <p:cNvGrpSpPr/>
         <p:nvPr/>
       </p:nvGrpSpPr>
@@ -18775,7 +19312,10 @@
         </p:spPr>
         <p:txBody>
           <a:bodyPr/>
-          <a:p/>
+          <a:p>
+            <a:pPr/>
+            <a:endParaRPr/>
+          </a:p>
         </p:txBody>
       </p:sp>
       <p:sp>
@@ -18815,7 +19355,10 @@
         </p:spPr>
         <p:txBody>
           <a:bodyPr/>
-          <a:p/>
+          <a:p>
+            <a:pPr/>
+            <a:endParaRPr/>
+          </a:p>
         </p:txBody>
       </p:sp>
       <p:sp>
@@ -18962,7 +19505,10 @@
         </p:spPr>
         <p:txBody>
           <a:bodyPr/>
-          <a:p/>
+          <a:p>
+            <a:pPr/>
+            <a:endParaRPr/>
+          </a:p>
         </p:txBody>
       </p:sp>
       <p:sp>
@@ -18988,7 +19534,10 @@
         </p:spPr>
         <p:txBody>
           <a:bodyPr/>
-          <a:p/>
+          <a:p>
+            <a:pPr/>
+            <a:endParaRPr/>
+          </a:p>
         </p:txBody>
       </p:sp>
       <p:sp>
@@ -19049,7 +19598,10 @@
         </p:spPr>
         <p:txBody>
           <a:bodyPr/>
-          <a:p/>
+          <a:p>
+            <a:pPr/>
+            <a:endParaRPr/>
+          </a:p>
         </p:txBody>
       </p:sp>
       <p:sp>
@@ -19110,7 +19662,10 @@
         </p:spPr>
         <p:txBody>
           <a:bodyPr/>
-          <a:p/>
+          <a:p>
+            <a:pPr/>
+            <a:endParaRPr/>
+          </a:p>
         </p:txBody>
       </p:sp>
       <p:sp>
@@ -19169,7 +19724,10 @@
         </p:spPr>
         <p:txBody>
           <a:bodyPr/>
-          <a:p/>
+          <a:p>
+            <a:pPr/>
+            <a:endParaRPr/>
+          </a:p>
         </p:txBody>
       </p:sp>
     </p:spTree>
@@ -19182,7 +19740,7 @@
   <p:cSld>
     <p:spTree>
       <p:nvGrpSpPr>
-        <p:cNvPr id="511" name="" descr="&lt;Slide style={{ background: '#FFFFFF', padding: 0 }}&gt;&#10;  &lt;Box style={{ height: 72, background: '#1E4FA8', padding: '0 40px', flexDirection: 'row', alignItems: 'center', justifyContent: 'space-between' }}&gt;&#10;    &lt;Text style={{ fontSize: 15, color: '#B9CDF0', letterSpacing: 1 }}&gt;ISAD · INFORMATION SYSTEMS ANALYSIS &amp;amp; DESIGN&lt;/Text&gt;&#10;    &lt;Text style={{ fontSize: 15, color: '#B9CDF0' }}&gt;W03 · TOOLCHAIN&lt;/Text&gt;&#10;  &lt;/Box&gt;&#10;  &lt;Box style={{ padding: '16px 40px 0 40px', flexDirection: 'row', alignItems: 'center', justifyContent: 'space-between' }}&gt;&#10;    &lt;Text style={{ fontSize: 30, fontWeight: 'bold', color: '#0E3F8C' }}&gt;Team Diagram Conventions&lt;/Text&gt;&#10;    &lt;Text style={{ fontSize: 14, color: '#1E4FA8', fontWeight: 'bold' }}&gt;30 / 38&lt;/Text&gt;&#10;  &lt;/Box&gt;&#10;  &lt;Box style={{ flex: 1, padding: '12px 40px 0 40px', flexDirection: 'column', gap: 10, justifyContent: 'center' }}&gt;&#10;    {[&#10;      ['file-signature', 'Naming', 'Lower-case kebab, one artefact per file: domain-model.puml, order-sequence.puml, order-state.puml. No &quot;final&quot;, no &quot;v3&quot;.', 'A file name is the first thing a reviewer reads.'],&#10;      ['folder-open', 'Location', 'Everything under docs/diagrams/ in the team repository. Never on a laptop, never as a chat attachment.', 'If it is not in the repo, it does not exist.'],&#10;      ['palette', 'Colour', 'One palette only: white = agreed concept, blue = proposed this week, grey = deprecated. Nothing else.', 'Colour that carries no meaning is noise.'],&#10;      ['pen-to-square', 'Decision line', 'Every diagram gets one sentence in the README next to it: the decision the diagram is making.', 'Forces you to know what the diagram is for.'],&#10;      ['image', 'Export', 'The PNG is exported from the source and committed beside it, same name, different extension.', 'So a reader can look at the picture without the tool.'],&#10;      ['user-check', 'Ownership', 'The README names an owner for each file. Editing someone else\'s file needs a commit message that says why.', 'This is what the contribution review reads.'],&#10;    ].map(([icon, t, d, w]) =&gt; (&#10;      &lt;Box key={t} style={{ flexDirection: 'row', gap: 16, alignItems: 'center', padding: '12px 18px', background: '#F7F9FC', borderRadius: 10, border: '1px solid #E5E7EB' }}&gt;&#10;        &lt;Box style={{ width: 38, height: 38, borderRadius: 9, background: '#E8EFF8', justifyContent: 'center', alignItems: 'center' }}&gt;&#10;          &lt;FAIcon name={icon} style={{ fill: '#1E4FA8', width: 18, height: 18 }} /&gt;&#10;        &lt;/Box&gt;&#10;        &lt;Box style={{ width: 120 }}&gt;&#10;          &lt;Text style={{ fontSize: 16, fontWeight: 'bold', color: '#0E3F8C' }}&gt;{t}&lt;/Text&gt;&#10;        &lt;/Box&gt;&#10;        &lt;Box style={{ flex: 1, flexDirection: 'column', gap: 2 }}&gt;&#10;          &lt;Text style={{ fontSize: 14, color: '#1A2230', lineHeight: 1.45 }}&gt;{d}&lt;/Text&gt;&#10;          &lt;Text style={{ fontSize: 12.5, color: '#8B97A8', lineHeight: 1.4, fontStyle: 'italic' }}&gt;{w}&lt;/Text&gt;&#10;        &lt;/Box&gt;&#10;      &lt;/Box&gt;&#10;    ))}&#10;  &lt;/Box&gt;&#10;  &lt;Box style={{ height: 44, background: '#0E3F8C', padding: '0 40px', flexDirection: 'row', alignItems: 'center', justifyContent: 'center' }}&gt;&#10;    &lt;Text style={{ fontSize: 17, color: '#FFFFFF', fontWeight: '600' }}&gt;Agree these six today, write them into the README, and stop re-arguing them for the rest of the term.&lt;/Text&gt;&#10;  &lt;/Box&gt;&#10;&lt;/Slide&gt;"/>
+        <p:cNvPr id="511" name=""/>
         <p:cNvGrpSpPr/>
         <p:nvPr/>
       </p:nvGrpSpPr>
@@ -19215,7 +19773,10 @@
         </p:spPr>
         <p:txBody>
           <a:bodyPr/>
-          <a:p/>
+          <a:p>
+            <a:pPr/>
+            <a:endParaRPr/>
+          </a:p>
         </p:txBody>
       </p:sp>
       <p:sp>
@@ -19239,7 +19800,10 @@
         </p:spPr>
         <p:txBody>
           <a:bodyPr/>
-          <a:p/>
+          <a:p>
+            <a:pPr/>
+            <a:endParaRPr/>
+          </a:p>
         </p:txBody>
       </p:sp>
       <p:sp>
@@ -19410,7 +19974,10 @@
         </p:spPr>
         <p:txBody>
           <a:bodyPr/>
-          <a:p/>
+          <a:p>
+            <a:pPr/>
+            <a:endParaRPr/>
+          </a:p>
         </p:txBody>
       </p:sp>
       <p:sp>
@@ -19436,7 +20003,10 @@
         </p:spPr>
         <p:txBody>
           <a:bodyPr/>
-          <a:p/>
+          <a:p>
+            <a:pPr/>
+            <a:endParaRPr/>
+          </a:p>
         </p:txBody>
       </p:sp>
       <p:pic>
@@ -19603,7 +20173,10 @@
         </p:spPr>
         <p:txBody>
           <a:bodyPr/>
-          <a:p/>
+          <a:p>
+            <a:pPr/>
+            <a:endParaRPr/>
+          </a:p>
         </p:txBody>
       </p:sp>
       <p:sp>
@@ -19629,7 +20202,10 @@
         </p:spPr>
         <p:txBody>
           <a:bodyPr/>
-          <a:p/>
+          <a:p>
+            <a:pPr/>
+            <a:endParaRPr/>
+          </a:p>
         </p:txBody>
       </p:sp>
       <p:pic>
@@ -19796,7 +20372,10 @@
         </p:spPr>
         <p:txBody>
           <a:bodyPr/>
-          <a:p/>
+          <a:p>
+            <a:pPr/>
+            <a:endParaRPr/>
+          </a:p>
         </p:txBody>
       </p:sp>
       <p:sp>
@@ -19822,7 +20401,10 @@
         </p:spPr>
         <p:txBody>
           <a:bodyPr/>
-          <a:p/>
+          <a:p>
+            <a:pPr/>
+            <a:endParaRPr/>
+          </a:p>
         </p:txBody>
       </p:sp>
       <p:pic>
@@ -19989,7 +20571,10 @@
         </p:spPr>
         <p:txBody>
           <a:bodyPr/>
-          <a:p/>
+          <a:p>
+            <a:pPr/>
+            <a:endParaRPr/>
+          </a:p>
         </p:txBody>
       </p:sp>
       <p:sp>
@@ -20015,7 +20600,10 @@
         </p:spPr>
         <p:txBody>
           <a:bodyPr/>
-          <a:p/>
+          <a:p>
+            <a:pPr/>
+            <a:endParaRPr/>
+          </a:p>
         </p:txBody>
       </p:sp>
       <p:pic>
@@ -20182,7 +20770,10 @@
         </p:spPr>
         <p:txBody>
           <a:bodyPr/>
-          <a:p/>
+          <a:p>
+            <a:pPr/>
+            <a:endParaRPr/>
+          </a:p>
         </p:txBody>
       </p:sp>
       <p:sp>
@@ -20208,7 +20799,10 @@
         </p:spPr>
         <p:txBody>
           <a:bodyPr/>
-          <a:p/>
+          <a:p>
+            <a:pPr/>
+            <a:endParaRPr/>
+          </a:p>
         </p:txBody>
       </p:sp>
       <p:pic>
@@ -20375,7 +20969,10 @@
         </p:spPr>
         <p:txBody>
           <a:bodyPr/>
-          <a:p/>
+          <a:p>
+            <a:pPr/>
+            <a:endParaRPr/>
+          </a:p>
         </p:txBody>
       </p:sp>
       <p:sp>
@@ -20401,7 +20998,10 @@
         </p:spPr>
         <p:txBody>
           <a:bodyPr/>
-          <a:p/>
+          <a:p>
+            <a:pPr/>
+            <a:endParaRPr/>
+          </a:p>
         </p:txBody>
       </p:sp>
       <p:pic>
@@ -20561,7 +21161,10 @@
         </p:spPr>
         <p:txBody>
           <a:bodyPr/>
-          <a:p/>
+          <a:p>
+            <a:pPr/>
+            <a:endParaRPr/>
+          </a:p>
         </p:txBody>
       </p:sp>
       <p:sp>
@@ -20609,7 +21212,7 @@
   <p:cSld>
     <p:spTree>
       <p:nvGrpSpPr>
-        <p:cNvPr id="556" name="" descr="&lt;Slide style={{ background: '#0E3F8C', padding: 0 }}&gt;&#10;  &lt;Box style={{ flexDirection: 'row', height: '100%', position: 'relative' }}&gt;&#10;    &lt;Box style={{ position: 'absolute', top: 0, left: 0, right: 0, height: 8, background: '#1E4FA8' }} /&gt;&#10;    &lt;Box style={{ width: 300, justifyContent: 'center', alignItems: 'center', borderRight: '1px solid #2B5793' }}&gt;&#10;      &lt;Text style={{ fontSize: 220, fontWeight: 'bold', color: '#3D7BD9', fontFamily: 'Georgia, serif', lineHeight: 1 }}&gt;06&lt;/Text&gt;&#10;    &lt;/Box&gt;&#10;    &lt;Box style={{ flex: 1, padding: '70px 64px', flexDirection: 'column', justifyContent: 'center' }}&gt;&#10;      &lt;Text style={{ fontSize: 15, color: '#7FA2D6', letterSpacing: 2, marginBottom: 18 }}&gt;PART 2 · LAB · 90 MINUTES&lt;/Text&gt;&#10;      &lt;Text style={{ fontSize: 46, fontWeight: 'bold', color: '#FFFFFF', lineHeight: 1.18 }}&gt;Exercises &amp;amp;&lt;br /&gt;Team Setup&lt;/Text&gt;&#10;      &lt;Box style={{ width: 64, height: 4, background: '#FFC107', marginTop: 26, marginBottom: 26 }} /&gt;&#10;      &lt;Box style={{ flexDirection: 'column', gap: 12 }}&gt;&#10;        {[&#10;          'Exercise 3.1 — name that diagram',&#10;          'Exercise 3.2 — model a library in PlantUML',&#10;          'Then: the toolchain and the conventions, checked off',&#10;        ].map((t) =&gt; (&#10;          &lt;Box key={t} style={{ flexDirection: 'row', alignItems: 'center', gap: 12 }}&gt;&#10;            &lt;Box style={{ width: 8, height: 8, borderRadius: 4, background: '#3D7BD9' }} /&gt;&#10;            &lt;Text style={{ fontSize: 20, color: '#C5D4EA' }}&gt;{t}&lt;/Text&gt;&#10;          &lt;/Box&gt;&#10;        ))}&#10;      &lt;/Box&gt;&#10;    &lt;/Box&gt;&#10;  &lt;/Box&gt;&#10;&lt;/Slide&gt;"/>
+        <p:cNvPr id="556" name=""/>
         <p:cNvGrpSpPr/>
         <p:nvPr/>
       </p:nvGrpSpPr>
@@ -20642,7 +21245,10 @@
         </p:spPr>
         <p:txBody>
           <a:bodyPr/>
-          <a:p/>
+          <a:p>
+            <a:pPr/>
+            <a:endParaRPr/>
+          </a:p>
         </p:txBody>
       </p:sp>
       <p:sp>
@@ -20682,7 +21288,10 @@
         </p:spPr>
         <p:txBody>
           <a:bodyPr/>
-          <a:p/>
+          <a:p>
+            <a:pPr/>
+            <a:endParaRPr/>
+          </a:p>
         </p:txBody>
       </p:sp>
       <p:sp>
@@ -20829,7 +21438,10 @@
         </p:spPr>
         <p:txBody>
           <a:bodyPr/>
-          <a:p/>
+          <a:p>
+            <a:pPr/>
+            <a:endParaRPr/>
+          </a:p>
         </p:txBody>
       </p:sp>
       <p:sp>
@@ -20855,7 +21467,10 @@
         </p:spPr>
         <p:txBody>
           <a:bodyPr/>
-          <a:p/>
+          <a:p>
+            <a:pPr/>
+            <a:endParaRPr/>
+          </a:p>
         </p:txBody>
       </p:sp>
       <p:sp>
@@ -20916,7 +21531,10 @@
         </p:spPr>
         <p:txBody>
           <a:bodyPr/>
-          <a:p/>
+          <a:p>
+            <a:pPr/>
+            <a:endParaRPr/>
+          </a:p>
         </p:txBody>
       </p:sp>
       <p:sp>
@@ -20977,7 +21595,10 @@
         </p:spPr>
         <p:txBody>
           <a:bodyPr/>
-          <a:p/>
+          <a:p>
+            <a:pPr/>
+            <a:endParaRPr/>
+          </a:p>
         </p:txBody>
       </p:sp>
       <p:sp>
@@ -21036,7 +21657,10 @@
         </p:spPr>
         <p:txBody>
           <a:bodyPr/>
-          <a:p/>
+          <a:p>
+            <a:pPr/>
+            <a:endParaRPr/>
+          </a:p>
         </p:txBody>
       </p:sp>
     </p:spTree>
@@ -21049,7 +21673,7 @@
   <p:cSld>
     <p:spTree>
       <p:nvGrpSpPr>
-        <p:cNvPr id="570" name="" descr="&lt;Slide style={{ background: '#FFFFFF', padding: 0 }}&gt;&#10;  &lt;Box style={{ height: 72, background: '#1E4FA8', padding: '0 40px', flexDirection: 'row', alignItems: 'center', justifyContent: 'space-between' }}&gt;&#10;    &lt;Text style={{ fontSize: 15, color: '#B9CDF0', letterSpacing: 1 }}&gt;ISAD · INFORMATION SYSTEMS ANALYSIS &amp;amp; DESIGN&lt;/Text&gt;&#10;    &lt;Text style={{ fontSize: 15, color: '#B9CDF0' }}&gt;W03 · LAB&lt;/Text&gt;&#10;  &lt;/Box&gt;&#10;  &lt;Box style={{ flex: 1, padding: '18px 40px 0 40px', flexDirection: 'row', gap: 26 }}&gt;&#10;    &lt;Box style={{ width: 320, flexDirection: 'column', gap: 12, justifyContent: 'center' }}&gt;&#10;      &lt;Box style={{ padding: '6px 14px', background: '#0E3F8C', borderRadius: 6, alignSelf: 'flex-start' }}&gt;&#10;        &lt;Text style={{ fontSize: 13, color: '#FFFFFF', fontWeight: 'bold', letterSpacing: 1 }}&gt;EXERCISE 3.1&lt;/Text&gt;&#10;      &lt;/Box&gt;&#10;      &lt;Text style={{ fontSize: 30, fontWeight: 'bold', color: '#0E3F8C', lineHeight: 1.2 }}&gt;Name That&lt;br /&gt;Diagram&lt;/Text&gt;&#10;      &lt;Box style={{ width: 52, height: 4, background: '#FFC107' }} /&gt;&#10;      &lt;Text style={{ fontSize: 15, color: '#4A5568', lineHeight: 1.6 }}&gt;Six fragments. For each one, write down two things: which diagram it is, and the question that diagram answers.&lt;/Text&gt;&#10;      &lt;Box style={{ padding: '13px 16px', background: '#F0F5FC', borderRadius: 9, borderLeft: '4px solid #1E4FA8' }}&gt;&#10;        &lt;Text style={{ fontSize: 14, color: '#0E3F8C', lineHeight: 1.5, fontWeight: 'bold' }}&gt;Answer the question, not just the name. &quot;It is a class diagram&quot; earns half a mark.&lt;/Text&gt;&#10;      &lt;/Box&gt;&#10;      &lt;Text style={{ fontSize: 13.5, color: '#8B97A8', lineHeight: 1.5 }}&gt;Ten minutes alone, then the pair next to you reads your answers. Answers on the next slide — do not scroll ahead.&lt;/Text&gt;&#10;    &lt;/Box&gt;&#10;    &lt;Box style={{ flex: 1, flexDirection: 'column', gap: 9, justifyContent: 'center' }}&gt;&#10;      {[&#10;        ['A', 'A stick figure labelled Student, an ellipse labelled Place Order, and a thin rectangle drawn around the ellipse.'],&#10;        ['B', 'Three boxes — Order, OrderLine, MenuItem — joined by lines carrying the labels 1 and 1..*.'],&#10;        ['C', 'Three dashed vertical lines running down the page, with horizontal arrows stepping between them.'],&#10;        ['D', 'Four rounded rectangles connected by arrows labelled submit, cancel, deliver, hand over.'],&#10;        ['E', 'One thick horizontal bar that splits a single flow into two, and a second bar further down that brings them back together.'],&#10;        ['F', 'Four large boxes, each containing several smaller ones, with arrows drawn between the large boxes.'],&#10;      ].map(([k, d]) =&gt; (&#10;        &lt;Box key={k} style={{ flexDirection: 'row', gap: 14, alignItems: 'flex-start', padding: '12px 16px', background: '#F7F9FC', borderRadius: 10, border: '1px solid #E5E7EB' }}&gt;&#10;          &lt;Box style={{ width: 30, height: 30, borderRadius: 7, background: '#E8EFF8', justifyContent: 'center', alignItems: 'center' }}&gt;&#10;            &lt;Text style={{ fontSize: 15, fontWeight: 'bold', color: '#1E4FA8' }}&gt;{k}&lt;/Text&gt;&#10;          &lt;/Box&gt;&#10;          &lt;Text style={{ flex: 1, fontSize: 14.5, color: '#1A2230', lineHeight: 1.5 }}&gt;{d}&lt;/Text&gt;&#10;        &lt;/Box&gt;&#10;      ))}&#10;    &lt;/Box&gt;&#10;  &lt;/Box&gt;&#10;  &lt;Box style={{ height: 40, padding: '0 40px', flexDirection: 'row', alignItems: 'center', justifyContent: 'space-between' }}&gt;&#10;    &lt;Text style={{ fontSize: 13, color: '#8B97A8' }}&gt;ISAD · Fall 2026&lt;/Text&gt;&#10;    &lt;Text style={{ fontSize: 14, color: '#1E4FA8', fontWeight: 'bold' }}&gt;32 / 38&lt;/Text&gt;&#10;  &lt;/Box&gt;&#10;&lt;/Slide&gt;"/>
+        <p:cNvPr id="570" name=""/>
         <p:cNvGrpSpPr/>
         <p:nvPr/>
       </p:nvGrpSpPr>
@@ -21082,7 +21706,10 @@
         </p:spPr>
         <p:txBody>
           <a:bodyPr/>
-          <a:p/>
+          <a:p>
+            <a:pPr/>
+            <a:endParaRPr/>
+          </a:p>
         </p:txBody>
       </p:sp>
       <p:sp>
@@ -21106,7 +21733,10 @@
         </p:spPr>
         <p:txBody>
           <a:bodyPr/>
-          <a:p/>
+          <a:p>
+            <a:pPr/>
+            <a:endParaRPr/>
+          </a:p>
         </p:txBody>
       </p:sp>
       <p:sp>
@@ -21202,7 +21832,10 @@
         </p:spPr>
         <p:txBody>
           <a:bodyPr/>
-          <a:p/>
+          <a:p>
+            <a:pPr/>
+            <a:endParaRPr/>
+          </a:p>
         </p:txBody>
       </p:sp>
       <p:sp>
@@ -21314,7 +21947,10 @@
         </p:spPr>
         <p:txBody>
           <a:bodyPr/>
-          <a:p/>
+          <a:p>
+            <a:pPr/>
+            <a:endParaRPr/>
+          </a:p>
         </p:txBody>
       </p:sp>
       <p:sp>
@@ -21377,7 +22013,10 @@
         </p:spPr>
         <p:txBody>
           <a:bodyPr/>
-          <a:p/>
+          <a:p>
+            <a:pPr/>
+            <a:endParaRPr/>
+          </a:p>
         </p:txBody>
       </p:sp>
       <p:sp>
@@ -21434,7 +22073,10 @@
         </p:spPr>
         <p:txBody>
           <a:bodyPr/>
-          <a:p/>
+          <a:p>
+            <a:pPr/>
+            <a:endParaRPr/>
+          </a:p>
         </p:txBody>
       </p:sp>
       <p:sp>
@@ -21539,7 +22181,10 @@
         </p:spPr>
         <p:txBody>
           <a:bodyPr/>
-          <a:p/>
+          <a:p>
+            <a:pPr/>
+            <a:endParaRPr/>
+          </a:p>
         </p:txBody>
       </p:sp>
       <p:sp>
@@ -21565,7 +22210,10 @@
         </p:spPr>
         <p:txBody>
           <a:bodyPr/>
-          <a:p/>
+          <a:p>
+            <a:pPr/>
+            <a:endParaRPr/>
+          </a:p>
         </p:txBody>
       </p:sp>
       <p:sp>
@@ -21666,7 +22314,10 @@
         </p:spPr>
         <p:txBody>
           <a:bodyPr/>
-          <a:p/>
+          <a:p>
+            <a:pPr/>
+            <a:endParaRPr/>
+          </a:p>
         </p:txBody>
       </p:sp>
       <p:sp>
@@ -21692,7 +22343,10 @@
         </p:spPr>
         <p:txBody>
           <a:bodyPr/>
-          <a:p/>
+          <a:p>
+            <a:pPr/>
+            <a:endParaRPr/>
+          </a:p>
         </p:txBody>
       </p:sp>
       <p:sp>
@@ -21793,7 +22447,10 @@
         </p:spPr>
         <p:txBody>
           <a:bodyPr/>
-          <a:p/>
+          <a:p>
+            <a:pPr/>
+            <a:endParaRPr/>
+          </a:p>
         </p:txBody>
       </p:sp>
       <p:sp>
@@ -21819,7 +22476,10 @@
         </p:spPr>
         <p:txBody>
           <a:bodyPr/>
-          <a:p/>
+          <a:p>
+            <a:pPr/>
+            <a:endParaRPr/>
+          </a:p>
         </p:txBody>
       </p:sp>
       <p:sp>
@@ -21920,7 +22580,10 @@
         </p:spPr>
         <p:txBody>
           <a:bodyPr/>
-          <a:p/>
+          <a:p>
+            <a:pPr/>
+            <a:endParaRPr/>
+          </a:p>
         </p:txBody>
       </p:sp>
       <p:sp>
@@ -21946,7 +22609,10 @@
         </p:spPr>
         <p:txBody>
           <a:bodyPr/>
-          <a:p/>
+          <a:p>
+            <a:pPr/>
+            <a:endParaRPr/>
+          </a:p>
         </p:txBody>
       </p:sp>
       <p:sp>
@@ -22047,7 +22713,10 @@
         </p:spPr>
         <p:txBody>
           <a:bodyPr/>
-          <a:p/>
+          <a:p>
+            <a:pPr/>
+            <a:endParaRPr/>
+          </a:p>
         </p:txBody>
       </p:sp>
       <p:sp>
@@ -22073,7 +22742,10 @@
         </p:spPr>
         <p:txBody>
           <a:bodyPr/>
-          <a:p/>
+          <a:p>
+            <a:pPr/>
+            <a:endParaRPr/>
+          </a:p>
         </p:txBody>
       </p:sp>
       <p:sp>
@@ -22174,7 +22846,10 @@
         </p:spPr>
         <p:txBody>
           <a:bodyPr/>
-          <a:p/>
+          <a:p>
+            <a:pPr/>
+            <a:endParaRPr/>
+          </a:p>
         </p:txBody>
       </p:sp>
       <p:sp>
@@ -22200,7 +22875,10 @@
         </p:spPr>
         <p:txBody>
           <a:bodyPr/>
-          <a:p/>
+          <a:p>
+            <a:pPr/>
+            <a:endParaRPr/>
+          </a:p>
         </p:txBody>
       </p:sp>
       <p:sp>
@@ -22353,7 +23031,7 @@
   <p:cSld>
     <p:spTree>
       <p:nvGrpSpPr>
-        <p:cNvPr id="610" name="" descr="&lt;Slide style={{ background: '#FFFFFF', padding: 0 }}&gt;&#10;  &lt;Box style={{ height: 72, background: '#1E4FA8', padding: '0 40px', flexDirection: 'row', alignItems: 'center', justifyContent: 'space-between' }}&gt;&#10;    &lt;Text style={{ fontSize: 15, color: '#B9CDF0', letterSpacing: 1 }}&gt;ISAD · INFORMATION SYSTEMS ANALYSIS &amp;amp; DESIGN&lt;/Text&gt;&#10;    &lt;Text style={{ fontSize: 15, color: '#B9CDF0' }}&gt;W03 · LAB&lt;/Text&gt;&#10;  &lt;/Box&gt;&#10;  &lt;Box style={{ padding: '12px 40px 0 40px', flexDirection: 'row', alignItems: 'center', justifyContent: 'space-between' }}&gt;&#10;    &lt;Text style={{ fontSize: 30, fontWeight: 'bold', color: '#0E3F8C' }}&gt;Exercise 3.1 — Answers&lt;/Text&gt;&#10;    &lt;Text style={{ fontSize: 14, color: '#1E4FA8', fontWeight: 'bold' }}&gt;33 / 38&lt;/Text&gt;&#10;  &lt;/Box&gt;&#10;  &lt;Box style={{ flex: 1, padding: '6px 40px 2px 40px' }}&gt;&#10;    &lt;Table&#10;      style={{ width: '100%', height: '100%' }}&#10;      defaultTextStyle={{ fontSize: 13.5, textAlign: 'left', color: '#1A2230' }}&#10;      defaultCellStyle={{&#10;        border: {&#10;          left: { width: 1, color: '#E5E7EB' },&#10;          right: { width: 1, color: '#E5E7EB' },&#10;          top: { width: 1, color: '#E5E7EB' },&#10;          bottom: { width: 1, color: '#E5E7EB' },&#10;        },&#10;      }}&#10;      cells={[&#10;        [&#10;          { text: 'Fragment', textStyle: { bold: true, color: '#FFFFFF', textAlign: 'left' }, cellStyle: { background: { color: '#0E3F8C' } } },&#10;          { text: 'Diagram', textStyle: { bold: true, color: '#FFFFFF', textAlign: 'left' }, cellStyle: { background: { color: '#1E4FA8' } } },&#10;          { text: 'The question it answers', textStyle: { bold: true, color: '#FFFFFF', textAlign: 'left' }, cellStyle: { background: { color: '#3D7BD9' } } },&#10;        ],&#10;        [&#10;          { text: 'A', textStyle: { bold: true, color: '#0E3F8C' }, cellStyle: { background: { color: '#F7F9FC' } } },&#10;          { text: 'Use case', textStyle: { color: '#4A5568' }, cellStyle: { background: { color: '#F7F9FC' } } },&#10;          { text: 'What does the system do, and for whom?', textStyle: { color: '#4A5568' }, cellStyle: { background: { color: '#F7F9FC' } } },&#10;        ],&#10;        [&#10;          { text: 'B', textStyle: { bold: true, color: '#0E3F8C' } },&#10;          { text: 'Class (domain model)', textStyle: { color: '#4A5568' } },&#10;          { text: 'Which concepts exist, and how many of each?', textStyle: { color: '#4A5568' } },&#10;        ],&#10;        [&#10;          { text: 'C', textStyle: { bold: true, color: '#0E3F8C' }, cellStyle: { background: { color: '#F7F9FC' } } },&#10;          { text: 'Sequence', textStyle: { color: '#4A5568' }, cellStyle: { background: { color: '#F7F9FC' } } },&#10;          { text: 'Who sends which message to whom, in what order?', textStyle: { color: '#4A5568' }, cellStyle: { background: { color: '#F7F9FC' } } },&#10;        ],&#10;        [&#10;          { text: 'D', textStyle: { bold: true, color: '#0E3F8C' } },&#10;          { text: 'State machine', textStyle: { color: '#4A5568' } },&#10;          { text: 'What can happen to this one object over time?', textStyle: { color: '#4A5568' } },&#10;        ],&#10;        [&#10;          { text: 'E', textStyle: { bold: true, color: '#0E3F8C' }, cellStyle: { background: { color: '#F7F9FC' } } },&#10;          { text: 'Activity', textStyle: { color: '#4A5568' }, cellStyle: { background: { color: '#F7F9FC' } } },&#10;          { text: 'What are the steps, and which can run at the same time?', textStyle: { color: '#4A5568' }, cellStyle: { background: { color: '#F7F9FC' } } },&#10;        ],&#10;        [&#10;          { text: 'F', textStyle: { bold: true, color: '#0E3F8C' } },&#10;          { text: 'Package', textStyle: { color: '#4A5568' } },&#10;          { text: 'How is the system cut into parts?', textStyle: { color: '#4A5568' } },&#10;        ],&#10;      ]}&#10;    /&gt;&#10;  &lt;/Box&gt;&#10;  &lt;Box style={{ height: 44, padding: '0 40px', flexDirection: 'row', alignItems: 'center', gap: 16, background: '#FDF3F3' }}&gt;&#10;    &lt;FAIcon name='triangle-exclamation' style={{ fill: '#D9534F', width: 19, height: 19 }} /&gt;&#10;    &lt;Text style={{ fontSize: 13.5, color: '#4A5568', lineHeight: 1.4 }}&gt;&#10;      &lt;Text style={{ fontWeight: 'bold', color: '#D9534F' }}&gt;D and E are the ones people mix up.&lt;/Text&gt; Labelled arrows between rounded boxes make it a state machine; an activity diagram labels the boxes themselves.&#10;    &lt;/Text&gt;&#10;  &lt;/Box&gt;&#10;&lt;/Slide&gt;"/>
+        <p:cNvPr id="610" name=""/>
         <p:cNvGrpSpPr/>
         <p:nvPr/>
       </p:nvGrpSpPr>
@@ -22386,7 +23064,10 @@
         </p:spPr>
         <p:txBody>
           <a:bodyPr/>
-          <a:p/>
+          <a:p>
+            <a:pPr/>
+            <a:endParaRPr/>
+          </a:p>
         </p:txBody>
       </p:sp>
       <p:sp>
@@ -22410,7 +23091,10 @@
         </p:spPr>
         <p:txBody>
           <a:bodyPr/>
-          <a:p/>
+          <a:p>
+            <a:pPr/>
+            <a:endParaRPr/>
+          </a:p>
         </p:txBody>
       </p:sp>
       <p:sp>
@@ -23518,7 +24202,10 @@
         </p:spPr>
         <p:txBody>
           <a:bodyPr/>
-          <a:p/>
+          <a:p>
+            <a:pPr/>
+            <a:endParaRPr/>
+          </a:p>
         </p:txBody>
       </p:sp>
       <p:pic>
@@ -23607,7 +24294,7 @@
   <p:cSld>
     <p:spTree>
       <p:nvGrpSpPr>
-        <p:cNvPr id="621" name="" descr="&lt;Slide style={{ background: '#FFFFFF', padding: 0 }}&gt;&#10;  &lt;Box style={{ height: 72, background: '#1E4FA8', padding: '0 40px', flexDirection: 'row', alignItems: 'center', justifyContent: 'space-between' }}&gt;&#10;    &lt;Text style={{ fontSize: 15, color: '#B9CDF0', letterSpacing: 1 }}&gt;ISAD · INFORMATION SYSTEMS ANALYSIS &amp;amp; DESIGN&lt;/Text&gt;&#10;    &lt;Text style={{ fontSize: 15, color: '#B9CDF0' }}&gt;W03 · LAB&lt;/Text&gt;&#10;  &lt;/Box&gt;&#10;  &lt;Box style={{ padding: '14px 40px 0 40px', flexDirection: 'row', alignItems: 'center', justifyContent: 'space-between' }}&gt;&#10;    &lt;Text style={{ fontSize: 30, fontWeight: 'bold', color: '#0E3F8C' }}&gt;Exercise 3.2 — Library Model&lt;/Text&gt;&#10;    &lt;Text style={{ fontSize: 14, color: '#1E4FA8', fontWeight: 'bold' }}&gt;34 / 38&lt;/Text&gt;&#10;  &lt;/Box&gt;&#10;  &lt;Box style={{ flex: 1, padding: '8px 40px 0 40px', flexDirection: 'row', gap: 26 }}&gt;&#10;    &lt;Box style={{ flex: 5, justifyContent: 'center' }}&gt;&#10;      &lt;CodeBlock theme='one-dark-pro' code={`@startuml&#10;class Library {&#10;  - name : String&#10;  + addBook(b : Book) : void&#10;}&#10;&#10;class Book {&#10;  - isbn : String&#10;  + isAvailable() : boolean&#10;}&#10;&#10;class Member {&#10;  - name : String&#10;  + borrow(b : Book) : void&#10;}&#10;&#10;' TODO 1  Library holds Books -- a&#10;'         composition. One library,&#10;'         many books. Fill the ???&#10;Library &quot;1&quot; *-- &quot;???&quot; Book : holds&#10;&#10;' TODO 2  A Member may hold zero or more&#10;'         Books. A plain link, no diamond.&#10;Member &quot;???&quot; -- &quot;???&quot; Book : borrows&#10;@enduml`} language='text' width={600} fontSize={11.5} /&gt;&#10;    &lt;/Box&gt;&#10;    &lt;Box style={{ flex: 4, flexDirection: 'column', gap: 9, justifyContent: 'center' }}&gt;&#10;      &lt;Box style={{ padding: '13px 16px', background: '#F0F5FC', borderRadius: 10, borderLeft: '4px solid #1E4FA8' }}&gt;&#10;        &lt;Text style={{ fontSize: 16, fontWeight: 'bold', color: '#0E3F8C', lineHeight: 1.4 }}&gt;Fill in the two question marks — and be ready to defend each number.&lt;/Text&gt;&#10;      &lt;/Box&gt;&#10;      {[&#10;        ['list-ol', 'Work in pairs, one file', 'Pair on the keyboard, not on the conversation. The driver types; the navigator argues about multiplicities.'],&#10;        ['comments', 'A comment is allowed', 'Use a line starting with an apostrophe to record the decision you could not settle. That is worth marks.'],&#10;        ['eye', 'Render before you submit', 'A .puml file that does not render is not a model. Check it in VS Code or on the web renderer first.'],&#10;      ].map(([icon, t, d]) =&gt; (&#10;        &lt;Box key={t} style={{ flexDirection: 'row', gap: 12, alignItems: 'flex-start', padding: '11px 14px', background: '#F7F9FC', borderRadius: 10, border: '1px solid #E5E7EB' }}&gt;&#10;          &lt;Box style={{ width: 33, height: 33, borderRadius: 9, background: '#E8EFF8', justifyContent: 'center', alignItems: 'center' }}&gt;&#10;            &lt;FAIcon name={icon} style={{ fill: '#1E4FA8', width: 16, height: 16 }} /&gt;&#10;          &lt;/Box&gt;&#10;          &lt;Box style={{ flex: 1, flexDirection: 'column', gap: 2 }}&gt;&#10;            &lt;Text style={{ fontSize: 14.5, fontWeight: 'bold', color: '#0E3F8C' }}&gt;{t}&lt;/Text&gt;&#10;            &lt;Text style={{ fontSize: 13, color: '#4A5568', lineHeight: 1.4 }}&gt;{d}&lt;/Text&gt;&#10;          &lt;/Box&gt;&#10;        &lt;/Box&gt;&#10;      ))}&#10;      &lt;Box style={{ padding: '10px 14px', background: '#FFFFFF', borderRadius: 9, border: '1px dashed #D6DCE5' }}&gt;&#10;        &lt;Text style={{ fontSize: 12.5, color: '#8B97A8', lineHeight: 1.45 }}&gt;Submit &lt;Text style={{ fontWeight: 'bold', color: '#0E3F8C' }}&gt;library.puml&lt;/Text&gt; plus the exported PNG, in &lt;Text style={{ fontWeight: 'bold', color: '#0E3F8C' }}&gt;docs/diagrams/&lt;/Text&gt;. Twenty-five minutes.&lt;/Text&gt;&#10;      &lt;/Box&gt;&#10;    &lt;/Box&gt;&#10;  &lt;/Box&gt;&#10;  &lt;Box style={{ height: 34, padding: '0 40px', flexDirection: 'row', alignItems: 'center', justifyContent: 'space-between' }}&gt;&#10;    &lt;Text style={{ fontSize: 13, color: '#8B97A8' }}&gt;ISAD · Fall 2026&lt;/Text&gt;&#10;    &lt;Text style={{ fontSize: 14, color: '#1E4FA8', fontWeight: 'bold' }}&gt;34 / 38&lt;/Text&gt;&#10;  &lt;/Box&gt;&#10;&lt;/Slide&gt;"/>
+        <p:cNvPr id="621" name=""/>
         <p:cNvGrpSpPr/>
         <p:nvPr/>
       </p:nvGrpSpPr>
@@ -23640,7 +24327,10 @@
         </p:spPr>
         <p:txBody>
           <a:bodyPr/>
-          <a:p/>
+          <a:p>
+            <a:pPr/>
+            <a:endParaRPr/>
+          </a:p>
         </p:txBody>
       </p:sp>
       <p:sp>
@@ -23664,7 +24354,10 @@
         </p:spPr>
         <p:txBody>
           <a:bodyPr/>
-          <a:p/>
+          <a:p>
+            <a:pPr/>
+            <a:endParaRPr/>
+          </a:p>
         </p:txBody>
       </p:sp>
       <p:sp>
@@ -23830,7 +24523,10 @@
         </p:spPr>
         <p:txBody>
           <a:bodyPr/>
-          <a:p/>
+          <a:p>
+            <a:pPr/>
+            <a:endParaRPr/>
+          </a:p>
         </p:txBody>
       </p:sp>
       <p:sp>
@@ -23887,7 +24583,10 @@
         </p:spPr>
         <p:txBody>
           <a:bodyPr/>
-          <a:p/>
+          <a:p>
+            <a:pPr/>
+            <a:endParaRPr/>
+          </a:p>
         </p:txBody>
       </p:sp>
       <p:sp>
@@ -23955,7 +24654,10 @@
         </p:spPr>
         <p:txBody>
           <a:bodyPr/>
-          <a:p/>
+          <a:p>
+            <a:pPr/>
+            <a:endParaRPr/>
+          </a:p>
         </p:txBody>
       </p:sp>
       <p:sp>
@@ -23981,7 +24683,10 @@
         </p:spPr>
         <p:txBody>
           <a:bodyPr/>
-          <a:p/>
+          <a:p>
+            <a:pPr/>
+            <a:endParaRPr/>
+          </a:p>
         </p:txBody>
       </p:sp>
       <p:pic>
@@ -24115,7 +24820,10 @@
         </p:spPr>
         <p:txBody>
           <a:bodyPr/>
-          <a:p/>
+          <a:p>
+            <a:pPr/>
+            <a:endParaRPr/>
+          </a:p>
         </p:txBody>
       </p:sp>
       <p:sp>
@@ -24141,7 +24849,10 @@
         </p:spPr>
         <p:txBody>
           <a:bodyPr/>
-          <a:p/>
+          <a:p>
+            <a:pPr/>
+            <a:endParaRPr/>
+          </a:p>
         </p:txBody>
       </p:sp>
       <p:pic>
@@ -24275,7 +24986,10 @@
         </p:spPr>
         <p:txBody>
           <a:bodyPr/>
-          <a:p/>
+          <a:p>
+            <a:pPr/>
+            <a:endParaRPr/>
+          </a:p>
         </p:txBody>
       </p:sp>
       <p:sp>
@@ -24301,7 +25015,10 @@
         </p:spPr>
         <p:txBody>
           <a:bodyPr/>
-          <a:p/>
+          <a:p>
+            <a:pPr/>
+            <a:endParaRPr/>
+          </a:p>
         </p:txBody>
       </p:sp>
       <p:pic>
@@ -24435,7 +25152,10 @@
         </p:spPr>
         <p:txBody>
           <a:bodyPr/>
-          <a:p/>
+          <a:p>
+            <a:pPr/>
+            <a:endParaRPr/>
+          </a:p>
         </p:txBody>
       </p:sp>
       <p:sp>
@@ -24606,7 +25326,10 @@
         </p:spPr>
         <p:txBody>
           <a:bodyPr/>
-          <a:p/>
+          <a:p>
+            <a:pPr/>
+            <a:endParaRPr/>
+          </a:p>
         </p:txBody>
       </p:sp>
       <p:sp>
@@ -24672,7 +25395,7 @@
   <p:cSld>
     <p:spTree>
       <p:nvGrpSpPr>
-        <p:cNvPr id="652" name="" descr="&lt;Slide style={{ background: '#FFFFFF', padding: 0 }}&gt;&#10;  &lt;Box style={{ height: 72, background: '#1E4FA8', padding: '0 40px', flexDirection: 'row', alignItems: 'center', justifyContent: 'space-between' }}&gt;&#10;    &lt;Text style={{ fontSize: 15, color: '#B9CDF0', letterSpacing: 1 }}&gt;ISAD · INFORMATION SYSTEMS ANALYSIS &amp;amp; DESIGN&lt;/Text&gt;&#10;    &lt;Text style={{ fontSize: 15, color: '#B9CDF0' }}&gt;W03 · LAB&lt;/Text&gt;&#10;  &lt;/Box&gt;&#10;  &lt;Box style={{ padding: '14px 40px 0 40px', flexDirection: 'row', alignItems: 'center', justifyContent: 'space-between' }}&gt;&#10;    &lt;Text style={{ fontSize: 30, fontWeight: 'bold', color: '#0E3F8C' }}&gt;Exercise 3.2 — Reference Solution&lt;/Text&gt;&#10;    &lt;Text style={{ fontSize: 14, color: '#1E4FA8', fontWeight: 'bold' }}&gt;35 / 38&lt;/Text&gt;&#10;  &lt;/Box&gt;&#10;  &lt;Box style={{ flex: 1, padding: '8px 40px 0 40px', flexDirection: 'row', gap: 26 }}&gt;&#10;    &lt;Box style={{ flex: 5, justifyContent: 'center' }}&gt;&#10;      &lt;CodeBlock theme='one-dark-pro' code={`@startuml&#10;class Library {&#10;  - name : String&#10;  + addBook(b : Book) : void&#10;  + findByIsbn(isbn : String) : Book&#10;}&#10;&#10;class Book {&#10;  - isbn : String&#10;  - title : String&#10;  + isAvailable() : boolean&#10;}&#10;&#10;class Member {&#10;  - id : String&#10;  - name : String&#10;  + borrow(b : Book) : void&#10;}&#10;&#10;Library &quot;1&quot; *-- &quot;0..*&quot; Book : holds&#10;Member &quot;0..1&quot; -- &quot;0..*&quot; Book : borrows&#10;@enduml`} language='text' width={600} fontSize={12} /&gt;&#10;    &lt;/Box&gt;&#10;    &lt;Box style={{ flex: 4, flexDirection: 'column', gap: 10, justifyContent: 'center' }}&gt;&#10;      {[&#10;        ['1', '0..* at the Book end', 'A library with no books yet is still a legal library. Writing 1..* here would force a fake Book into every new branch — that is the kind of error that reaches production.'],&#10;        ['2', '0..1 at the Member end', 'The Book side of a loan is optional: a Book on the shelf is borrowed by nobody. Write 1 and no Book can ever sit on a shelf.'],&#10;        ['3', '*-- and not o--', 'Composition says the Books go when the Library record goes. If your pair disagreed, write the disagreement in the README — the argument is the deliverable, not the symbol.'],&#10;      ].map(([n, t, d]) =&gt; (&#10;        &lt;Box key={n} style={{ flexDirection: 'row', gap: 13, alignItems: 'flex-start', padding: '13px 16px', background: '#F7F9FC', borderRadius: 10, border: '1px solid #E5E7EB' }}&gt;&#10;          &lt;Box style={{ width: 28, height: 28, borderRadius: 14, background: '#1E4FA8', justifyContent: 'center', alignItems: 'center' }}&gt;&#10;            &lt;Text style={{ fontSize: 14, fontWeight: 'bold', color: '#FFFFFF' }}&gt;{n}&lt;/Text&gt;&#10;          &lt;/Box&gt;&#10;          &lt;Box style={{ flex: 1, flexDirection: 'column', gap: 3 }}&gt;&#10;            &lt;Text style={{ fontSize: 15, fontWeight: 'bold', color: '#0E3F8C' }}&gt;{t}&lt;/Text&gt;&#10;            &lt;Text style={{ fontSize: 13, color: '#4A5568', lineHeight: 1.45 }}&gt;{d}&lt;/Text&gt;&#10;          &lt;/Box&gt;&#10;        &lt;/Box&gt;&#10;      ))}&#10;      &lt;Box style={{ padding: '12px 16px', background: '#F0F5FC', borderRadius: 9, borderLeft: '4px solid #1E4FA8' }}&gt;&#10;        &lt;Text style={{ fontSize: 13.5, color: '#0E3F8C', lineHeight: 1.5, fontWeight: 'bold' }}&gt;A different answer can be correct. It stops being correct the moment you cannot say why.&lt;/Text&gt;&#10;      &lt;/Box&gt;&#10;    &lt;/Box&gt;&#10;  &lt;/Box&gt;&#10;  &lt;Box style={{ height: 34, padding: '0 40px', flexDirection: 'row', alignItems: 'center', justifyContent: 'space-between' }}&gt;&#10;    &lt;Text style={{ fontSize: 13, color: '#8B97A8' }}&gt;ISAD · Fall 2026&lt;/Text&gt;&#10;    &lt;Text style={{ fontSize: 14, color: '#1E4FA8', fontWeight: 'bold' }}&gt;35 / 38&lt;/Text&gt;&#10;  &lt;/Box&gt;&#10;&lt;/Slide&gt;"/>
+        <p:cNvPr id="652" name=""/>
         <p:cNvGrpSpPr/>
         <p:nvPr/>
       </p:nvGrpSpPr>
@@ -24705,7 +25428,10 @@
         </p:spPr>
         <p:txBody>
           <a:bodyPr/>
-          <a:p/>
+          <a:p>
+            <a:pPr/>
+            <a:endParaRPr/>
+          </a:p>
         </p:txBody>
       </p:sp>
       <p:sp>
@@ -24729,7 +25455,10 @@
         </p:spPr>
         <p:txBody>
           <a:bodyPr/>
-          <a:p/>
+          <a:p>
+            <a:pPr/>
+            <a:endParaRPr/>
+          </a:p>
         </p:txBody>
       </p:sp>
       <p:sp>
@@ -24900,7 +25629,10 @@
         </p:spPr>
         <p:txBody>
           <a:bodyPr/>
-          <a:p/>
+          <a:p>
+            <a:pPr/>
+            <a:endParaRPr/>
+          </a:p>
         </p:txBody>
       </p:sp>
       <p:sp>
@@ -24926,7 +25658,10 @@
         </p:spPr>
         <p:txBody>
           <a:bodyPr/>
-          <a:p/>
+          <a:p>
+            <a:pPr/>
+            <a:endParaRPr/>
+          </a:p>
         </p:txBody>
       </p:sp>
       <p:sp>
@@ -25064,7 +25799,10 @@
         </p:spPr>
         <p:txBody>
           <a:bodyPr/>
-          <a:p/>
+          <a:p>
+            <a:pPr/>
+            <a:endParaRPr/>
+          </a:p>
         </p:txBody>
       </p:sp>
       <p:sp>
@@ -25090,7 +25828,10 @@
         </p:spPr>
         <p:txBody>
           <a:bodyPr/>
-          <a:p/>
+          <a:p>
+            <a:pPr/>
+            <a:endParaRPr/>
+          </a:p>
         </p:txBody>
       </p:sp>
       <p:sp>
@@ -25228,7 +25969,10 @@
         </p:spPr>
         <p:txBody>
           <a:bodyPr/>
-          <a:p/>
+          <a:p>
+            <a:pPr/>
+            <a:endParaRPr/>
+          </a:p>
         </p:txBody>
       </p:sp>
       <p:sp>
@@ -25254,7 +25998,10 @@
         </p:spPr>
         <p:txBody>
           <a:bodyPr/>
-          <a:p/>
+          <a:p>
+            <a:pPr/>
+            <a:endParaRPr/>
+          </a:p>
         </p:txBody>
       </p:sp>
       <p:sp>
@@ -25387,7 +26134,10 @@
         </p:spPr>
         <p:txBody>
           <a:bodyPr/>
-          <a:p/>
+          <a:p>
+            <a:pPr/>
+            <a:endParaRPr/>
+          </a:p>
         </p:txBody>
       </p:sp>
       <p:sp>
@@ -25444,7 +26194,10 @@
         </p:spPr>
         <p:txBody>
           <a:bodyPr/>
-          <a:p/>
+          <a:p>
+            <a:pPr/>
+            <a:endParaRPr/>
+          </a:p>
         </p:txBody>
       </p:sp>
       <p:sp>
@@ -25577,7 +26330,10 @@
         </p:spPr>
         <p:txBody>
           <a:bodyPr/>
-          <a:p/>
+          <a:p>
+            <a:pPr/>
+            <a:endParaRPr/>
+          </a:p>
         </p:txBody>
       </p:sp>
       <p:sp>
@@ -25641,7 +26397,7 @@
   <p:cSld>
     <p:spTree>
       <p:nvGrpSpPr>
-        <p:cNvPr id="681" name="" descr="&lt;Slide style={{ background: '#FFFFFF', padding: 0 }}&gt;&#10;  &lt;Box style={{ height: 72, background: '#1E4FA8', padding: '0 40px', flexDirection: 'row', alignItems: 'center', justifyContent: 'space-between' }}&gt;&#10;    &lt;Text style={{ fontSize: 15, color: '#B9CDF0', letterSpacing: 1 }}&gt;ISAD · INFORMATION SYSTEMS ANALYSIS &amp;amp; DESIGN&lt;/Text&gt;&#10;    &lt;Text style={{ fontSize: 15, color: '#B9CDF0' }}&gt;W03 · LAB&lt;/Text&gt;&#10;  &lt;/Box&gt;&#10;  &lt;Box style={{ padding: '16px 40px 0 40px', flexDirection: 'row', alignItems: 'center', justifyContent: 'space-between' }}&gt;&#10;    &lt;Text style={{ fontSize: 30, fontWeight: 'bold', color: '#0E3F8C' }}&gt;Team Setup Checklist&lt;/Text&gt;&#10;    &lt;Text style={{ fontSize: 14, color: '#1E4FA8', fontWeight: 'bold' }}&gt;36 / 38&lt;/Text&gt;&#10;  &lt;/Box&gt;&#10;  &lt;Box style={{ flex: 1, padding: '12px 40px 0 40px', flexDirection: 'row', gap: 26 }}&gt;&#10;    &lt;Box style={{ flex: 5, flexDirection: 'column', gap: 9, justifyContent: 'center' }}&gt;&#10;      {[&#10;        { t: 'draw.io can open, edit and export', d: 'Prove it: draw one class box, save the .drawio file, export a PNG, and check both files exist on disk.', w: 'two minutes' },&#10;        { t: 'PlantUML renders on your machine', d: 'Prove it: paste the Exercise 3.2 solution into a .puml file and see a picture. Extension or web renderer, either is fine.', w: 'five minutes' },&#10;        { t: 'docs/diagrams/ exists in the team repo', d: 'Commit an empty .gitkeep if the folder has nothing in it yet. The path must be right before M1, not during it.', w: 'two minutes' },&#10;        { t: 'The conventions document is committed', d: 'Naming, colour, decision line, export rule, ownership table. Copy the six rules from slide 30 and make them yours.', w: 'ten minutes' },&#10;        { t: 'Every member has pushed one commit', d: 'Not the Lead — everyone. If only one person has commits, the other two are invisible in the contribution review.', w: 'today' },&#10;      ].map((c) =&gt; (&#10;        &lt;Box key={c.t} style={{ flexDirection: 'row', gap: 14, alignItems: 'flex-start', padding: '12px 16px', background: '#F7F9FC', borderRadius: 10, border: '1px solid #E5E7EB' }}&gt;&#10;          &lt;Box style={{ width: 26, height: 26, borderRadius: 6, border: '2px solid #1E4FA8', justifyContent: 'center', alignItems: 'center', marginTop: 2 }} /&gt;&#10;          &lt;Box style={{ flex: 1, flexDirection: 'column', gap: 3 }}&gt;&#10;            &lt;Box style={{ flexDirection: 'row', alignItems: 'center', gap: 10 }}&gt;&#10;              &lt;Text style={{ flex: 1, fontSize: 15.5, fontWeight: 'bold', color: '#0E3F8C' }}&gt;{c.t}&lt;/Text&gt;&#10;              &lt;Box style={{ padding: '2px 9px', background: '#E8EFF8', borderRadius: 10 }}&gt;&#10;                &lt;Text style={{ fontSize: 11.5, color: '#1E4FA8', fontWeight: 'bold' }}&gt;{c.w}&lt;/Text&gt;&#10;              &lt;/Box&gt;&#10;            &lt;/Box&gt;&#10;            &lt;Text style={{ fontSize: 13, color: '#4A5568', lineHeight: 1.45 }}&gt;{c.d}&lt;/Text&gt;&#10;          &lt;/Box&gt;&#10;        &lt;/Box&gt;&#10;      ))}&#10;    &lt;/Box&gt;&#10;    &lt;Box style={{ flex: 4, flexDirection: 'column', gap: 12, justifyContent: 'center' }}&gt;&#10;      &lt;Box style={{ padding: '18px 20px', background: '#0E3F8C', borderRadius: 12, flexDirection: 'column', gap: 8 }}&gt;&#10;        &lt;FAIcon name='flag-checkered' style={{ fill: '#FFC107', width: 26, height: 26 }} /&gt;&#10;        &lt;Text style={{ fontSize: 19, fontWeight: 'bold', color: '#FFFFFF', lineHeight: 1.35 }}&gt;M1 lands on Sun Oct 4&lt;/Text&gt;&#10;        &lt;Text style={{ fontSize: 14.5, color: '#C5D4EA', lineHeight: 1.55 }}&gt;It asks for a use-case diagram and two written specifications. The toolchain you finish today is the one you will submit with — there is no second chance to install it on Oct 3.&lt;/Text&gt;&#10;      &lt;/Box&gt;&#10;      &lt;Box style={{ padding: '16px 18px', background: '#F7F9FC', borderRadius: 10, border: '1px solid #E5E7EB', flexDirection: 'column', gap: 6 }}&gt;&#10;        &lt;Text style={{ fontSize: 15, fontWeight: 'bold', color: '#0E3F8C' }}&gt;Week 03 carries no deliverable&lt;/Text&gt;&#10;        &lt;Text style={{ fontSize: 13.5, color: '#4A5568', lineHeight: 1.5 }}&gt;That is deliberate. It is the breathing room before the requirements pack lands in Week 04 — use it to make the pipeline boring.&lt;/Text&gt;&#10;      &lt;/Box&gt;&#10;      &lt;Box style={{ padding: '14px 16px', background: '#FDF3F3', borderRadius: 10, borderLeft: '4px solid #D9534F' }}&gt;&#10;        &lt;Text style={{ fontSize: 13.5, color: '#4A5568', lineHeight: 1.5 }}&gt;&lt;Text style={{ fontWeight: 'bold', color: '#D9534F' }}&gt;Nothing is submitted until the tag is pushed.&lt;/Text&gt; A commit on Sunday night is not a submission. Full protocol: Deadline Schedule §4.&lt;/Text&gt;&#10;      &lt;/Box&gt;&#10;    &lt;/Box&gt;&#10;  &lt;/Box&gt;&#10;  &lt;Box style={{ height: 38, padding: '0 40px', flexDirection: 'row', alignItems: 'center', justifyContent: 'space-between' }}&gt;&#10;    &lt;Text style={{ fontSize: 13, color: '#8B97A8' }}&gt;ISAD · Fall 2026&lt;/Text&gt;&#10;    &lt;Text style={{ fontSize: 14, color: '#1E4FA8', fontWeight: 'bold' }}&gt;36 / 38&lt;/Text&gt;&#10;  &lt;/Box&gt;&#10;&lt;/Slide&gt;"/>
+        <p:cNvPr id="681" name=""/>
         <p:cNvGrpSpPr/>
         <p:nvPr/>
       </p:nvGrpSpPr>
@@ -25674,7 +26430,10 @@
         </p:spPr>
         <p:txBody>
           <a:bodyPr/>
-          <a:p/>
+          <a:p>
+            <a:pPr/>
+            <a:endParaRPr/>
+          </a:p>
         </p:txBody>
       </p:sp>
       <p:sp>
@@ -25698,7 +26457,10 @@
         </p:spPr>
         <p:txBody>
           <a:bodyPr/>
-          <a:p/>
+          <a:p>
+            <a:pPr/>
+            <a:endParaRPr/>
+          </a:p>
         </p:txBody>
       </p:sp>
       <p:sp>
@@ -25869,7 +26631,10 @@
         </p:spPr>
         <p:txBody>
           <a:bodyPr/>
-          <a:p/>
+          <a:p>
+            <a:pPr/>
+            <a:endParaRPr/>
+          </a:p>
         </p:txBody>
       </p:sp>
       <p:sp>
@@ -25897,7 +26662,10 @@
         </p:spPr>
         <p:txBody>
           <a:bodyPr/>
-          <a:p/>
+          <a:p>
+            <a:pPr/>
+            <a:endParaRPr/>
+          </a:p>
         </p:txBody>
       </p:sp>
       <p:sp>
@@ -25958,7 +26726,10 @@
         </p:spPr>
         <p:txBody>
           <a:bodyPr/>
-          <a:p/>
+          <a:p>
+            <a:pPr/>
+            <a:endParaRPr/>
+          </a:p>
         </p:txBody>
       </p:sp>
       <p:sp>
@@ -26059,7 +26830,10 @@
         </p:spPr>
         <p:txBody>
           <a:bodyPr/>
-          <a:p/>
+          <a:p>
+            <a:pPr/>
+            <a:endParaRPr/>
+          </a:p>
         </p:txBody>
       </p:sp>
       <p:sp>
@@ -26087,7 +26861,10 @@
         </p:spPr>
         <p:txBody>
           <a:bodyPr/>
-          <a:p/>
+          <a:p>
+            <a:pPr/>
+            <a:endParaRPr/>
+          </a:p>
         </p:txBody>
       </p:sp>
       <p:sp>
@@ -26148,7 +26925,10 @@
         </p:spPr>
         <p:txBody>
           <a:bodyPr/>
-          <a:p/>
+          <a:p>
+            <a:pPr/>
+            <a:endParaRPr/>
+          </a:p>
         </p:txBody>
       </p:sp>
       <p:sp>
@@ -26251,7 +27031,10 @@
         </p:spPr>
         <p:txBody>
           <a:bodyPr/>
-          <a:p/>
+          <a:p>
+            <a:pPr/>
+            <a:endParaRPr/>
+          </a:p>
         </p:txBody>
       </p:sp>
       <p:sp>
@@ -26279,7 +27062,10 @@
         </p:spPr>
         <p:txBody>
           <a:bodyPr/>
-          <a:p/>
+          <a:p>
+            <a:pPr/>
+            <a:endParaRPr/>
+          </a:p>
         </p:txBody>
       </p:sp>
       <p:sp>
@@ -26340,7 +27126,10 @@
         </p:spPr>
         <p:txBody>
           <a:bodyPr/>
-          <a:p/>
+          <a:p>
+            <a:pPr/>
+            <a:endParaRPr/>
+          </a:p>
         </p:txBody>
       </p:sp>
       <p:sp>
@@ -26443,7 +27232,10 @@
         </p:spPr>
         <p:txBody>
           <a:bodyPr/>
-          <a:p/>
+          <a:p>
+            <a:pPr/>
+            <a:endParaRPr/>
+          </a:p>
         </p:txBody>
       </p:sp>
       <p:sp>
@@ -26471,7 +27263,10 @@
         </p:spPr>
         <p:txBody>
           <a:bodyPr/>
-          <a:p/>
+          <a:p>
+            <a:pPr/>
+            <a:endParaRPr/>
+          </a:p>
         </p:txBody>
       </p:sp>
       <p:sp>
@@ -26532,7 +27327,10 @@
         </p:spPr>
         <p:txBody>
           <a:bodyPr/>
-          <a:p/>
+          <a:p>
+            <a:pPr/>
+            <a:endParaRPr/>
+          </a:p>
         </p:txBody>
       </p:sp>
       <p:sp>
@@ -26635,7 +27433,10 @@
         </p:spPr>
         <p:txBody>
           <a:bodyPr/>
-          <a:p/>
+          <a:p>
+            <a:pPr/>
+            <a:endParaRPr/>
+          </a:p>
         </p:txBody>
       </p:sp>
       <p:sp>
@@ -26663,7 +27464,10 @@
         </p:spPr>
         <p:txBody>
           <a:bodyPr/>
-          <a:p/>
+          <a:p>
+            <a:pPr/>
+            <a:endParaRPr/>
+          </a:p>
         </p:txBody>
       </p:sp>
       <p:sp>
@@ -26724,7 +27528,10 @@
         </p:spPr>
         <p:txBody>
           <a:bodyPr/>
-          <a:p/>
+          <a:p>
+            <a:pPr/>
+            <a:endParaRPr/>
+          </a:p>
         </p:txBody>
       </p:sp>
       <p:sp>
@@ -26793,7 +27600,7 @@
                 <a:latin typeface="Microsoft YaHei"/>
                 <a:ea typeface="Microsoft YaHei"/>
               </a:rPr>
-              <a:t>Not the Lead — everyone. If only one person has commits, the other two are invisible in the contribution review.</a:t>
+              <a:t>Not the Lead — everyone. If only one person has commits, the other three are invisible in the contribution review.</a:t>
             </a:r>
             <a:endParaRPr/>
           </a:p>
@@ -26822,7 +27629,10 @@
         </p:spPr>
         <p:txBody>
           <a:bodyPr/>
-          <a:p/>
+          <a:p>
+            <a:pPr/>
+            <a:endParaRPr/>
+          </a:p>
         </p:txBody>
       </p:sp>
       <p:pic>
@@ -26956,7 +27766,10 @@
         </p:spPr>
         <p:txBody>
           <a:bodyPr/>
-          <a:p/>
+          <a:p>
+            <a:pPr/>
+            <a:endParaRPr/>
+          </a:p>
         </p:txBody>
       </p:sp>
       <p:sp>
@@ -27054,7 +27867,10 @@
         </p:spPr>
         <p:txBody>
           <a:bodyPr/>
-          <a:p/>
+          <a:p>
+            <a:pPr/>
+            <a:endParaRPr/>
+          </a:p>
         </p:txBody>
       </p:sp>
       <p:sp>
@@ -27111,7 +27927,10 @@
         </p:spPr>
         <p:txBody>
           <a:bodyPr/>
-          <a:p/>
+          <a:p>
+            <a:pPr/>
+            <a:endParaRPr/>
+          </a:p>
         </p:txBody>
       </p:sp>
       <p:sp>
@@ -27241,7 +28060,7 @@
   <p:cSld>
     <p:spTree>
       <p:nvGrpSpPr>
-        <p:cNvPr id="730" name="" descr="&lt;Slide style={{ background: '#FFFFFF', padding: 0 }}&gt;&#10;  &lt;Box style={{ padding: '22px 40px 4px 40px', flexDirection: 'row', alignItems: 'center', justifyContent: 'space-between' }}&gt;&#10;    &lt;Text style={{ fontSize: 32, fontWeight: 'bold', color: '#0E3F8C' }}&gt;Homework&lt;/Text&gt;&#10;    &lt;Text style={{ fontSize: 14, color: '#1E4FA8', fontWeight: 'bold' }}&gt;37 / 38&lt;/Text&gt;&#10;  &lt;/Box&gt;&#10;  &lt;Box style={{ flex: 1, padding: '10px 40px 0 40px', flexDirection: 'row', gap: 24 }}&gt;&#10;    &lt;Box style={{ flex: 5, flexDirection: 'column', gap: 11, justifyContent: 'center' }}&gt;&#10;      {[&#10;        {&#10;          i: 'code',&#10;          tag: 'PLANTUML',&#10;          t: 'Reproduce two diagrams from their text specs',&#10;          d: 'The specs are on the course site under Week 03: a four-class CampusBites domain sketch, and the Order state machine from slide 24. Commit both .puml files with their exported PNGs.',&#10;          due: 'Before the Week 04 class',&#10;        },&#10;        {&#10;          i: 'book-open',&#10;          tag: 'READING',&#10;          t: 'Fowler, UML Distilled — class and sequence chapters',&#10;          d: 'A skim is enough. Come back with one thing you disagree with, or one notation you had not met. We start Week 04 by collecting them.',&#10;          due: 'Before the Week 04 class',&#10;        },&#10;        {&#10;          i: 'folder-tree',&#10;          tag: 'PROJECT',&#10;          t: 'Create the team diagrams folder and commit the conventions',&#10;          d: 'docs/diagrams/ in the team repository, plus the six conventions from slide 30 written into a README. Every member should appear in the ownership table.',&#10;          due: 'End of this week',&#10;        },&#10;      ].map((h) =&gt; (&#10;        &lt;Box key={h.t} style={{ flexDirection: 'row', gap: 15, alignItems: 'flex-start', padding: '15px 18px', background: '#F7F9FC', borderRadius: 11, border: '1px solid #E5E7EB' }}&gt;&#10;          &lt;Box style={{ width: 42, height: 42, borderRadius: 10, background: '#E8EFF8', justifyContent: 'center', alignItems: 'center' }}&gt;&#10;            &lt;FAIcon name={h.i} style={{ fill: '#1E4FA8', width: 19, height: 19 }} /&gt;&#10;          &lt;/Box&gt;&#10;          &lt;Box style={{ flex: 1, flexDirection: 'column', gap: 4 }}&gt;&#10;            &lt;Box style={{ flexDirection: 'row', alignItems: 'center', gap: 10 }}&gt;&#10;              &lt;Box style={{ padding: '2px 9px', background: '#0E3F8C', borderRadius: 9 }}&gt;&#10;                &lt;Text style={{ fontSize: 11, color: '#FFFFFF', fontWeight: 'bold', letterSpacing: 1 }}&gt;{h.tag}&lt;/Text&gt;&#10;              &lt;/Box&gt;&#10;              &lt;Text style={{ fontSize: 12.5, color: '#8B97A8' }}&gt;{h.due}&lt;/Text&gt;&#10;            &lt;/Box&gt;&#10;            &lt;Text style={{ fontSize: 16.5, fontWeight: 'bold', color: '#0E3F8C', lineHeight: 1.35 }}&gt;{h.t}&lt;/Text&gt;&#10;            &lt;Text style={{ fontSize: 13.5, color: '#4A5568', lineHeight: 1.5 }}&gt;{h.d}&lt;/Text&gt;&#10;          &lt;/Box&gt;&#10;        &lt;/Box&gt;&#10;      ))}&#10;    &lt;/Box&gt;&#10;    &lt;Box style={{ flex: 4, flexDirection: 'column', gap: 12, justifyContent: 'center' }}&gt;&#10;      &lt;Box style={{ padding: '18px 20px', background: '#0E3F8C', borderRadius: 12, flexDirection: 'column', gap: 8 }}&gt;&#10;        &lt;Text style={{ fontSize: 17, fontWeight: 'bold', color: '#FFFFFF' }}&gt;Why the reading is not optional homework filler&lt;/Text&gt;&#10;        &lt;Text style={{ fontSize: 14, color: '#C5D4EA', lineHeight: 1.55 }}&gt;Fowler writes in short, opinionated chapters and tells you which 20% of UML is worth your time. That is exactly the argument this lecture has been making — and he makes it in better English than I do.&lt;/Text&gt;&#10;      &lt;/Box&gt;&#10;      &lt;Box style={{ padding: '15px 18px', background: '#F0F5FC', borderRadius: 10, borderLeft: '4px solid #1E4FA8' }}&gt;&#10;        &lt;Text style={{ fontSize: 14, color: '#0E3F8C', lineHeight: 1.55, fontWeight: 'bold' }}&gt;The two PlantUML files count towards your individual contribution. Commit them from your own account, in your own words — even if the pair shared the keyboard.&lt;/Text&gt;&#10;      &lt;/Box&gt;&#10;      &lt;Box style={{ padding: '14px 16px', background: '#FFFFFF', borderRadius: 9, border: '1px dashed #D6DCE5' }}&gt;&#10;        &lt;Text style={{ fontSize: 13, color: '#8B97A8', lineHeight: 1.5 }}&gt;Stuck on syntax? plantuml.com/plantuml renders any snippet in the browser and shows the error inline. Use it, do not fight the extension.&lt;/Text&gt;&#10;      &lt;/Box&gt;&#10;    &lt;/Box&gt;&#10;  &lt;/Box&gt;&#10;  &lt;Box style={{ height: 42, background: '#0E3F8C', padding: '0 40px', flexDirection: 'row', alignItems: 'center', justifyContent: 'center' }}&gt;&#10;    &lt;Text style={{ fontSize: 16.5, color: '#FFFFFF', fontWeight: '600' }}&gt;Next week the requirements pack lands — and the use case stops being a picture and becomes a specification.&lt;/Text&gt;&#10;  &lt;/Box&gt;&#10;&lt;/Slide&gt;"/>
+        <p:cNvPr id="730" name="" descr="&lt;Slide style={{ background: '#FFFFFF', padding: 0 }}&gt;&#10;  &lt;Box style={{ padding: '22px 40px 4px 40px', flexDirection: 'row', alignItems: 'center', justifyContent: 'space-between' }}&gt;&#10;    &lt;Text style={{ fontSize: 32, fontWeight: 'bold', color: '#0E3F8C' }}&gt;Homework&lt;/Text&gt;&#10;    &lt;Text style={{ fontSize: 14, color: '#1E4FA8', fontWeight: 'bold' }}&gt;37 / 38&lt;/Text&gt;&#10;  &lt;/Box&gt;&#10;  &lt;Box style={{ flex: 1, padding: '10px 40px 0 40px', flexDirection: 'row', gap: 24 }}&gt;&#10;    &lt;Box style={{ flex: 5, flexDirection: 'column', gap: 11, justifyContent: 'center' }}&gt;&#10;      {[&#10;        {&#10;          i: 'code',&#10;          tag: 'PLANTUML',&#10;          t: 'Reproduce two diagrams from their text specs',&#10;          d: 'The specs are on the course site under Week 03 — 03-project/specs/W03-text-specs.md: a four-class CampusBites domain model, and a sequence diagram. Commit both .puml files with their exported PNGs.',&#10;          due: 'Before the Week 04 class',&#10;        },&#10;        {&#10;          i: 'book-open',&#10;          tag: 'READING',&#10;          t: 'Fowler, UML Distilled — class and sequence chapters',&#10;          d: 'A skim is enough. Come back with one thing you disagree with, or one notation you had not met. We start Week 04 by collecting them.',&#10;          due: 'Before the Week 04 class',&#10;        },&#10;        {&#10;          i: 'folder-tree',&#10;          tag: 'PROJECT',&#10;          t: 'Create the team diagrams folder and commit the conventions',&#10;          d: 'docs/diagrams/ in the team repository, plus the six conventions from slide 30 written into a README. Every member should appear in the ownership table.',&#10;          due: 'End of this week',&#10;        },&#10;      ].map((h) =&gt; (&#10;        &lt;Box key={h.t} style={{ flexDirection: 'row', gap: 15, alignItems: 'flex-start', padding: '15px 18px', background: '#F7F9FC', borderRadius: 11, border: '1px solid #E5E7EB' }}&gt;&#10;          &lt;Box style={{ width: 42, height: 42, borderRadius: 10, background: '#E8EFF8', justifyContent: 'center', alignItems: 'center' }}&gt;&#10;            &lt;FAIcon name={h.i} style={{ fill: '#1E4FA8', width: 19, height: 19 }} /&gt;&#10;          &lt;/Box&gt;&#10;          &lt;Box style={{ flex: 1, flexDirection: 'column', gap: 4 }}&gt;&#10;            &lt;Box style={{ flexDirection: 'row', alignItems: 'center', gap: 10 }}&gt;&#10;              &lt;Box style={{ padding: '2px 9px', background: '#0E3F8C', borderRadius: 9 }}&gt;&#10;                &lt;Text style={{ fontSize: 11, color: '#FFFFFF', fontWeight: 'bold', letterSpacing: 1 }}&gt;{h.tag}&lt;/Text&gt;&#10;              &lt;/Box&gt;&#10;              &lt;Text style={{ fontSize: 12.5, color: '#8B97A8' }}&gt;{h.due}&lt;/Text&gt;&#10;            &lt;/Box&gt;&#10;            &lt;Text style={{ fontSize: 16.5, fontWeight: 'bold', color: '#0E3F8C', lineHeight: 1.35 }}&gt;{h.t}&lt;/Text&gt;&#10;            &lt;Text style={{ fontSize: 13.5, color: '#4A5568', lineHeight: 1.5 }}&gt;{h.d}&lt;/Text&gt;&#10;          &lt;/Box&gt;&#10;        &lt;/Box&gt;&#10;      ))}&#10;    &lt;/Box&gt;&#10;    &lt;Box style={{ flex: 4, flexDirection: 'column', gap: 12, justifyContent: 'center' }}&gt;&#10;      &lt;Box style={{ padding: '18px 20px', background: '#0E3F8C', borderRadius: 12, flexDirection: 'column', gap: 8 }}&gt;&#10;        &lt;Text style={{ fontSize: 17, fontWeight: 'bold', color: '#FFFFFF' }}&gt;Why the reading is not optional homework filler&lt;/Text&gt;&#10;        &lt;Text style={{ fontSize: 14, color: '#C5D4EA', lineHeight: 1.55 }}&gt;Fowler writes in short, opinionated chapters and tells you which 20% of UML is worth your time. That is exactly the argument this lecture has been making — and he makes it in better English than I do.&lt;/Text&gt;&#10;      &lt;/Box&gt;&#10;      &lt;Box style={{ padding: '15px 18px', background: '#F0F5FC', borderRadius: 10, borderLeft: '4px solid #1E4FA8' }}&gt;&#10;        &lt;Text style={{ fontSize: 14, color: '#0E3F8C', lineHeight: 1.55, fontWeight: 'bold' }}&gt;The two PlantUML files count towards your individual contribution. Commit them from your own account, in your own words — even if the pair shared the keyboard.&lt;/Text&gt;&#10;      &lt;/Box&gt;&#10;      &lt;Box style={{ padding: '14px 16px', background: '#FFFFFF', borderRadius: 9, border: '1px dashed #D6DCE5' }}&gt;&#10;        &lt;Text style={{ fontSize: 13, color: '#8B97A8', lineHeight: 1.5 }}&gt;Stuck on syntax? plantuml.com/plantuml renders any snippet in the browser and shows the error inline. Use it, do not fight the extension.&lt;/Text&gt;&#10;      &lt;/Box&gt;&#10;    &lt;/Box&gt;&#10;  &lt;/Box&gt;&#10;  &lt;Box style={{ height: 42, background: '#0E3F8C', padding: '0 40px', flexDirection: 'row', alignItems: 'center', justifyContent: 'center' }}&gt;&#10;    &lt;Text style={{ fontSize: 16.5, color: '#FFFFFF', fontWeight: '600' }}&gt;Next week the requirements pack lands — and the use case stops being a picture and becomes a specification.&lt;/Text&gt;&#10;  &lt;/Box&gt;&#10;&lt;/Slide&gt;&#10;"/>
         <p:cNvGrpSpPr/>
         <p:nvPr/>
       </p:nvGrpSpPr>
@@ -27355,12 +28174,12 @@
         </p:nvSpPr>
         <p:spPr>
           <a:xfrm rot="0" flipH="0" flipV="0">
-            <a:off x="381000" y="1600200"/>
-            <a:ext cx="6219825" cy="1257300"/>
+            <a:off x="381000" y="1485900"/>
+            <a:ext cx="6219825" cy="1485900"/>
           </a:xfrm>
           <a:prstGeom prst="roundRect">
             <a:avLst>
-              <a:gd name="adj" fmla="val 8333"/>
+              <a:gd name="adj" fmla="val 7051"/>
             </a:avLst>
           </a:prstGeom>
           <a:solidFill>
@@ -27386,7 +28205,7 @@
         </p:nvSpPr>
         <p:spPr>
           <a:xfrm rot="0" flipH="0" flipV="0">
-            <a:off x="552450" y="1743075"/>
+            <a:off x="552450" y="1628775"/>
             <a:ext cx="400050" cy="400050"/>
           </a:xfrm>
           <a:prstGeom prst="roundRect">
@@ -27426,7 +28245,7 @@
         </p:blipFill>
         <p:spPr>
           <a:xfrm rot="0" flipH="0" flipV="0">
-            <a:off x="666750" y="1857375"/>
+            <a:off x="666750" y="1743075"/>
             <a:ext cx="180975" cy="180975"/>
           </a:xfrm>
           <a:prstGeom prst="rect">
@@ -27443,7 +28262,7 @@
         </p:nvSpPr>
         <p:spPr>
           <a:xfrm rot="0" flipH="0" flipV="0">
-            <a:off x="1095375" y="1743075"/>
+            <a:off x="1095375" y="1628775"/>
             <a:ext cx="828675" cy="171450"/>
           </a:xfrm>
           <a:prstGeom prst="roundRect">
@@ -27469,7 +28288,7 @@
         </p:nvSpPr>
         <p:spPr>
           <a:xfrm rot="0" flipH="0" flipV="0">
-            <a:off x="1181100" y="1762125"/>
+            <a:off x="1181100" y="1647825"/>
             <a:ext cx="657225" cy="133350"/>
           </a:xfrm>
           <a:prstGeom prst="rect"/>
@@ -27504,7 +28323,7 @@
         </p:nvSpPr>
         <p:spPr>
           <a:xfrm rot="0" flipH="0" flipV="0">
-            <a:off x="2019300" y="1762125"/>
+            <a:off x="2019300" y="1647825"/>
             <a:ext cx="1362075" cy="142875"/>
           </a:xfrm>
           <a:prstGeom prst="rect"/>
@@ -27539,7 +28358,7 @@
         </p:nvSpPr>
         <p:spPr>
           <a:xfrm rot="0" flipH="0" flipV="0">
-            <a:off x="1095375" y="1952625"/>
+            <a:off x="1095375" y="1838325"/>
             <a:ext cx="5334000" cy="257175"/>
           </a:xfrm>
           <a:prstGeom prst="rect"/>
@@ -27574,8 +28393,8 @@
         </p:nvSpPr>
         <p:spPr>
           <a:xfrm rot="0" flipH="0" flipV="0">
-            <a:off x="1095375" y="2247900"/>
-            <a:ext cx="5334000" cy="466725"/>
+            <a:off x="1095375" y="2133600"/>
+            <a:ext cx="5334000" cy="695325"/>
           </a:xfrm>
           <a:prstGeom prst="rect"/>
         </p:spPr>
@@ -27597,7 +28416,7 @@
                 <a:latin typeface="Microsoft YaHei"/>
                 <a:ea typeface="Microsoft YaHei"/>
               </a:rPr>
-              <a:t>The specs are on the course site under Week 03: a four-class CampusBites domain sketch, and the Order state machine from slide 24. Commit both .puml files with their exported PNGs.</a:t>
+              <a:t>The specs are on the course site under Week 03 — 03-project/specs/W03-text-specs.md: a four-class CampusBites domain model, and a sequence diagram. Commit both .puml files with their exported PNGs.</a:t>
             </a:r>
             <a:endParaRPr/>
           </a:p>
@@ -27611,7 +28430,7 @@
         </p:nvSpPr>
         <p:spPr>
           <a:xfrm rot="0" flipH="0" flipV="0">
-            <a:off x="381000" y="2962275"/>
+            <a:off x="381000" y="3076575"/>
             <a:ext cx="6219825" cy="1257300"/>
           </a:xfrm>
           <a:prstGeom prst="roundRect">
@@ -27642,7 +28461,7 @@
         </p:nvSpPr>
         <p:spPr>
           <a:xfrm rot="0" flipH="0" flipV="0">
-            <a:off x="552450" y="3105150"/>
+            <a:off x="552450" y="3219450"/>
             <a:ext cx="400050" cy="400050"/>
           </a:xfrm>
           <a:prstGeom prst="roundRect">
@@ -27682,7 +28501,7 @@
         </p:blipFill>
         <p:spPr>
           <a:xfrm rot="0" flipH="0" flipV="0">
-            <a:off x="666750" y="3219450"/>
+            <a:off x="666750" y="3333750"/>
             <a:ext cx="180975" cy="180975"/>
           </a:xfrm>
           <a:prstGeom prst="rect">
@@ -27699,7 +28518,7 @@
         </p:nvSpPr>
         <p:spPr>
           <a:xfrm rot="0" flipH="0" flipV="0">
-            <a:off x="1095375" y="3105150"/>
+            <a:off x="1095375" y="3219450"/>
             <a:ext cx="723900" cy="171450"/>
           </a:xfrm>
           <a:prstGeom prst="roundRect">
@@ -27725,7 +28544,7 @@
         </p:nvSpPr>
         <p:spPr>
           <a:xfrm rot="0" flipH="0" flipV="0">
-            <a:off x="1181100" y="3124200"/>
+            <a:off x="1181100" y="3238500"/>
             <a:ext cx="552450" cy="133350"/>
           </a:xfrm>
           <a:prstGeom prst="rect"/>
@@ -27760,7 +28579,7 @@
         </p:nvSpPr>
         <p:spPr>
           <a:xfrm rot="0" flipH="0" flipV="0">
-            <a:off x="1914525" y="3124200"/>
+            <a:off x="1914525" y="3238500"/>
             <a:ext cx="1362075" cy="142875"/>
           </a:xfrm>
           <a:prstGeom prst="rect"/>
@@ -27795,7 +28614,7 @@
         </p:nvSpPr>
         <p:spPr>
           <a:xfrm rot="0" flipH="0" flipV="0">
-            <a:off x="1095375" y="3314700"/>
+            <a:off x="1095375" y="3429000"/>
             <a:ext cx="5334000" cy="257175"/>
           </a:xfrm>
           <a:prstGeom prst="rect"/>
@@ -27830,7 +28649,7 @@
         </p:nvSpPr>
         <p:spPr>
           <a:xfrm rot="0" flipH="0" flipV="0">
-            <a:off x="1095375" y="3609975"/>
+            <a:off x="1095375" y="3724275"/>
             <a:ext cx="5334000" cy="466725"/>
           </a:xfrm>
           <a:prstGeom prst="rect"/>
@@ -27867,7 +28686,7 @@
         </p:nvSpPr>
         <p:spPr>
           <a:xfrm rot="0" flipH="0" flipV="0">
-            <a:off x="381000" y="4324350"/>
+            <a:off x="381000" y="4438650"/>
             <a:ext cx="6219825" cy="1257300"/>
           </a:xfrm>
           <a:prstGeom prst="roundRect">
@@ -27898,7 +28717,7 @@
         </p:nvSpPr>
         <p:spPr>
           <a:xfrm rot="0" flipH="0" flipV="0">
-            <a:off x="552450" y="4467225"/>
+            <a:off x="552450" y="4581525"/>
             <a:ext cx="400050" cy="400050"/>
           </a:xfrm>
           <a:prstGeom prst="roundRect">
@@ -27938,7 +28757,7 @@
         </p:blipFill>
         <p:spPr>
           <a:xfrm rot="0" flipH="0" flipV="0">
-            <a:off x="666750" y="4581525"/>
+            <a:off x="666750" y="4695825"/>
             <a:ext cx="180975" cy="180975"/>
           </a:xfrm>
           <a:prstGeom prst="rect">
@@ -27955,7 +28774,7 @@
         </p:nvSpPr>
         <p:spPr>
           <a:xfrm rot="0" flipH="0" flipV="0">
-            <a:off x="1095375" y="4467225"/>
+            <a:off x="1095375" y="4581525"/>
             <a:ext cx="733425" cy="171450"/>
           </a:xfrm>
           <a:prstGeom prst="roundRect">
@@ -27981,7 +28800,7 @@
         </p:nvSpPr>
         <p:spPr>
           <a:xfrm rot="0" flipH="0" flipV="0">
-            <a:off x="1181100" y="4486275"/>
+            <a:off x="1181100" y="4600575"/>
             <a:ext cx="561975" cy="133350"/>
           </a:xfrm>
           <a:prstGeom prst="rect"/>
@@ -28016,7 +28835,7 @@
         </p:nvSpPr>
         <p:spPr>
           <a:xfrm rot="0" flipH="0" flipV="0">
-            <a:off x="1924050" y="4486275"/>
+            <a:off x="1924050" y="4600575"/>
             <a:ext cx="876300" cy="142875"/>
           </a:xfrm>
           <a:prstGeom prst="rect"/>
@@ -28051,7 +28870,7 @@
         </p:nvSpPr>
         <p:spPr>
           <a:xfrm rot="0" flipH="0" flipV="0">
-            <a:off x="1095375" y="4676775"/>
+            <a:off x="1095375" y="4791075"/>
             <a:ext cx="5334000" cy="257175"/>
           </a:xfrm>
           <a:prstGeom prst="rect"/>
@@ -28086,7 +28905,7 @@
         </p:nvSpPr>
         <p:spPr>
           <a:xfrm rot="0" flipH="0" flipV="0">
-            <a:off x="1095375" y="4972050"/>
+            <a:off x="1095375" y="5086350"/>
             <a:ext cx="5334000" cy="466725"/>
           </a:xfrm>
           <a:prstGeom prst="rect"/>
@@ -28470,7 +29289,7 @@
   <p:cSld>
     <p:spTree>
       <p:nvGrpSpPr>
-        <p:cNvPr id="768" name="" descr="&lt;Slide style={{ background: '#0E3F8C', padding: 0 }}&gt;&#10;  &lt;Box style={{ flexDirection: 'column', height: '100%', justifyContent: 'center', padding: '0 80px', position: 'relative' }}&gt;&#10;    &lt;Box style={{ position: 'absolute', top: 0, left: 0, right: 0, height: 8, background: '#1E4FA8' }} /&gt;&#10;    &lt;Box style={{ position: 'absolute', top: 8, left: 0, right: 0, height: 2, background: '#3D7BD9' }} /&gt;&#10;    &lt;Text style={{ fontSize: 15, color: '#7FA2D6', letterSpacing: 2, marginBottom: 20 }}&gt;WEEK 03 · WRAP-UP&lt;/Text&gt;&#10;    &lt;Text style={{ fontSize: 46, fontWeight: 'bold', color: '#FFFFFF', fontFamily: 'Georgia, serif', lineHeight: 1.15 }}&gt;&#10;      Six diagrams.&lt;br /&gt;One question each.&#10;    &lt;/Text&gt;&#10;    &lt;Box style={{ width: 76, height: 4, background: '#FFC107', marginTop: 24, marginBottom: 24 }} /&gt;&#10;    &lt;Box style={{ flexDirection: 'row', gap: 12, marginBottom: 26 }}&gt;&#10;      {[&#10;        ['Use case', 'what it does'],&#10;        ['Class', 'what exists'],&#10;        ['Sequence', 'who calls whom'],&#10;        ['State', 'one life story'],&#10;        ['Activity', 'steps in parallel'],&#10;        ['Package', 'how it is cut'],&#10;      ].map(([t, d]) =&gt; (&#10;        &lt;Box key={t} style={{ flex: 1, padding: '14px 12px', background: '#1E4FA8', borderRadius: 10, flexDirection: 'column', gap: 4 }}&gt;&#10;          &lt;Text style={{ fontSize: 15.5, fontWeight: 'bold', color: '#FFFFFF' }}&gt;{t}&lt;/Text&gt;&#10;          &lt;Text style={{ fontSize: 12.5, color: '#B9CDF0', lineHeight: 1.4 }}&gt;{d}&lt;/Text&gt;&#10;        &lt;/Box&gt;&#10;      ))}&#10;    &lt;/Box&gt;&#10;    &lt;Text style={{ fontSize: 21, color: '#C5D4EA', lineHeight: 1.5 }}&gt;&#10;      Learn the question first. &lt;Text style={{ fontWeight: 'bold', color: '#FFC107' }}&gt;The notation is only the handwriting.&lt;/Text&gt;&#10;    &lt;/Text&gt;&#10;    &lt;Box style={{ position: 'absolute', bottom: 46, left: 80, right: 80, flexDirection: 'row', justifyContent: 'space-between', alignItems: 'center', borderTop: '1px solid #2B5793', paddingTop: 18 }}&gt;&#10;      &lt;Text style={{ fontSize: 17, color: '#C5D4EA' }}&gt;Next week — Requirements &amp;amp; Use Case Modelling: the CampusBites requirements pack arrives.&lt;/Text&gt;&#10;      &lt;Text style={{ fontSize: 17, color: '#FFC107', fontWeight: 'bold' }}&gt;Questions?&lt;/Text&gt;&#10;    &lt;/Box&gt;&#10;  &lt;/Box&gt;&#10;&lt;/Slide&gt;"/>
+        <p:cNvPr id="768" name=""/>
         <p:cNvGrpSpPr/>
         <p:nvPr/>
       </p:nvGrpSpPr>
@@ -28503,7 +29322,10 @@
         </p:spPr>
         <p:txBody>
           <a:bodyPr/>
-          <a:p/>
+          <a:p>
+            <a:pPr/>
+            <a:endParaRPr/>
+          </a:p>
         </p:txBody>
       </p:sp>
       <p:sp>
@@ -28615,7 +29437,10 @@
         </p:spPr>
         <p:txBody>
           <a:bodyPr/>
-          <a:p/>
+          <a:p>
+            <a:pPr/>
+            <a:endParaRPr/>
+          </a:p>
         </p:txBody>
       </p:sp>
       <p:sp>
@@ -28641,7 +29466,10 @@
         </p:spPr>
         <p:txBody>
           <a:bodyPr/>
-          <a:p/>
+          <a:p>
+            <a:pPr/>
+            <a:endParaRPr/>
+          </a:p>
         </p:txBody>
       </p:sp>
       <p:sp>
@@ -28737,7 +29565,10 @@
         </p:spPr>
         <p:txBody>
           <a:bodyPr/>
-          <a:p/>
+          <a:p>
+            <a:pPr/>
+            <a:endParaRPr/>
+          </a:p>
         </p:txBody>
       </p:sp>
       <p:sp>
@@ -28833,7 +29664,10 @@
         </p:spPr>
         <p:txBody>
           <a:bodyPr/>
-          <a:p/>
+          <a:p>
+            <a:pPr/>
+            <a:endParaRPr/>
+          </a:p>
         </p:txBody>
       </p:sp>
       <p:sp>
@@ -28929,7 +29763,10 @@
         </p:spPr>
         <p:txBody>
           <a:bodyPr/>
-          <a:p/>
+          <a:p>
+            <a:pPr/>
+            <a:endParaRPr/>
+          </a:p>
         </p:txBody>
       </p:sp>
       <p:sp>
@@ -29025,7 +29862,10 @@
         </p:spPr>
         <p:txBody>
           <a:bodyPr/>
-          <a:p/>
+          <a:p>
+            <a:pPr/>
+            <a:endParaRPr/>
+          </a:p>
         </p:txBody>
       </p:sp>
       <p:sp>
@@ -29121,7 +29961,10 @@
         </p:spPr>
         <p:txBody>
           <a:bodyPr/>
-          <a:p/>
+          <a:p>
+            <a:pPr/>
+            <a:endParaRPr/>
+          </a:p>
         </p:txBody>
       </p:sp>
       <p:sp>
@@ -29260,7 +30103,10 @@
         </p:spPr>
         <p:txBody>
           <a:bodyPr/>
-          <a:p/>
+          <a:p>
+            <a:pPr/>
+            <a:endParaRPr/>
+          </a:p>
         </p:txBody>
       </p:sp>
       <p:sp>
@@ -29284,7 +30130,10 @@
         </p:spPr>
         <p:txBody>
           <a:bodyPr/>
-          <a:p/>
+          <a:p>
+            <a:pPr/>
+            <a:endParaRPr/>
+          </a:p>
         </p:txBody>
       </p:sp>
       <p:sp>
@@ -29324,7 +30173,10 @@
         </p:spPr>
         <p:txBody>
           <a:bodyPr/>
-          <a:p/>
+          <a:p>
+            <a:pPr/>
+            <a:endParaRPr/>
+          </a:p>
         </p:txBody>
       </p:sp>
       <p:sp>
@@ -29407,7 +30259,7 @@
   <p:cSld>
     <p:spTree>
       <p:nvGrpSpPr>
-        <p:cNvPr id="797" name="" descr="&lt;Slide style={{ background: '#FFFFFF', padding: 0 }}&gt;&#10;  &lt;Box style={{ height: 72, background: '#1E4FA8', padding: '0 40px', flexDirection: 'row', alignItems: 'center', justifyContent: 'space-between' }}&gt;&#10;    &lt;Text style={{ fontSize: 15, color: '#B9CDF0', letterSpacing: 1 }}&gt;ISAD · INFORMATION SYSTEMS ANALYSIS &amp;amp; DESIGN&lt;/Text&gt;&#10;    &lt;Text style={{ fontSize: 15, color: '#B9CDF0' }}&gt;W03 · RECAP&lt;/Text&gt;&#10;  &lt;/Box&gt;&#10;  &lt;Box style={{ padding: '24px 40px 0 40px' }}&gt;&#10;    &lt;Text style={{ fontSize: 34, fontWeight: 'bold', color: '#0E3F8C' }}&gt;Where Week 02 Left Us&lt;/Text&gt;&#10;  &lt;/Box&gt;&#10;  &lt;Box style={{ flex: 1, padding: '20px 40px 0 40px', flexDirection: 'row', gap: 28 }}&gt;&#10;    &lt;Box style={{ flex: 3, flexDirection: 'column', gap: 10, justifyContent: 'center' }}&gt;&#10;      {[&#10;        ['cube', 'Objects hold state and behaviour', 'Encapsulation keeps the rules with the data.'],&#10;        ['cubes', 'Composition beats inheritance — usually', 'Prefer has-a; swap behaviour at runtime.'],&#10;        ['exchange-alt', 'Polymorphism: one message, many forms', 'Declare variables by what they do.'],&#10;        ['project-diagram', 'Responsibilities, not just syntax', 'OO analysis is deciding who owns what.'],&#10;      ].map(([icon, t, d]) =&gt; (&#10;        &lt;Box key={t} style={{ flexDirection: 'row', gap: 14, alignItems: 'center', padding: '13px 18px', background: '#F7F9FC', borderRadius: 10, border: '1px solid #E5E7EB' }}&gt;&#10;          &lt;Box style={{ width: 40, height: 40, borderRadius: 9, background: '#E8EFF8', justifyContent: 'center', alignItems: 'center' }}&gt;&#10;            &lt;FAIcon name={icon} style={{ fill: '#1E4FA8', width: 20, height: 20 }} /&gt;&#10;          &lt;/Box&gt;&#10;          &lt;Box style={{ flexDirection: 'column', gap: 2 }}&gt;&#10;            &lt;Text style={{ fontSize: 16, fontWeight: 'bold', color: '#1A2230' }}&gt;{t}&lt;/Text&gt;&#10;            &lt;Text style={{ fontSize: 13, color: '#8B97A8' }}&gt;{d}&lt;/Text&gt;&#10;          &lt;/Box&gt;&#10;        &lt;/Box&gt;&#10;      ))}&#10;    &lt;/Box&gt;&#10;    &lt;Box style={{ flex: 2, padding: '28px 26px', background: '#0E3F8C', borderRadius: 12, flexDirection: 'column', justifyContent: 'center', gap: 14 }}&gt;&#10;      &lt;FAIcon name='pen-fancy' style={{ fill: '#FFC107', width: 32, height: 32 }} /&gt;&#10;      &lt;Text style={{ fontSize: 22, fontWeight: 'bold', color: '#FFFFFF', lineHeight: 1.35 }}&gt;But you cannot hand a teammate a paragraph.&lt;/Text&gt;&#10;      &lt;Text style={{ fontSize: 16, color: '#C5D4EA', lineHeight: 1.55 }}&gt;Those four ideas live in your head. UML is how they get onto paper — precisely enough that someone else can check them.&lt;/Text&gt;&#10;      &lt;Box style={{ padding: '12px 16px', background: '#1E4FA8', borderRadius: 8 }}&gt;&#10;        &lt;Text style={{ fontSize: 15, color: '#B9CDF0', lineHeight: 1.45 }}&gt;Three people, three readings of a sentence. One diagram, one reading.&lt;/Text&gt;&#10;      &lt;/Box&gt;&#10;    &lt;/Box&gt;&#10;  &lt;/Box&gt;&#10;  &lt;Box style={{ height: 40, padding: '0 40px', flexDirection: 'row', alignItems: 'center', justifyContent: 'space-between' }}&gt;&#10;    &lt;Text style={{ fontSize: 13, color: '#8B97A8' }}&gt;ISAD · Fall 2026&lt;/Text&gt;&#10;    &lt;Text style={{ fontSize: 14, color: '#1E4FA8', fontWeight: 'bold' }}&gt;04 / 38&lt;/Text&gt;&#10;  &lt;/Box&gt;&#10;&lt;/Slide&gt;"/>
+        <p:cNvPr id="797" name=""/>
         <p:cNvGrpSpPr/>
         <p:nvPr/>
       </p:nvGrpSpPr>
@@ -29440,7 +30292,10 @@
         </p:spPr>
         <p:txBody>
           <a:bodyPr/>
-          <a:p/>
+          <a:p>
+            <a:pPr/>
+            <a:endParaRPr/>
+          </a:p>
         </p:txBody>
       </p:sp>
       <p:sp>
@@ -29464,7 +30319,10 @@
         </p:spPr>
         <p:txBody>
           <a:bodyPr/>
-          <a:p/>
+          <a:p>
+            <a:pPr/>
+            <a:endParaRPr/>
+          </a:p>
         </p:txBody>
       </p:sp>
       <p:sp>
@@ -29600,7 +30458,10 @@
         </p:spPr>
         <p:txBody>
           <a:bodyPr/>
-          <a:p/>
+          <a:p>
+            <a:pPr/>
+            <a:endParaRPr/>
+          </a:p>
         </p:txBody>
       </p:sp>
       <p:sp>
@@ -29626,7 +30487,10 @@
         </p:spPr>
         <p:txBody>
           <a:bodyPr/>
-          <a:p/>
+          <a:p>
+            <a:pPr/>
+            <a:endParaRPr/>
+          </a:p>
         </p:txBody>
       </p:sp>
       <p:pic>
@@ -29758,7 +30622,10 @@
         </p:spPr>
         <p:txBody>
           <a:bodyPr/>
-          <a:p/>
+          <a:p>
+            <a:pPr/>
+            <a:endParaRPr/>
+          </a:p>
         </p:txBody>
       </p:sp>
       <p:sp>
@@ -29784,7 +30651,10 @@
         </p:spPr>
         <p:txBody>
           <a:bodyPr/>
-          <a:p/>
+          <a:p>
+            <a:pPr/>
+            <a:endParaRPr/>
+          </a:p>
         </p:txBody>
       </p:sp>
       <p:pic>
@@ -29916,7 +30786,10 @@
         </p:spPr>
         <p:txBody>
           <a:bodyPr/>
-          <a:p/>
+          <a:p>
+            <a:pPr/>
+            <a:endParaRPr/>
+          </a:p>
         </p:txBody>
       </p:sp>
       <p:sp>
@@ -29942,7 +30815,10 @@
         </p:spPr>
         <p:txBody>
           <a:bodyPr/>
-          <a:p/>
+          <a:p>
+            <a:pPr/>
+            <a:endParaRPr/>
+          </a:p>
         </p:txBody>
       </p:sp>
       <p:pic>
@@ -30074,7 +30950,10 @@
         </p:spPr>
         <p:txBody>
           <a:bodyPr/>
-          <a:p/>
+          <a:p>
+            <a:pPr/>
+            <a:endParaRPr/>
+          </a:p>
         </p:txBody>
       </p:sp>
       <p:sp>
@@ -30100,7 +30979,10 @@
         </p:spPr>
         <p:txBody>
           <a:bodyPr/>
-          <a:p/>
+          <a:p>
+            <a:pPr/>
+            <a:endParaRPr/>
+          </a:p>
         </p:txBody>
       </p:sp>
       <p:pic>
@@ -30227,7 +31109,10 @@
         </p:spPr>
         <p:txBody>
           <a:bodyPr/>
-          <a:p/>
+          <a:p>
+            <a:pPr/>
+            <a:endParaRPr/>
+          </a:p>
         </p:txBody>
       </p:sp>
       <p:pic>
@@ -30358,7 +31243,10 @@
         </p:spPr>
         <p:txBody>
           <a:bodyPr/>
-          <a:p/>
+          <a:p>
+            <a:pPr/>
+            <a:endParaRPr/>
+          </a:p>
         </p:txBody>
       </p:sp>
       <p:sp>
@@ -30478,7 +31366,7 @@
   <p:cSld>
     <p:spTree>
       <p:nvGrpSpPr>
-        <p:cNvPr id="831" name="" descr="&lt;Slide style={{ background: '#FFFFFF', padding: 0 }}&gt;&#10;  &lt;Box style={{ height: 72, background: '#1E4FA8', padding: '0 40px', flexDirection: 'row', alignItems: 'center', justifyContent: 'space-between' }}&gt;&#10;    &lt;Text style={{ fontSize: 15, color: '#B9CDF0', letterSpacing: 1 }}&gt;ISAD · INFORMATION SYSTEMS ANALYSIS &amp;amp; DESIGN&lt;/Text&gt;&#10;    &lt;Text style={{ fontSize: 15, color: '#B9CDF0' }}&gt;W03 · WHY MODELS&lt;/Text&gt;&#10;  &lt;/Box&gt;&#10;  &lt;Box style={{ flex: 1, flexDirection: 'row', alignItems: 'center', padding: '20px 40px', gap: 40 }}&gt;&#10;    &lt;Box style={{ width: 280, alignItems: 'center', justifyContent: 'center' }}&gt;&#10;      &lt;Text style={{ fontSize: 190, fontWeight: 'bold', color: '#E8EFF8', fontFamily: 'Georgia, serif', lineHeight: 1 }}&gt;3&lt;/Text&gt;&#10;      &lt;Text style={{ fontSize: 20, fontWeight: 'bold', color: '#1E4FA8', letterSpacing: 2, marginTop: 6 }}&gt;REASONS&lt;/Text&gt;&#10;      &lt;Box style={{ width: 56, height: 4, background: '#FFC107', marginTop: 12 }} /&gt;&#10;    &lt;/Box&gt;&#10;    &lt;Box style={{ flex: 1, flexDirection: 'column', gap: 16 }}&gt;&#10;      {[&#10;        { n: '01', t: 'To abstract', d: 'A system is too big to hold in one head. A model throws away what does not matter.' },&#10;        { n: '02', t: 'To communicate', d: 'A diagram is a shared object you can point at. Ambiguity becomes visible.' },&#10;        { n: '03', t: 'To reason before building', d: 'Find the flaw in the model, not in the shipped system. Cheap to erase.' },&#10;      ].map((item) =&gt; (&#10;        &lt;Box key={item.n} style={{ flexDirection: 'row', alignItems: 'center', gap: 18, padding: '18px 22px', background: '#F0F5FC', borderRadius: 10, borderLeft: '4px solid #3D7BD9' }}&gt;&#10;          &lt;Text style={{ fontSize: 26, fontWeight: 'bold', color: '#3D7BD9', fontFamily: 'Georgia, serif' }}&gt;{item.n}&lt;/Text&gt;&#10;          &lt;Box style={{ flexDirection: 'column', gap: 3 }}&gt;&#10;            &lt;Text style={{ fontSize: 21, fontWeight: 'bold', color: '#0E3F8C' }}&gt;{item.t}&lt;/Text&gt;&#10;            &lt;Text style={{ fontSize: 15, color: '#4A5568', lineHeight: 1.5 }}&gt;{item.d}&lt;/Text&gt;&#10;          &lt;/Box&gt;&#10;        &lt;/Box&gt;&#10;      ))}&#10;    &lt;/Box&gt;&#10;  &lt;/Box&gt;&#10;  &lt;Box style={{ height: 56, background: '#0E3F8C', padding: '0 40px', flexDirection: 'row', alignItems: 'center', justifyContent: 'center' }}&gt;&#10;    &lt;Text style={{ fontSize: 18, color: '#FFFFFF', fontWeight: '600' }}&gt;If a model did not change a decision, it was decoration.&lt;/Text&gt;&#10;  &lt;/Box&gt;&#10;&lt;/Slide&gt;"/>
+        <p:cNvPr id="831" name=""/>
         <p:cNvGrpSpPr/>
         <p:nvPr/>
       </p:nvGrpSpPr>
@@ -30511,7 +31399,10 @@
         </p:spPr>
         <p:txBody>
           <a:bodyPr/>
-          <a:p/>
+          <a:p>
+            <a:pPr/>
+            <a:endParaRPr/>
+          </a:p>
         </p:txBody>
       </p:sp>
       <p:sp>
@@ -30535,7 +31426,10 @@
         </p:spPr>
         <p:txBody>
           <a:bodyPr/>
-          <a:p/>
+          <a:p>
+            <a:pPr/>
+            <a:endParaRPr/>
+          </a:p>
         </p:txBody>
       </p:sp>
       <p:sp>
@@ -30699,7 +31593,10 @@
         </p:spPr>
         <p:txBody>
           <a:bodyPr/>
-          <a:p/>
+          <a:p>
+            <a:pPr/>
+            <a:endParaRPr/>
+          </a:p>
         </p:txBody>
       </p:sp>
       <p:sp>
@@ -30725,7 +31622,10 @@
         </p:spPr>
         <p:txBody>
           <a:bodyPr/>
-          <a:p/>
+          <a:p>
+            <a:pPr/>
+            <a:endParaRPr/>
+          </a:p>
         </p:txBody>
       </p:sp>
       <p:sp>
@@ -30782,7 +31682,10 @@
         </p:spPr>
         <p:txBody>
           <a:bodyPr/>
-          <a:p/>
+          <a:p>
+            <a:pPr/>
+            <a:endParaRPr/>
+          </a:p>
         </p:txBody>
       </p:sp>
       <p:sp>
@@ -30913,7 +31816,10 @@
         </p:spPr>
         <p:txBody>
           <a:bodyPr/>
-          <a:p/>
+          <a:p>
+            <a:pPr/>
+            <a:endParaRPr/>
+          </a:p>
         </p:txBody>
       </p:sp>
       <p:sp>
@@ -30970,7 +31876,10 @@
         </p:spPr>
         <p:txBody>
           <a:bodyPr/>
-          <a:p/>
+          <a:p>
+            <a:pPr/>
+            <a:endParaRPr/>
+          </a:p>
         </p:txBody>
       </p:sp>
       <p:sp>
@@ -31101,7 +32010,10 @@
         </p:spPr>
         <p:txBody>
           <a:bodyPr/>
-          <a:p/>
+          <a:p>
+            <a:pPr/>
+            <a:endParaRPr/>
+          </a:p>
         </p:txBody>
       </p:sp>
       <p:sp>
@@ -31158,7 +32070,10 @@
         </p:spPr>
         <p:txBody>
           <a:bodyPr/>
-          <a:p/>
+          <a:p>
+            <a:pPr/>
+            <a:endParaRPr/>
+          </a:p>
         </p:txBody>
       </p:sp>
       <p:sp>
@@ -31287,7 +32202,10 @@
         </p:spPr>
         <p:txBody>
           <a:bodyPr/>
-          <a:p/>
+          <a:p>
+            <a:pPr/>
+            <a:endParaRPr/>
+          </a:p>
         </p:txBody>
       </p:sp>
       <p:sp>
@@ -31335,7 +32253,7 @@
   <p:cSld>
     <p:spTree>
       <p:nvGrpSpPr>
-        <p:cNvPr id="856" name="" descr="&lt;Slide style={{ background: '#FFFFFF', padding: 0 }}&gt;&#10;  &lt;Box style={{ height: 72, background: '#1E4FA8', padding: '0 40px', flexDirection: 'row', alignItems: 'center', justifyContent: 'space-between' }}&gt;&#10;    &lt;Text style={{ fontSize: 15, color: '#B9CDF0', letterSpacing: 1 }}&gt;ISAD · INFORMATION SYSTEMS ANALYSIS &amp;amp; DESIGN&lt;/Text&gt;&#10;    &lt;Text style={{ fontSize: 15, color: '#B9CDF0' }}&gt;W03 · WHY MODELS&lt;/Text&gt;&#10;  &lt;/Box&gt;&#10;  &lt;Box style={{ padding: '20px 40px 0 40px' }}&gt;&#10;    &lt;Text style={{ fontSize: 32, fontWeight: 'bold', color: '#0E3F8C' }}&gt;A Model Is True Enough&lt;/Text&gt;&#10;  &lt;/Box&gt;&#10;  &lt;Box style={{ flex: 1, padding: '8px 40px 0 40px', flexDirection: 'row', gap: 24 }}&gt;&#10;    &lt;Box style={{ flex: 5, justifyContent: 'center', alignItems: 'center' }}&gt;&#10;      &lt;svg width={620} height={400} viewBox='0 0 620 400'&gt;&#10;        &lt;rect x='24' y='14' width='380' height='136' rx='8' fill='#FFFFFF' stroke='#3D7BD9' strokeWidth='1.5' /&gt;&#10;        &lt;rect x='24' y='14' width='380' height='26' rx='8' fill='#E8EFF8' stroke='#3D7BD9' strokeWidth='1.5' /&gt;&#10;        &lt;text x='38' y='32' fill='#0E3F8C' fontSize='12.5' fontWeight='bold'&gt;Order — everything we could say&lt;/text&gt;&#10;        &lt;text x='38' y='58' fill='#4A5568' fontSize='11'&gt;- id&lt;/text&gt;&#10;        &lt;text x='38' y='71' fill='#4A5568' fontSize='11'&gt;- createdAt&lt;/text&gt;&#10;        &lt;text x='38' y='84' fill='#4A5568' fontSize='11'&gt;- updatedAt&lt;/text&gt;&#10;        &lt;text x='38' y='97' fill='#4A5568' fontSize='11'&gt;- customerId&lt;/text&gt;&#10;        &lt;text x='38' y='110' fill='#4A5568' fontSize='11'&gt;- courierId&lt;/text&gt;&#10;        &lt;text x='38' y='123' fill='#4A5568' fontSize='11'&gt;- restaurantId&lt;/text&gt;&#10;        &lt;text x='38' y='136' fill='#4A5568' fontSize='11'&gt;- items&lt;/text&gt;&#10;        &lt;text x='215' y='58' fill='#4A5568' fontSize='11'&gt;- subtotal&lt;/text&gt;&#10;        &lt;text x='215' y='71' fill='#4A5568' fontSize='11'&gt;- deliveryFee&lt;/text&gt;&#10;        &lt;text x='215' y='84' fill='#4A5568' fontSize='11'&gt;- tax&lt;/text&gt;&#10;        &lt;text x='215' y='97' fill='#4A5568' fontSize='11'&gt;- tip&lt;/text&gt;&#10;        &lt;text x='215' y='110' fill='#4A5568' fontSize='11'&gt;- total&lt;/text&gt;&#10;        &lt;text x='215' y='123' fill='#4A5568' fontSize='11'&gt;- status&lt;/text&gt;&#10;        &lt;text x='215' y='136' fill='#4A5568' fontSize='11'&gt;- deliveryAddress&lt;/text&gt;&#10;        &lt;line x1='404' y1='82' x2='420' y2='82' stroke='#D6DCE5' strokeWidth='1.5' /&gt;&#10;        &lt;text x='426' y='60' fill='#8B97A8' fontSize='11'&gt;Everything that could&lt;/text&gt;&#10;        &lt;text x='426' y='76' fill='#8B97A8' fontSize='11'&gt;be said. No omission,&lt;/text&gt;&#10;        &lt;text x='426' y='92' fill='#8B97A8' fontSize='11'&gt;and no insight either.&lt;/text&gt;&#10;&#10;        &lt;rect x='24' y='176' width='320' height='104' rx='8' fill='#FFFFFF' stroke='#1E4FA8' strokeWidth='2' /&gt;&#10;        &lt;rect x='24' y='176' width='320' height='26' rx='8' fill='#E8EFF8' stroke='#1E4FA8' strokeWidth='2' /&gt;&#10;        &lt;text x='38' y='194' fill='#0E3F8C' fontSize='12.5' fontWeight='bold'&gt;Order — what the business cares about&lt;/text&gt;&#10;        &lt;text x='38' y='218' fill='#1A2230' fontSize='11'&gt;- status&lt;/text&gt;&#10;        &lt;text x='38' y='238' fill='#1A2230' fontSize='11'&gt;- lines&lt;/text&gt;&#10;        &lt;text x='38' y='258' fill='#1A2230' fontSize='11'&gt;- total&lt;/text&gt;&#10;        &lt;line x1='344' y1='228' x2='420' y2='228' stroke='#D6DCE5' strokeWidth='1.5' /&gt;&#10;        &lt;text x='426' y='212' fill='#4A5568' fontSize='11'&gt;The words the business&lt;/text&gt;&#10;        &lt;text x='426' y='228' fill='#4A5568' fontSize='11'&gt;already uses. This is&lt;/text&gt;&#10;        &lt;text x='426' y='244' fill='#4A5568' fontSize='11'&gt;the analysis model.&lt;/text&gt;&#10;&#10;        &lt;rect x='24' y='302' width='250' height='76' rx='8' fill='#FFFFFF' stroke='#1E4FA8' strokeWidth='2' /&gt;&#10;        &lt;rect x='24' y='302' width='250' height='26' rx='8' fill='#E8EFF8' stroke='#1E4FA8' strokeWidth='2' /&gt;&#10;        &lt;text x='38' y='320' fill='#0E3F8C' fontSize='12.5' fontWeight='bold'&gt;Order — what the courier sees&lt;/text&gt;&#10;        &lt;text x='38' y='344' fill='#1A2230' fontSize='11'&gt;- status&lt;/text&gt;&#10;        &lt;text x='38' y='364' fill='#1A2230' fontSize='11'&gt;- deliveryAddress&lt;/text&gt;&#10;        &lt;line x1='274' y1='340' x2='420' y2='340' stroke='#D6DCE5' strokeWidth='1.5' /&gt;&#10;        &lt;text x='426' y='324' fill='#4A5568' fontSize='11'&gt;Two fields. Same object.&lt;/text&gt;&#10;        &lt;text x='426' y='340' fill='#4A5568' fontSize='11'&gt;A third model — and it&lt;/text&gt;&#10;        &lt;text x='426' y='356' fill='#4A5568' fontSize='11'&gt;is not wrong.&lt;/text&gt;&#10;      &lt;/svg&gt;&#10;    &lt;/Box&gt;&#10;    &lt;Box style={{ flex: 4, flexDirection: 'column', gap: 12, justifyContent: 'center' }}&gt;&#10;      &lt;Box style={{ padding: '18px 20px', background: '#F0F5FC', borderRadius: 10, borderLeft: '4px solid #1E4FA8' }}&gt;&#10;        &lt;Text style={{ fontSize: 18, fontWeight: 'bold', color: '#0E3F8C', lineHeight: 1.4 }}&gt;A model is not a copy of reality. It is an answer to a question.&lt;/Text&gt;&#10;      &lt;/Box&gt;&#10;      &lt;Box style={{ padding: '16px 18px', background: '#F7F9FC', borderRadius: 10, border: '1px solid #E5E7EB' }}&gt;&#10;        &lt;Text style={{ fontSize: 15, color: '#4A5568', lineHeight: 1.6 }}&gt;One Order, three models. The database wants ids and timestamps. The kitchen wants items and status. The courier wants an address. None of them is &quot;the&quot; Order — each is true enough for one purpose.&lt;/Text&gt;&#10;      &lt;/Box&gt;&#10;      &lt;Box style={{ padding: '16px 18px', background: '#FDF3F3', borderRadius: 10, borderLeft: '4px solid #D9534F' }}&gt;&#10;        &lt;Text style={{ fontSize: 15, color: '#4A5568', lineHeight: 1.6 }}&gt;&lt;Text style={{ fontWeight: 'bold', color: '#D9534F' }}&gt;Detail is cheap. Deciding what to leave out is the skill.&lt;/Text&gt;&lt;/Text&gt;&#10;      &lt;/Box&gt;&#10;      &lt;Box style={{ padding: '14px 16px', background: '#FFFFFF', borderRadius: 9, border: '1px dashed #D6DCE5' }}&gt;&#10;        &lt;Text style={{ fontSize: 14, color: '#8B97A8', lineHeight: 1.5 }}&gt;If your model omits nothing, you have written a second implementation — in a slower language.&lt;/Text&gt;&#10;      &lt;/Box&gt;&#10;    &lt;/Box&gt;&#10;  &lt;/Box&gt;&#10;  &lt;Box style={{ height: 40, padding: '0 40px', flexDirection: 'row', alignItems: 'center', justifyContent: 'space-between' }}&gt;&#10;    &lt;Text style={{ fontSize: 13, color: '#8B97A8' }}&gt;ISAD · Fall 2026&lt;/Text&gt;&#10;    &lt;Text style={{ fontSize: 14, color: '#1E4FA8', fontWeight: 'bold' }}&gt;06 / 38&lt;/Text&gt;&#10;  &lt;/Box&gt;&#10;&lt;/Slide&gt;"/>
+        <p:cNvPr id="856" name=""/>
         <p:cNvGrpSpPr/>
         <p:nvPr/>
       </p:nvGrpSpPr>
@@ -31368,7 +32286,10 @@
         </p:spPr>
         <p:txBody>
           <a:bodyPr/>
-          <a:p/>
+          <a:p>
+            <a:pPr/>
+            <a:endParaRPr/>
+          </a:p>
         </p:txBody>
       </p:sp>
       <p:sp>
@@ -31392,7 +32313,10 @@
         </p:spPr>
         <p:txBody>
           <a:bodyPr/>
-          <a:p/>
+          <a:p>
+            <a:pPr/>
+            <a:endParaRPr/>
+          </a:p>
         </p:txBody>
       </p:sp>
       <p:sp>
@@ -31554,7 +32478,10 @@
         </p:spPr>
         <p:txBody>
           <a:bodyPr/>
-          <a:p/>
+          <a:p>
+            <a:pPr/>
+            <a:endParaRPr/>
+          </a:p>
         </p:txBody>
       </p:sp>
       <p:sp>
@@ -31611,7 +32538,10 @@
         </p:spPr>
         <p:txBody>
           <a:bodyPr/>
-          <a:p/>
+          <a:p>
+            <a:pPr/>
+            <a:endParaRPr/>
+          </a:p>
         </p:txBody>
       </p:sp>
       <p:sp>
@@ -31679,7 +32609,10 @@
         </p:spPr>
         <p:txBody>
           <a:bodyPr/>
-          <a:p/>
+          <a:p>
+            <a:pPr/>
+            <a:endParaRPr/>
+          </a:p>
         </p:txBody>
       </p:sp>
       <p:sp>
@@ -31742,7 +32675,10 @@
         </p:spPr>
         <p:txBody>
           <a:bodyPr/>
-          <a:p/>
+          <a:p>
+            <a:pPr/>
+            <a:endParaRPr/>
+          </a:p>
         </p:txBody>
       </p:sp>
       <p:sp>
@@ -31799,7 +32735,10 @@
         </p:spPr>
         <p:txBody>
           <a:bodyPr/>
-          <a:p/>
+          <a:p>
+            <a:pPr/>
+            <a:endParaRPr/>
+          </a:p>
         </p:txBody>
       </p:sp>
       <p:sp>
@@ -31865,7 +32804,10 @@
         </p:spPr>
         <p:txBody>
           <a:bodyPr/>
-          <a:p/>
+          <a:p>
+            <a:pPr/>
+            <a:endParaRPr/>
+          </a:p>
         </p:txBody>
       </p:sp>
       <p:sp>
@@ -31985,7 +32927,7 @@
   <p:cSld>
     <p:spTree>
       <p:nvGrpSpPr>
-        <p:cNvPr id="875" name="" descr="&lt;Slide style={{ background: '#0E3F8C', padding: 0 }}&gt;&#10;  &lt;Box style={{ flexDirection: 'row', height: '100%', position: 'relative' }}&gt;&#10;    &lt;Box style={{ position: 'absolute', top: 0, left: 0, right: 0, height: 8, background: '#1E4FA8' }} /&gt;&#10;    &lt;Box style={{ width: 300, justifyContent: 'center', alignItems: 'center', borderRight: '1px solid #2B5793' }}&gt;&#10;      &lt;Text style={{ fontSize: 220, fontWeight: 'bold', color: '#3D7BD9', fontFamily: 'Georgia, serif', lineHeight: 1 }}&gt;02&lt;/Text&gt;&#10;    &lt;/Box&gt;&#10;    &lt;Box style={{ flex: 1, padding: '70px 64px', flexDirection: 'column', justifyContent: 'center' }}&gt;&#10;      &lt;Text style={{ fontSize: 15, color: '#7FA2D6', letterSpacing: 2, marginBottom: 18 }}&gt;PART 1 · LECTURE&lt;/Text&gt;&#10;      &lt;Text style={{ fontSize: 48, fontWeight: 'bold', color: '#FFFFFF', lineHeight: 1.18 }}&gt;The&lt;br /&gt;UML Map&lt;/Text&gt;&#10;      &lt;Box style={{ width: 64, height: 4, background: '#FFC107', marginTop: 26, marginBottom: 26 }} /&gt;&#10;      &lt;Box style={{ flexDirection: 'column', gap: 12 }}&gt;&#10;        {[&#10;          'Fourteen diagram types — you will use six',&#10;          'Structure asks what it IS; behaviour asks what it DOES',&#10;          'Every diagram exists to answer a specific question',&#10;        ].map((t) =&gt; (&#10;          &lt;Box key={t} style={{ flexDirection: 'row', alignItems: 'center', gap: 12 }}&gt;&#10;            &lt;Box style={{ width: 8, height: 8, borderRadius: 4, background: '#3D7BD9' }} /&gt;&#10;            &lt;Text style={{ fontSize: 20, color: '#C5D4EA' }}&gt;{t}&lt;/Text&gt;&#10;          &lt;/Box&gt;&#10;        ))}&#10;      &lt;/Box&gt;&#10;    &lt;/Box&gt;&#10;  &lt;/Box&gt;&#10;&lt;/Slide&gt;"/>
+        <p:cNvPr id="875" name=""/>
         <p:cNvGrpSpPr/>
         <p:nvPr/>
       </p:nvGrpSpPr>
@@ -32018,7 +32960,10 @@
         </p:spPr>
         <p:txBody>
           <a:bodyPr/>
-          <a:p/>
+          <a:p>
+            <a:pPr/>
+            <a:endParaRPr/>
+          </a:p>
         </p:txBody>
       </p:sp>
       <p:sp>
@@ -32058,7 +33003,10 @@
         </p:spPr>
         <p:txBody>
           <a:bodyPr/>
-          <a:p/>
+          <a:p>
+            <a:pPr/>
+            <a:endParaRPr/>
+          </a:p>
         </p:txBody>
       </p:sp>
       <p:sp>
@@ -32205,7 +33153,10 @@
         </p:spPr>
         <p:txBody>
           <a:bodyPr/>
-          <a:p/>
+          <a:p>
+            <a:pPr/>
+            <a:endParaRPr/>
+          </a:p>
         </p:txBody>
       </p:sp>
       <p:sp>
@@ -32231,7 +33182,10 @@
         </p:spPr>
         <p:txBody>
           <a:bodyPr/>
-          <a:p/>
+          <a:p>
+            <a:pPr/>
+            <a:endParaRPr/>
+          </a:p>
         </p:txBody>
       </p:sp>
       <p:sp>
@@ -32292,7 +33246,10 @@
         </p:spPr>
         <p:txBody>
           <a:bodyPr/>
-          <a:p/>
+          <a:p>
+            <a:pPr/>
+            <a:endParaRPr/>
+          </a:p>
         </p:txBody>
       </p:sp>
       <p:sp>
@@ -32353,7 +33310,10 @@
         </p:spPr>
         <p:txBody>
           <a:bodyPr/>
-          <a:p/>
+          <a:p>
+            <a:pPr/>
+            <a:endParaRPr/>
+          </a:p>
         </p:txBody>
       </p:sp>
       <p:sp>
@@ -32412,7 +33372,10 @@
         </p:spPr>
         <p:txBody>
           <a:bodyPr/>
-          <a:p/>
+          <a:p>
+            <a:pPr/>
+            <a:endParaRPr/>
+          </a:p>
         </p:txBody>
       </p:sp>
     </p:spTree>
@@ -32425,7 +33388,7 @@
   <p:cSld>
     <p:spTree>
       <p:nvGrpSpPr>
-        <p:cNvPr id="889" name="" descr="&lt;Slide style={{ background: '#FFFFFF', padding: 0 }}&gt;&#10;  &lt;Box style={{ height: 72, background: '#1E4FA8', padding: '0 40px', flexDirection: 'row', alignItems: 'center', justifyContent: 'space-between' }}&gt;&#10;    &lt;Text style={{ fontSize: 15, color: '#B9CDF0', letterSpacing: 1 }}&gt;ISAD · INFORMATION SYSTEMS ANALYSIS &amp;amp; DESIGN&lt;/Text&gt;&#10;    &lt;Text style={{ fontSize: 15, color: '#B9CDF0' }}&gt;W03 · THE UML MAP&lt;/Text&gt;&#10;  &lt;/Box&gt;&#10;  &lt;Box style={{ padding: '18px 40px 0 40px', flexDirection: 'row', alignItems: 'baseline', justifyContent: 'space-between' }}&gt;&#10;    &lt;Text style={{ fontSize: 30, fontWeight: 'bold', color: '#0E3F8C' }}&gt;Two Families, Fourteen Diagrams&lt;/Text&gt;&#10;    &lt;Text style={{ fontSize: 14, color: '#1E4FA8', fontWeight: 'bold' }}&gt;08 / 38&lt;/Text&gt;&#10;  &lt;/Box&gt;&#10;  &lt;Box style={{ flex: 1, padding: '6px 40px 0 40px', justifyContent: 'center', alignItems: 'center' }}&gt;&#10;    &lt;svg width={1180} height={350} viewBox='0 0 1180 350'&gt;&#10;      &lt;defs&gt;&#10;        &lt;marker id='ar08' markerWidth='8' markerHeight='8' refX='7' refY='4' orient='auto'&gt;&#10;          &lt;path d='M0,0 L8,4 L0,8 z' fill='#3D7BD9' /&gt;&#10;        &lt;/marker&gt;&#10;      &lt;/defs&gt;&#10;&#10;      &lt;text x='2' y='16' fill='#8B97A8' fontSize='13' letterSpacing='1.6'&gt;STRUCTURE — WHAT THE SYSTEM IS&lt;/text&gt;&#10;      &lt;rect x='2' y='24' width='34' height='3' fill='#1E4FA8' /&gt;&#10;&#10;      &lt;g transform='translate(0,40)'&gt;&#10;        &lt;rect x='2' y='0' width='156' height='76' rx='8' fill='#E8EFF8' stroke='#1E4FA8' strokeWidth='2' /&gt;&#10;        &lt;rect x='67' y='18' width='26' height='26' rx='2' fill='#FFFFFF' stroke='#3D7BD9' strokeWidth='1.5' /&gt;&#10;        &lt;line x1='67' y1='26.7' x2='93' y2='26.7' stroke='#3D7BD9' strokeWidth='1' /&gt;&#10;        &lt;line x1='67' y1='35.3' x2='93' y2='35.3' stroke='#3D7BD9' strokeWidth='1' /&gt;&#10;        &lt;text x='80' y='64' textAnchor='middle' fill='#0E3F8C' fontSize='13' fontWeight='bold'&gt;Class&lt;/text&gt;&#10;      &lt;/g&gt;&#10;      &lt;g transform='translate(170,40)'&gt;&#10;        &lt;rect x='2' y='0' width='156' height='76' rx='8' fill='#F7F9FC' stroke='#D6DCE5' strokeWidth='1' /&gt;&#10;        &lt;rect x='67' y='18' width='26' height='26' rx='2' fill='#FFFFFF' stroke='#8B97A8' strokeWidth='1.3' /&gt;&#10;        &lt;line x1='71' y1='27' x2='89' y2='27' stroke='#8B97A8' strokeWidth='1.3' /&gt;&#10;        &lt;line x1='70' y1='33' x2='90' y2='33' stroke='#8B97A8' strokeWidth='2.2' /&gt;&#10;        &lt;text x='80' y='64' textAnchor='middle' fill='#8B97A8' fontSize='13'&gt;Object&lt;/text&gt;&#10;      &lt;/g&gt;&#10;      &lt;g transform='translate(340,40)'&gt;&#10;        &lt;rect x='2' y='0' width='156' height='76' rx='8' fill='#E8EFF8' stroke='#1E4FA8' strokeWidth='2' /&gt;&#10;        &lt;rect x='67' y='18' width='11' height='7' fill='#FFFFFF' stroke='#3D7BD9' strokeWidth='1.2' /&gt;&#10;        &lt;rect x='67' y='24' width='26' height='20' fill='#FFFFFF' stroke='#3D7BD9' strokeWidth='1.5' /&gt;&#10;        &lt;text x='80' y='64' textAnchor='middle' fill='#0E3F8C' fontSize='13' fontWeight='bold'&gt;Package&lt;/text&gt;&#10;      &lt;/g&gt;&#10;      &lt;g transform='translate(510,40)'&gt;&#10;        &lt;rect x='2' y='0' width='156' height='76' rx='8' fill='#F7F9FC' stroke='#D6DCE5' strokeWidth='1' /&gt;&#10;        &lt;rect x='67' y='21' width='22' height='20' rx='2' fill='#FFFFFF' stroke='#8B97A8' strokeWidth='1.3' /&gt;&#10;        &lt;rect x='60' y='25' width='6' height='5' fill='#FFFFFF' stroke='#8B97A8' strokeWidth='1.1' /&gt;&#10;        &lt;rect x='60' y='32' width='6' height='5' fill='#FFFFFF' stroke='#8B97A8' strokeWidth='1.1' /&gt;&#10;        &lt;text x='80' y='64' textAnchor='middle' fill='#8B97A8' fontSize='13'&gt;Component&lt;/text&gt;&#10;      &lt;/g&gt;&#10;      &lt;g transform='translate(680,40)'&gt;&#10;        &lt;rect x='2' y='0' width='156' height='76' rx='8' fill='#F7F9FC' stroke='#D6DCE5' strokeWidth='1' /&gt;&#10;        &lt;rect x='66' y='17' width='28' height='28' rx='2' fill='#FFFFFF' stroke='#8B97A8' strokeWidth='1.3' /&gt;&#10;        &lt;rect x='73' y='24' width='14' height='14' rx='1' fill='#F0F5FC' stroke='#8B97A8' strokeWidth='1.1' /&gt;&#10;        &lt;text x='80' y='64' textAnchor='middle' fill='#8B97A8' fontSize='13'&gt;Composite&lt;/text&gt;&#10;      &lt;/g&gt;&#10;      &lt;g transform='translate(850,40)'&gt;&#10;        &lt;rect x='2' y='0' width='156' height='76' rx='8' fill='#F7F9FC' stroke='#D6DCE5' strokeWidth='1' /&gt;&#10;        &lt;path d='M69,25 L76,19 L92,19 L85,25 Z' fill='#FFFFFF' stroke='#8B97A8' strokeWidth='1.1' /&gt;&#10;        &lt;path d='M69,25 L69,39 L85,39 L85,25 Z' fill='#FFFFFF' stroke='#8B97A8' strokeWidth='1.1' /&gt;&#10;        &lt;path d='M92,19 L92,33 L85,39 L85,25 Z' fill='#F0F5FC' stroke='#8B97A8' strokeWidth='1.1' /&gt;&#10;        &lt;text x='80' y='64' textAnchor='middle' fill='#8B97A8' fontSize='13'&gt;Deployment&lt;/text&gt;&#10;      &lt;/g&gt;&#10;      &lt;g transform='translate(1020,40)'&gt;&#10;        &lt;rect x='2' y='0' width='156' height='76' rx='8' fill='#F7F9FC' stroke='#D6DCE5' strokeWidth='1' /&gt;&#10;        &lt;rect x='67' y='18' width='26' height='26' rx='2' fill='#FFFFFF' stroke='#8B97A8' strokeWidth='1.3' strokeDasharray='4 3' /&gt;&#10;        &lt;line x1='72' y1='31' x2='88' y2='31' stroke='#8B97A8' strokeWidth='1.3' /&gt;&#10;        &lt;text x='80' y='64' textAnchor='middle' fill='#8B97A8' fontSize='13'&gt;Profile&lt;/text&gt;&#10;      &lt;/g&gt;&#10;&#10;      &lt;text x='2' y='152' fill='#8B97A8' fontSize='13' letterSpacing='1.6'&gt;BEHAVIOUR — WHAT THE SYSTEM DOES&lt;/text&gt;&#10;      &lt;rect x='2' y='160' width='34' height='3' fill='#1E4FA8' /&gt;&#10;&#10;      &lt;g transform='translate(0,176)'&gt;&#10;        &lt;rect x='2' y='0' width='156' height='76' rx='8' fill='#E8EFF8' stroke='#1E4FA8' strokeWidth='2' /&gt;&#10;        &lt;ellipse cx='80' cy='31' rx='15' ry='10' fill='#FFFFFF' stroke='#3D7BD9' strokeWidth='1.5' /&gt;&#10;        &lt;text x='80' y='64' textAnchor='middle' fill='#0E3F8C' fontSize='13' fontWeight='bold'&gt;Use Case&lt;/text&gt;&#10;      &lt;/g&gt;&#10;      &lt;g transform='translate(170,176)'&gt;&#10;        &lt;rect x='2' y='0' width='156' height='76' rx='8' fill='#E8EFF8' stroke='#1E4FA8' strokeWidth='2' /&gt;&#10;        &lt;rect x='56' y='22' width='20' height='14' rx='7' fill='#FFFFFF' stroke='#3D7BD9' strokeWidth='1.4' /&gt;&#10;        &lt;line x1='76' y1='29' x2='83' y2='29' stroke='#3D7BD9' strokeWidth='1.4' markerEnd='url(#ar08)' /&gt;&#10;        &lt;rect x='84' y='22' width='20' height='14' rx='7' fill='#FFFFFF' stroke='#3D7BD9' strokeWidth='1.4' /&gt;&#10;        &lt;text x='80' y='64' textAnchor='middle' fill='#0E3F8C' fontSize='13' fontWeight='bold'&gt;Activity&lt;/text&gt;&#10;      &lt;/g&gt;&#10;      &lt;g transform='translate(340,176)'&gt;&#10;        &lt;rect x='2' y='0' width='156' height='76' rx='8' fill='#E8EFF8' stroke='#1E4FA8' strokeWidth='2' /&gt;&#10;        &lt;rect x='62' y='21' width='36' height='20' rx='10' fill='#FFFFFF' stroke='#3D7BD9' strokeWidth='1.5' /&gt;&#10;        &lt;line x1='62' y1='28' x2='98' y2='28' stroke='#3D7BD9' strokeWidth='1' /&gt;&#10;        &lt;text x='80' y='64' textAnchor='middle' fill='#0E3F8C' fontSize='13' fontWeight='bold'&gt;State Machine&lt;/text&gt;&#10;      &lt;/g&gt;&#10;      &lt;g transform='translate(510,176)'&gt;&#10;        &lt;rect x='2' y='0' width='156' height='76' rx='8' fill='#E8EFF8' stroke='#1E4FA8' strokeWidth='2' /&gt;&#10;        &lt;line x1='66' y1='18' x2='66' y2='44' stroke='#3D7BD9' strokeWidth='1' strokeDasharray='3 2' /&gt;&#10;        &lt;line x1='80' y1='18' x2='80' y2='44' stroke='#3D7BD9' strokeWidth='1' strokeDasharray='3 2' /&gt;&#10;        &lt;line x1='94' y1='18' x2='94' y2='44' stroke='#3D7BD9' strokeWidth='1' strokeDasharray='3 2' /&gt;&#10;        &lt;line x1='66' y1='30' x2='93' y2='30' stroke='#3D7BD9' strokeWidth='1.5' markerEnd='url(#ar08)' /&gt;&#10;        &lt;text x='80' y='64' textAnchor='middle' fill='#0E3F8C' fontSize='13' fontWeight='bold'&gt;Sequence&lt;/text&gt;&#10;      &lt;/g&gt;&#10;      &lt;g transform='translate(680,176)'&gt;&#10;        &lt;rect x='2' y='0' width='156' height='76' rx='8' fill='#F7F9FC' stroke='#D6DCE5' strokeWidth='1' /&gt;&#10;        &lt;line x1='66' y1='24' x2='94' y2='24' stroke='#8B97A8' strokeWidth='1' /&gt;&#10;        &lt;line x1='67' y1='26' x2='79' y2='41' stroke='#8B97A8' strokeWidth='1' /&gt;&#10;        &lt;line x1='93' y1='26' x2='81' y2='41' stroke='#8B97A8' strokeWidth='1' /&gt;&#10;        &lt;circle cx='66' cy='24' r='4' fill='#FFFFFF' stroke='#8B97A8' strokeWidth='1.2' /&gt;&#10;        &lt;circle cx='94' cy='24' r='4' fill='#FFFFFF' stroke='#8B97A8' strokeWidth='1.2' /&gt;&#10;        &lt;circle cx='80' cy='42' r='4' fill='#FFFFFF' stroke='#8B97A8' strokeWidth='1.2' /&gt;&#10;        &lt;text x='80' y='64' textAnchor='middle' fill='#8B97A8' fontSize='13'&gt;Communic.&lt;/text&gt;&#10;      &lt;/g&gt;&#10;      &lt;g transform='translate(850,176)'&gt;&#10;        &lt;rect x='2' y='0' width='156' height='76' rx='8' fill='#F7F9FC' stroke='#D6DCE5' strokeWidth='1' /&gt;&#10;        &lt;rect x='58' y='17' width='20' height='12' rx='2' fill='#FFFFFF' stroke='#8B97A8' strokeWidth='1.1' /&gt;&#10;        &lt;line x1='78' y1='23' x2='82' y2='23' stroke='#8B97A8' strokeWidth='1.1' markerEnd='url(#ar08)' /&gt;&#10;        &lt;rect x='82' y='17' width='20' height='12' rx='2' fill='#FFFFFF' stroke='#8B97A8' strokeWidth='1.1' /&gt;&#10;        &lt;line x1='68' y1='29' x2='68' y2='36' stroke='#8B97A8' strokeWidth='1.1' /&gt;&#10;        &lt;line x1='92' y1='29' x2='92' y2='36' stroke='#8B97A8' strokeWidth='1.1' /&gt;&#10;        &lt;rect x='68' y='36' width='24' height='12' rx='2' fill='#FFFFFF' stroke='#8B97A8' strokeWidth='1.1' /&gt;&#10;        &lt;text x='80' y='64' textAnchor='middle' fill='#8B97A8' fontSize='12'&gt;Interact. Overview&lt;/text&gt;&#10;      &lt;/g&gt;&#10;      &lt;g transform='translate(1020,176)'&gt;&#10;        &lt;rect x='2' y='0' width='156' height='76' rx='8' fill='#F7F9FC' stroke='#D6DCE5' strokeWidth='1' /&gt;&#10;        &lt;line x1='60' y1='42' x2='100' y2='42' stroke='#D6DCE5' strokeWidth='1' /&gt;&#10;        &lt;line x1='60' y1='17' x2='60' y2='42' stroke='#D6DCE5' strokeWidth='1' /&gt;&#10;        &lt;path d='M62,38 L74,38 L74,26 L86,26 L86,34 L98,34' fill='none' stroke='#8B97A8' strokeWidth='1.6' /&gt;&#10;        &lt;text x='80' y='64' textAnchor='middle' fill='#8B97A8' fontSize='13'&gt;Timing&lt;/text&gt;&#10;      &lt;/g&gt;&#10;&#10;      &lt;rect x='2' y='284' width='18' height='12' rx='3' fill='#E8EFF8' stroke='#1E4FA8' strokeWidth='2' /&gt;&#10;      &lt;text x='30' y='294' fill='#0E3F8C' fontSize='13' fontWeight='bold'&gt;The six we use in this course&lt;/text&gt;&#10;      &lt;rect x='260' y='284' width='18' height='12' rx='3' fill='#F7F9FC' stroke='#D6DCE5' strokeWidth='1' /&gt;&#10;      &lt;text x='288' y='294' fill='#8B97A8' fontSize='13'&gt;The other eight — real UML 2.5, but out of scope here&lt;/text&gt;&#10;      &lt;line x1='2' y1='312' x2='1178' y2='312' stroke='#E5E7EB' strokeWidth='1' /&gt;&#10;      &lt;text x='2' y='336' fill='#4A5568' fontSize='14'&gt;Competence is not knowing fourteen notations. It is knowing which one the question calls for.&lt;/text&gt;&#10;    &lt;/svg&gt;&#10;  &lt;/Box&gt;&#10;  &lt;Box style={{ height: 34, padding: '0 40px', flexDirection: 'row', alignItems: 'center', justifyContent: 'space-between' }}&gt;&#10;    &lt;Text style={{ fontSize: 13, color: '#8B97A8' }}&gt;ISAD · Fall 2026&lt;/Text&gt;&#10;    &lt;Text style={{ fontSize: 13, color: '#8B97A8' }}&gt;UML 2.5 diagram taxonomy&lt;/Text&gt;&#10;  &lt;/Box&gt;&#10;&lt;/Slide&gt;"/>
+        <p:cNvPr id="889" name=""/>
         <p:cNvGrpSpPr/>
         <p:nvPr/>
       </p:nvGrpSpPr>
@@ -32458,7 +33421,10 @@
         </p:spPr>
         <p:txBody>
           <a:bodyPr/>
-          <a:p/>
+          <a:p>
+            <a:pPr/>
+            <a:endParaRPr/>
+          </a:p>
         </p:txBody>
       </p:sp>
       <p:sp>
@@ -32482,7 +33448,10 @@
         </p:spPr>
         <p:txBody>
           <a:bodyPr/>
-          <a:p/>
+          <a:p>
+            <a:pPr/>
+            <a:endParaRPr/>
+          </a:p>
         </p:txBody>
       </p:sp>
       <p:sp>
@@ -32736,7 +33705,7 @@
   <p:cSld>
     <p:spTree>
       <p:nvGrpSpPr>
-        <p:cNvPr id="899" name="" descr="&lt;Slide style={{ background: '#FFFFFF', padding: 0 }}&gt;&#10;  &lt;Box style={{ height: 72, background: '#1E4FA8', padding: '0 40px', flexDirection: 'row', alignItems: 'center', justifyContent: 'space-between' }}&gt;&#10;    &lt;Text style={{ fontSize: 15, color: '#B9CDF0', letterSpacing: 1 }}&gt;ISAD · INFORMATION SYSTEMS ANALYSIS &amp;amp; DESIGN&lt;/Text&gt;&#10;    &lt;Text style={{ fontSize: 15, color: '#B9CDF0' }}&gt;W03 · THE UML MAP&lt;/Text&gt;&#10;  &lt;/Box&gt;&#10;  &lt;Box style={{ padding: '18px 40px 0 40px' }}&gt;&#10;    &lt;Text style={{ fontSize: 30, fontWeight: 'bold', color: '#0E3F8C' }}&gt;The Six That Matter Here&lt;/Text&gt;&#10;  &lt;/Box&gt;&#10;  &lt;Box style={{ flex: 1, padding: '12px 40px 0 40px', flexDirection: 'row', flexWrap: 'wrap', gap: 13, alignContent: 'center' }}&gt;&#10;    {[&#10;      { i: 'clipboard-list', t: 'Use Case', d: 'What the system does, and for whom. No internals, no screens.', w: 'Weeks 04–05' },&#10;      { i: 'project-diagram', t: 'Class', d: 'The concepts, their attributes, and the links between them.', w: 'Week 06 domain · 07 design' },&#10;      { i: 'stream', t: 'Sequence', d: 'Who sends which message to whom, and in what order.', w: 'Week 08' },&#10;      { i: 'circle-notch', t: 'State Machine', d: 'One object’s whole life, event by event.', w: 'Week 09' },&#10;      { i: 'sitemap', t: 'Activity', d: 'A flow of steps, including the ones that run in parallel.', w: 'Week 09' },&#10;      { i: 'box-open', t: 'Package', d: 'How the system is cut into parts that can be built apart.', w: 'Week 14' },&#10;    ].map((c) =&gt; (&#10;      &lt;Box key={c.t} style={{ width: '31.8%', padding: '15px 17px', background: '#F7F9FC', borderRadius: 10, border: '1px solid #E5E7EB', flexDirection: 'column', gap: 7 }}&gt;&#10;        &lt;Box style={{ flexDirection: 'row', alignItems: 'center', gap: 10 }}&gt;&#10;          &lt;Box style={{ width: 36, height: 36, borderRadius: 9, background: '#E8EFF8', justifyContent: 'center', alignItems: 'center' }}&gt;&#10;            &lt;FAIcon name={c.i} style={{ fill: '#1E4FA8', width: 18, height: 18 }} /&gt;&#10;          &lt;/Box&gt;&#10;          &lt;Text style={{ flex: 1, fontSize: 18, fontWeight: 'bold', color: '#0E3F8C' }}&gt;{c.t}&lt;/Text&gt;&#10;        &lt;/Box&gt;&#10;        &lt;Text style={{ fontSize: 14, color: '#4A5568', lineHeight: 1.5 }}&gt;{c.d}&lt;/Text&gt;&#10;        &lt;Box style={{ alignSelf: 'flex-start', padding: '4px 10px', background: '#E8EFF8', borderRadius: 12 }}&gt;&#10;          &lt;Text style={{ fontSize: 12, color: '#1E4FA8', fontWeight: 'bold' }}&gt;{c.w}&lt;/Text&gt;&#10;        &lt;/Box&gt;&#10;      &lt;/Box&gt;&#10;    ))}&#10;  &lt;/Box&gt;&#10;  &lt;Box style={{ height: 44, background: '#0E3F8C', padding: '0 40px', flexDirection: 'row', alignItems: 'center', justifyContent: 'center' }}&gt;&#10;    &lt;Text style={{ fontSize: 17, color: '#FFFFFF', fontWeight: '600' }}&gt;Each one is drawn in the week it becomes the answer to a real question — not before.&lt;/Text&gt;&#10;  &lt;/Box&gt;&#10;&lt;/Slide&gt;"/>
+        <p:cNvPr id="899" name=""/>
         <p:cNvGrpSpPr/>
         <p:nvPr/>
       </p:nvGrpSpPr>
@@ -32769,7 +33738,10 @@
         </p:spPr>
         <p:txBody>
           <a:bodyPr/>
-          <a:p/>
+          <a:p>
+            <a:pPr/>
+            <a:endParaRPr/>
+          </a:p>
         </p:txBody>
       </p:sp>
       <p:sp>
@@ -32793,7 +33765,10 @@
         </p:spPr>
         <p:txBody>
           <a:bodyPr/>
-          <a:p/>
+          <a:p>
+            <a:pPr/>
+            <a:endParaRPr/>
+          </a:p>
         </p:txBody>
       </p:sp>
       <p:sp>
@@ -32929,7 +33904,10 @@
         </p:spPr>
         <p:txBody>
           <a:bodyPr/>
-          <a:p/>
+          <a:p>
+            <a:pPr/>
+            <a:endParaRPr/>
+          </a:p>
         </p:txBody>
       </p:sp>
       <p:sp>
@@ -32955,7 +33933,10 @@
         </p:spPr>
         <p:txBody>
           <a:bodyPr/>
-          <a:p/>
+          <a:p>
+            <a:pPr/>
+            <a:endParaRPr/>
+          </a:p>
         </p:txBody>
       </p:sp>
       <p:pic>
@@ -33084,7 +34065,10 @@
         </p:spPr>
         <p:txBody>
           <a:bodyPr/>
-          <a:p/>
+          <a:p>
+            <a:pPr/>
+            <a:endParaRPr/>
+          </a:p>
         </p:txBody>
       </p:sp>
       <p:sp>
@@ -33150,7 +34134,10 @@
         </p:spPr>
         <p:txBody>
           <a:bodyPr/>
-          <a:p/>
+          <a:p>
+            <a:pPr/>
+            <a:endParaRPr/>
+          </a:p>
         </p:txBody>
       </p:sp>
       <p:sp>
@@ -33176,7 +34163,10 @@
         </p:spPr>
         <p:txBody>
           <a:bodyPr/>
-          <a:p/>
+          <a:p>
+            <a:pPr/>
+            <a:endParaRPr/>
+          </a:p>
         </p:txBody>
       </p:sp>
       <p:pic>
@@ -33305,7 +34295,10 @@
         </p:spPr>
         <p:txBody>
           <a:bodyPr/>
-          <a:p/>
+          <a:p>
+            <a:pPr/>
+            <a:endParaRPr/>
+          </a:p>
         </p:txBody>
       </p:sp>
       <p:sp>
@@ -33371,7 +34364,10 @@
         </p:spPr>
         <p:txBody>
           <a:bodyPr/>
-          <a:p/>
+          <a:p>
+            <a:pPr/>
+            <a:endParaRPr/>
+          </a:p>
         </p:txBody>
       </p:sp>
       <p:sp>
@@ -33397,7 +34393,10 @@
         </p:spPr>
         <p:txBody>
           <a:bodyPr/>
-          <a:p/>
+          <a:p>
+            <a:pPr/>
+            <a:endParaRPr/>
+          </a:p>
         </p:txBody>
       </p:sp>
       <p:pic>
@@ -33524,7 +34523,10 @@
         </p:spPr>
         <p:txBody>
           <a:bodyPr/>
-          <a:p/>
+          <a:p>
+            <a:pPr/>
+            <a:endParaRPr/>
+          </a:p>
         </p:txBody>
       </p:sp>
       <p:sp>
@@ -33590,7 +34592,10 @@
         </p:spPr>
         <p:txBody>
           <a:bodyPr/>
-          <a:p/>
+          <a:p>
+            <a:pPr/>
+            <a:endParaRPr/>
+          </a:p>
         </p:txBody>
       </p:sp>
       <p:sp>
@@ -33616,7 +34621,10 @@
         </p:spPr>
         <p:txBody>
           <a:bodyPr/>
-          <a:p/>
+          <a:p>
+            <a:pPr/>
+            <a:endParaRPr/>
+          </a:p>
         </p:txBody>
       </p:sp>
       <p:pic>
@@ -33743,7 +34751,10 @@
         </p:spPr>
         <p:txBody>
           <a:bodyPr/>
-          <a:p/>
+          <a:p>
+            <a:pPr/>
+            <a:endParaRPr/>
+          </a:p>
         </p:txBody>
       </p:sp>
       <p:sp>
@@ -33809,7 +34820,10 @@
         </p:spPr>
         <p:txBody>
           <a:bodyPr/>
-          <a:p/>
+          <a:p>
+            <a:pPr/>
+            <a:endParaRPr/>
+          </a:p>
         </p:txBody>
       </p:sp>
       <p:sp>
@@ -33835,7 +34849,10 @@
         </p:spPr>
         <p:txBody>
           <a:bodyPr/>
-          <a:p/>
+          <a:p>
+            <a:pPr/>
+            <a:endParaRPr/>
+          </a:p>
         </p:txBody>
       </p:sp>
       <p:pic>
@@ -33962,7 +34979,10 @@
         </p:spPr>
         <p:txBody>
           <a:bodyPr/>
-          <a:p/>
+          <a:p>
+            <a:pPr/>
+            <a:endParaRPr/>
+          </a:p>
         </p:txBody>
       </p:sp>
       <p:sp>
@@ -34028,7 +35048,10 @@
         </p:spPr>
         <p:txBody>
           <a:bodyPr/>
-          <a:p/>
+          <a:p>
+            <a:pPr/>
+            <a:endParaRPr/>
+          </a:p>
         </p:txBody>
       </p:sp>
       <p:sp>
@@ -34054,7 +35077,10 @@
         </p:spPr>
         <p:txBody>
           <a:bodyPr/>
-          <a:p/>
+          <a:p>
+            <a:pPr/>
+            <a:endParaRPr/>
+          </a:p>
         </p:txBody>
       </p:sp>
       <p:pic>
@@ -34181,7 +35207,10 @@
         </p:spPr>
         <p:txBody>
           <a:bodyPr/>
-          <a:p/>
+          <a:p>
+            <a:pPr/>
+            <a:endParaRPr/>
+          </a:p>
         </p:txBody>
       </p:sp>
       <p:sp>
@@ -34240,7 +35269,10 @@
         </p:spPr>
         <p:txBody>
           <a:bodyPr/>
-          <a:p/>
+          <a:p>
+            <a:pPr/>
+            <a:endParaRPr/>
+          </a:p>
         </p:txBody>
       </p:sp>
       <p:sp>

--- a/01-slides/W03-UML-Essentials-and-Modeling-Workflow.pptx
+++ b/01-slides/W03-UML-Essentials-and-Modeling-Workflow.pptx
@@ -8871,7 +8871,7 @@
   <p:cSld>
     <p:spTree>
       <p:nvGrpSpPr>
-        <p:cNvPr id="220" name=""/>
+        <p:cNvPr id="220" name="" descr="&lt;Slide style={{ background: '#FFFFFF', padding: 0 }}&gt;&#10;  &lt;Box style={{ flexDirection: 'row', height: '100%' }}&gt;&#10;    &lt;Box style={{ width: 320, background: '#0E3F8C', padding: '60px 44px', flexDirection: 'column', justifyContent: 'space-between' }}&gt;&#10;      &lt;Box&gt;&#10;        &lt;Box style={{ width: 40, height: 4, background: '#FFC107', marginBottom: 24 }} /&gt;&#10;        &lt;Text style={{ fontSize: 46, fontWeight: 'bold', color: '#FFFFFF', fontFamily: 'Georgia, serif', lineHeight: 1.15 }}&gt;Contents&lt;/Text&gt;&#10;        &lt;Text style={{ fontSize: 16, color: '#7FA2D6', marginTop: 18, letterSpacing: 1 }}&gt;WEEK 03 · ROADMAP&lt;/Text&gt;&#10;      &lt;/Box&gt;&#10;      &lt;Text style={{ fontSize: 15, color: '#5B84C4', lineHeight: 1.5 }}&gt;UML Essentials&lt;br /&gt;&amp;amp; Modeling Workflow&lt;/Text&gt;&#10;    &lt;/Box&gt;&#10;    &lt;Box style={{ flex: 1, padding: '56px 56px', flexDirection: 'column', gap: 18 }}&gt;&#10;      {[&#10;        { n: '01', t: 'Recap &amp; Why Models', p: '03' },&#10;        { n: '02', t: 'The UML Map', p: '07' },&#10;        { n: '03', t: 'Notation Boot Camp', p: '13' },&#10;        { n: '04', t: 'The Modeling Workflow', p: '20' },&#10;        { n: '05', t: 'Toolchain', p: '26' },&#10;        { n: '06', t: 'Lab — Exercises &amp; Team Setup', p: '31' },&#10;      ].map((item) =&gt; (&#10;        &lt;Box key={item.n} style={{ flexDirection: 'row', alignItems: 'center', gap: 20, padding: '16px 20px', background: '#F7F9FC', borderRadius: 10, border: '1px solid #E5E7EB' }}&gt;&#10;          &lt;Box style={{ width: 52, height: 52, borderRadius: 8, background: '#1E4FA8', justifyContent: 'center', alignItems: 'center' }}&gt;&#10;            &lt;Text style={{ fontSize: 22, fontWeight: 'bold', color: '#FFFFFF' }}&gt;{item.n}&lt;/Text&gt;&#10;          &lt;/Box&gt;&#10;          &lt;Text style={{ flex: 1, fontSize: 21, color: '#1A2230', fontWeight: '600' }}&gt;{item.t}&lt;/Text&gt;&#10;          &lt;Text style={{ fontSize: 20, color: '#8B97A8', fontWeight: 'bold' }}&gt;{item.p}&lt;/Text&gt;&#10;        &lt;/Box&gt;&#10;      ))}&#10;    &lt;/Box&gt;&#10;  &lt;/Box&gt;&#10;&lt;/Slide&gt;&#10;"/>
         <p:cNvGrpSpPr/>
         <p:nvPr/>
       </p:nvGrpSpPr>
@@ -8904,10 +8904,7 @@
         </p:spPr>
         <p:txBody>
           <a:bodyPr/>
-          <a:p>
-            <a:pPr/>
-            <a:endParaRPr/>
-          </a:p>
+          <a:p/>
         </p:txBody>
       </p:sp>
       <p:sp>
@@ -8931,10 +8928,7 @@
         </p:spPr>
         <p:txBody>
           <a:bodyPr/>
-          <a:p>
-            <a:pPr/>
-            <a:endParaRPr/>
-          </a:p>
+          <a:p/>
         </p:txBody>
       </p:sp>
       <p:sp>
@@ -8958,10 +8952,7 @@
         </p:spPr>
         <p:txBody>
           <a:bodyPr/>
-          <a:p>
-            <a:pPr/>
-            <a:endParaRPr/>
-          </a:p>
+          <a:p/>
         </p:txBody>
       </p:sp>
       <p:sp>
@@ -9115,10 +9106,7 @@
         </p:spPr>
         <p:txBody>
           <a:bodyPr/>
-          <a:p>
-            <a:pPr/>
-            <a:endParaRPr/>
-          </a:p>
+          <a:p/>
         </p:txBody>
       </p:sp>
       <p:sp>
@@ -9144,10 +9132,7 @@
         </p:spPr>
         <p:txBody>
           <a:bodyPr/>
-          <a:p>
-            <a:pPr/>
-            <a:endParaRPr/>
-          </a:p>
+          <a:p/>
         </p:txBody>
       </p:sp>
       <p:sp>
@@ -9214,7 +9199,7 @@
                 <a:latin typeface="Microsoft YaHei"/>
                 <a:ea typeface="Microsoft YaHei"/>
               </a:rPr>
-              <a:t>Recap &amp;amp; Why Models</a:t>
+              <a:t>Recap &amp; Why Models</a:t>
             </a:r>
             <a:endParaRPr/>
           </a:p>
@@ -9283,10 +9268,7 @@
         </p:spPr>
         <p:txBody>
           <a:bodyPr/>
-          <a:p>
-            <a:pPr/>
-            <a:endParaRPr/>
-          </a:p>
+          <a:p/>
         </p:txBody>
       </p:sp>
       <p:sp>
@@ -9312,10 +9294,7 @@
         </p:spPr>
         <p:txBody>
           <a:bodyPr/>
-          <a:p>
-            <a:pPr/>
-            <a:endParaRPr/>
-          </a:p>
+          <a:p/>
         </p:txBody>
       </p:sp>
       <p:sp>
@@ -9451,10 +9430,7 @@
         </p:spPr>
         <p:txBody>
           <a:bodyPr/>
-          <a:p>
-            <a:pPr/>
-            <a:endParaRPr/>
-          </a:p>
+          <a:p/>
         </p:txBody>
       </p:sp>
       <p:sp>
@@ -9480,10 +9456,7 @@
         </p:spPr>
         <p:txBody>
           <a:bodyPr/>
-          <a:p>
-            <a:pPr/>
-            <a:endParaRPr/>
-          </a:p>
+          <a:p/>
         </p:txBody>
       </p:sp>
       <p:sp>
@@ -9619,10 +9592,7 @@
         </p:spPr>
         <p:txBody>
           <a:bodyPr/>
-          <a:p>
-            <a:pPr/>
-            <a:endParaRPr/>
-          </a:p>
+          <a:p/>
         </p:txBody>
       </p:sp>
       <p:sp>
@@ -9648,10 +9618,7 @@
         </p:spPr>
         <p:txBody>
           <a:bodyPr/>
-          <a:p>
-            <a:pPr/>
-            <a:endParaRPr/>
-          </a:p>
+          <a:p/>
         </p:txBody>
       </p:sp>
       <p:sp>
@@ -9787,10 +9754,7 @@
         </p:spPr>
         <p:txBody>
           <a:bodyPr/>
-          <a:p>
-            <a:pPr/>
-            <a:endParaRPr/>
-          </a:p>
+          <a:p/>
         </p:txBody>
       </p:sp>
       <p:sp>
@@ -9816,10 +9780,7 @@
         </p:spPr>
         <p:txBody>
           <a:bodyPr/>
-          <a:p>
-            <a:pPr/>
-            <a:endParaRPr/>
-          </a:p>
+          <a:p/>
         </p:txBody>
       </p:sp>
       <p:sp>
@@ -9955,10 +9916,7 @@
         </p:spPr>
         <p:txBody>
           <a:bodyPr/>
-          <a:p>
-            <a:pPr/>
-            <a:endParaRPr/>
-          </a:p>
+          <a:p/>
         </p:txBody>
       </p:sp>
       <p:sp>
@@ -9984,10 +9942,7 @@
         </p:spPr>
         <p:txBody>
           <a:bodyPr/>
-          <a:p>
-            <a:pPr/>
-            <a:endParaRPr/>
-          </a:p>
+          <a:p/>
         </p:txBody>
       </p:sp>
       <p:sp>
@@ -10054,7 +10009,7 @@
                 <a:latin typeface="Microsoft YaHei"/>
                 <a:ea typeface="Microsoft YaHei"/>
               </a:rPr>
-              <a:t>Lab — Exercises &amp;amp; Team Setup</a:t>
+              <a:t>Lab — Exercises &amp; Team Setup</a:t>
             </a:r>
             <a:endParaRPr/>
           </a:p>
@@ -28060,7 +28015,7 @@
   <p:cSld>
     <p:spTree>
       <p:nvGrpSpPr>
-        <p:cNvPr id="730" name="" descr="&lt;Slide style={{ background: '#FFFFFF', padding: 0 }}&gt;&#10;  &lt;Box style={{ padding: '22px 40px 4px 40px', flexDirection: 'row', alignItems: 'center', justifyContent: 'space-between' }}&gt;&#10;    &lt;Text style={{ fontSize: 32, fontWeight: 'bold', color: '#0E3F8C' }}&gt;Homework&lt;/Text&gt;&#10;    &lt;Text style={{ fontSize: 14, color: '#1E4FA8', fontWeight: 'bold' }}&gt;37 / 38&lt;/Text&gt;&#10;  &lt;/Box&gt;&#10;  &lt;Box style={{ flex: 1, padding: '10px 40px 0 40px', flexDirection: 'row', gap: 24 }}&gt;&#10;    &lt;Box style={{ flex: 5, flexDirection: 'column', gap: 11, justifyContent: 'center' }}&gt;&#10;      {[&#10;        {&#10;          i: 'code',&#10;          tag: 'PLANTUML',&#10;          t: 'Reproduce two diagrams from their text specs',&#10;          d: 'The specs are on the course site under Week 03 — 03-project/specs/W03-text-specs.md: a four-class CampusBites domain model, and a sequence diagram. Commit both .puml files with their exported PNGs.',&#10;          due: 'Before the Week 04 class',&#10;        },&#10;        {&#10;          i: 'book-open',&#10;          tag: 'READING',&#10;          t: 'Fowler, UML Distilled — class and sequence chapters',&#10;          d: 'A skim is enough. Come back with one thing you disagree with, or one notation you had not met. We start Week 04 by collecting them.',&#10;          due: 'Before the Week 04 class',&#10;        },&#10;        {&#10;          i: 'folder-tree',&#10;          tag: 'PROJECT',&#10;          t: 'Create the team diagrams folder and commit the conventions',&#10;          d: 'docs/diagrams/ in the team repository, plus the six conventions from slide 30 written into a README. Every member should appear in the ownership table.',&#10;          due: 'End of this week',&#10;        },&#10;      ].map((h) =&gt; (&#10;        &lt;Box key={h.t} style={{ flexDirection: 'row', gap: 15, alignItems: 'flex-start', padding: '15px 18px', background: '#F7F9FC', borderRadius: 11, border: '1px solid #E5E7EB' }}&gt;&#10;          &lt;Box style={{ width: 42, height: 42, borderRadius: 10, background: '#E8EFF8', justifyContent: 'center', alignItems: 'center' }}&gt;&#10;            &lt;FAIcon name={h.i} style={{ fill: '#1E4FA8', width: 19, height: 19 }} /&gt;&#10;          &lt;/Box&gt;&#10;          &lt;Box style={{ flex: 1, flexDirection: 'column', gap: 4 }}&gt;&#10;            &lt;Box style={{ flexDirection: 'row', alignItems: 'center', gap: 10 }}&gt;&#10;              &lt;Box style={{ padding: '2px 9px', background: '#0E3F8C', borderRadius: 9 }}&gt;&#10;                &lt;Text style={{ fontSize: 11, color: '#FFFFFF', fontWeight: 'bold', letterSpacing: 1 }}&gt;{h.tag}&lt;/Text&gt;&#10;              &lt;/Box&gt;&#10;              &lt;Text style={{ fontSize: 12.5, color: '#8B97A8' }}&gt;{h.due}&lt;/Text&gt;&#10;            &lt;/Box&gt;&#10;            &lt;Text style={{ fontSize: 16.5, fontWeight: 'bold', color: '#0E3F8C', lineHeight: 1.35 }}&gt;{h.t}&lt;/Text&gt;&#10;            &lt;Text style={{ fontSize: 13.5, color: '#4A5568', lineHeight: 1.5 }}&gt;{h.d}&lt;/Text&gt;&#10;          &lt;/Box&gt;&#10;        &lt;/Box&gt;&#10;      ))}&#10;    &lt;/Box&gt;&#10;    &lt;Box style={{ flex: 4, flexDirection: 'column', gap: 12, justifyContent: 'center' }}&gt;&#10;      &lt;Box style={{ padding: '18px 20px', background: '#0E3F8C', borderRadius: 12, flexDirection: 'column', gap: 8 }}&gt;&#10;        &lt;Text style={{ fontSize: 17, fontWeight: 'bold', color: '#FFFFFF' }}&gt;Why the reading is not optional homework filler&lt;/Text&gt;&#10;        &lt;Text style={{ fontSize: 14, color: '#C5D4EA', lineHeight: 1.55 }}&gt;Fowler writes in short, opinionated chapters and tells you which 20% of UML is worth your time. That is exactly the argument this lecture has been making — and he makes it in better English than I do.&lt;/Text&gt;&#10;      &lt;/Box&gt;&#10;      &lt;Box style={{ padding: '15px 18px', background: '#F0F5FC', borderRadius: 10, borderLeft: '4px solid #1E4FA8' }}&gt;&#10;        &lt;Text style={{ fontSize: 14, color: '#0E3F8C', lineHeight: 1.55, fontWeight: 'bold' }}&gt;The two PlantUML files count towards your individual contribution. Commit them from your own account, in your own words — even if the pair shared the keyboard.&lt;/Text&gt;&#10;      &lt;/Box&gt;&#10;      &lt;Box style={{ padding: '14px 16px', background: '#FFFFFF', borderRadius: 9, border: '1px dashed #D6DCE5' }}&gt;&#10;        &lt;Text style={{ fontSize: 13, color: '#8B97A8', lineHeight: 1.5 }}&gt;Stuck on syntax? plantuml.com/plantuml renders any snippet in the browser and shows the error inline. Use it, do not fight the extension.&lt;/Text&gt;&#10;      &lt;/Box&gt;&#10;    &lt;/Box&gt;&#10;  &lt;/Box&gt;&#10;  &lt;Box style={{ height: 42, background: '#0E3F8C', padding: '0 40px', flexDirection: 'row', alignItems: 'center', justifyContent: 'center' }}&gt;&#10;    &lt;Text style={{ fontSize: 16.5, color: '#FFFFFF', fontWeight: '600' }}&gt;Next week the requirements pack lands — and the use case stops being a picture and becomes a specification.&lt;/Text&gt;&#10;  &lt;/Box&gt;&#10;&lt;/Slide&gt;&#10;"/>
+        <p:cNvPr id="730" name=""/>
         <p:cNvGrpSpPr/>
         <p:nvPr/>
       </p:nvGrpSpPr>
@@ -28093,7 +28048,10 @@
         </p:spPr>
         <p:txBody>
           <a:bodyPr/>
-          <a:p/>
+          <a:p>
+            <a:pPr/>
+            <a:endParaRPr/>
+          </a:p>
         </p:txBody>
       </p:sp>
       <p:sp>
@@ -28194,7 +28152,10 @@
         </p:spPr>
         <p:txBody>
           <a:bodyPr/>
-          <a:p/>
+          <a:p>
+            <a:pPr/>
+            <a:endParaRPr/>
+          </a:p>
         </p:txBody>
       </p:sp>
       <p:sp>
@@ -28220,7 +28181,10 @@
         </p:spPr>
         <p:txBody>
           <a:bodyPr/>
-          <a:p/>
+          <a:p>
+            <a:pPr/>
+            <a:endParaRPr/>
+          </a:p>
         </p:txBody>
       </p:sp>
       <p:pic>
@@ -28277,7 +28241,10 @@
         </p:spPr>
         <p:txBody>
           <a:bodyPr/>
-          <a:p/>
+          <a:p>
+            <a:pPr/>
+            <a:endParaRPr/>
+          </a:p>
         </p:txBody>
       </p:sp>
       <p:sp>
@@ -28450,7 +28417,10 @@
         </p:spPr>
         <p:txBody>
           <a:bodyPr/>
-          <a:p/>
+          <a:p>
+            <a:pPr/>
+            <a:endParaRPr/>
+          </a:p>
         </p:txBody>
       </p:sp>
       <p:sp>
@@ -28476,7 +28446,10 @@
         </p:spPr>
         <p:txBody>
           <a:bodyPr/>
-          <a:p/>
+          <a:p>
+            <a:pPr/>
+            <a:endParaRPr/>
+          </a:p>
         </p:txBody>
       </p:sp>
       <p:pic>
@@ -28533,7 +28506,10 @@
         </p:spPr>
         <p:txBody>
           <a:bodyPr/>
-          <a:p/>
+          <a:p>
+            <a:pPr/>
+            <a:endParaRPr/>
+          </a:p>
         </p:txBody>
       </p:sp>
       <p:sp>
@@ -28706,7 +28682,10 @@
         </p:spPr>
         <p:txBody>
           <a:bodyPr/>
-          <a:p/>
+          <a:p>
+            <a:pPr/>
+            <a:endParaRPr/>
+          </a:p>
         </p:txBody>
       </p:sp>
       <p:sp>
@@ -28732,7 +28711,10 @@
         </p:spPr>
         <p:txBody>
           <a:bodyPr/>
-          <a:p/>
+          <a:p>
+            <a:pPr/>
+            <a:endParaRPr/>
+          </a:p>
         </p:txBody>
       </p:sp>
       <p:pic>
@@ -28789,7 +28771,10 @@
         </p:spPr>
         <p:txBody>
           <a:bodyPr/>
-          <a:p/>
+          <a:p>
+            <a:pPr/>
+            <a:endParaRPr/>
+          </a:p>
         </p:txBody>
       </p:sp>
       <p:sp>
@@ -28957,7 +28942,10 @@
         </p:spPr>
         <p:txBody>
           <a:bodyPr/>
-          <a:p/>
+          <a:p>
+            <a:pPr/>
+            <a:endParaRPr/>
+          </a:p>
         </p:txBody>
       </p:sp>
       <p:sp>
@@ -29055,7 +29043,10 @@
         </p:spPr>
         <p:txBody>
           <a:bodyPr/>
-          <a:p/>
+          <a:p>
+            <a:pPr/>
+            <a:endParaRPr/>
+          </a:p>
         </p:txBody>
       </p:sp>
       <p:sp>
@@ -29112,7 +29103,10 @@
         </p:spPr>
         <p:txBody>
           <a:bodyPr/>
-          <a:p/>
+          <a:p>
+            <a:pPr/>
+            <a:endParaRPr/>
+          </a:p>
         </p:txBody>
       </p:sp>
       <p:sp>
@@ -29180,7 +29174,10 @@
         </p:spPr>
         <p:txBody>
           <a:bodyPr/>
-          <a:p/>
+          <a:p>
+            <a:pPr/>
+            <a:endParaRPr/>
+          </a:p>
         </p:txBody>
       </p:sp>
       <p:sp>
@@ -29241,7 +29238,10 @@
         </p:spPr>
         <p:txBody>
           <a:bodyPr/>
-          <a:p/>
+          <a:p>
+            <a:pPr/>
+            <a:endParaRPr/>
+          </a:p>
         </p:txBody>
       </p:sp>
       <p:sp>
